--- a/reports/presentation/Heart_Disease_Risk_Modelling.pptx
+++ b/reports/presentation/Heart_Disease_Risk_Modelling.pptx
@@ -4,6 +4,9 @@
   <p:sldMasterIdLst>
     <p:sldMasterId id="2147483648" r:id="rId1"/>
   </p:sldMasterIdLst>
+  <p:notesMasterIdLst>
+    <p:notesMasterId r:id="rId20"/>
+  </p:notesMasterIdLst>
   <p:sldIdLst>
     <p:sldId id="256" r:id="rId2"/>
     <p:sldId id="257" r:id="rId3"/>
@@ -24,9 +27,6 @@
     <p:sldId id="272" r:id="rId18"/>
     <p:sldId id="273" r:id="rId19"/>
   </p:sldIdLst>
-  <p:notesMasterIdLst>
-    <p:notesMasterId r:id="rId20"/>
-  </p:notesMasterIdLst>
   <p:sldSz cx="12192000" cy="6858000"/>
   <p:notesSz cx="6858000" cy="12192000"/>
   <p:defaultTextStyle>
@@ -124,21 +124,21 @@
   <p:extLst>
     <p:ext uri="{521415D9-36F7-43E2-AB2F-B90AF26B5E84}">
       <p14:sectionLst xmlns:p14="http://schemas.microsoft.com/office/powerpoint/2010/main">
-        <p14:section name="Introduction" id="{96a4f488-f30e-bc30-a5b2-114cdbf1f6be}">
+        <p14:section name="Introduction" id="{96A4F488-F30E-BC30-A5B2-114CDBF1F6BE}">
           <p14:sldIdLst>
             <p14:sldId id="256"/>
             <p14:sldId id="257"/>
             <p14:sldId id="258"/>
           </p14:sldIdLst>
         </p14:section>
-        <p14:section name="Data" id="{cba8d406-9b8c-4997-9bf7-f6e47aedbbaf}">
+        <p14:section name="Data" id="{CBA8D406-9B8C-4997-9BF7-F6E47AEDBBAF}">
           <p14:sldIdLst>
             <p14:sldId id="259"/>
             <p14:sldId id="260"/>
             <p14:sldId id="261"/>
           </p14:sldIdLst>
         </p14:section>
-        <p14:section name="Evaluation and models" id="{39e2975d-d10a-306d-84ab-6bf1893d3c8b}">
+        <p14:section name="Evaluation and models" id="{39E2975D-D10A-306D-84AB-6BF1893D3C8B}">
           <p14:sldIdLst>
             <p14:sldId id="262"/>
             <p14:sldId id="263"/>
@@ -148,14 +148,14 @@
             <p14:sldId id="267"/>
           </p14:sldIdLst>
         </p14:section>
-        <p14:section name="Results" id="{67e1d9f8-2a4c-9c04-0742-24bd0138ba41}">
+        <p14:section name="Results" id="{67E1D9F8-2A4C-9C04-0742-24BD0138BA41}">
           <p14:sldIdLst>
             <p14:sldId id="268"/>
             <p14:sldId id="269"/>
             <p14:sldId id="270"/>
           </p14:sldIdLst>
         </p14:section>
-        <p14:section name="Demo and conclusion" id="{92279fe9-c0e2-c371-102b-c12bb9ad8761}">
+        <p14:section name="Demo and conclusion" id="{92279FE9-C0E2-C371-102B-C12BB9AD8761}">
           <p14:sldIdLst>
             <p14:sldId id="271"/>
             <p14:sldId id="272"/>
@@ -172,9 +172,11 @@
 </file>
 
 <file path=ppt/charts/chart1.xml><?xml version="1.0" encoding="utf-8"?>
-<c:chartSpace xmlns:c="http://schemas.openxmlformats.org/drawingml/2006/chart" xmlns:a="http://schemas.openxmlformats.org/drawingml/2006/main" xmlns:r="http://schemas.openxmlformats.org/officeDocument/2006/relationships">
+<c:chartSpace xmlns:c="http://schemas.openxmlformats.org/drawingml/2006/chart" xmlns:a="http://schemas.openxmlformats.org/drawingml/2006/main" xmlns:r="http://schemas.openxmlformats.org/officeDocument/2006/relationships" xmlns:c16r2="http://schemas.microsoft.com/office/drawing/2015/06/chart">
   <c:date1904 val="0"/>
+  <c:lang val="en-US"/>
   <c:roundedCorners val="1"/>
+  <c:style val="2"/>
   <c:chart>
     <c:title>
       <c:tx>
@@ -191,7 +193,7 @@
               </a:defRPr>
             </a:pPr>
             <a:r>
-              <a:rPr sz="1400" b="0" i="0" u="none" strike="noStrike">
+              <a:rPr lang="en-US" sz="1400" b="0" i="0" u="none" strike="noStrike">
                 <a:solidFill>
                   <a:srgbClr val="1B2130"/>
                 </a:solidFill>
@@ -202,7 +204,6 @@
           </a:p>
         </c:rich>
       </c:tx>
-      <c:layout/>
       <c:overlay val="0"/>
     </c:title>
     <c:autoTitleDeleted val="0"/>
@@ -233,30 +234,6 @@
             <a:effectLst/>
           </c:spPr>
           <c:invertIfNegative val="0"/>
-          <c:dLbls>
-            <c:numFmt formatCode="#,##0" sourceLinked="0"/>
-            <c:txPr>
-              <a:bodyPr/>
-              <a:lstStyle/>
-              <a:p>
-                <a:pPr>
-                  <a:defRPr b="0" i="0" strike="noStrike" sz="1200" u="none">
-                    <a:solidFill>
-                      <a:srgbClr val="1B2130"/>
-                    </a:solidFill>
-                    <a:latin typeface="+mn-lt"/>
-                  </a:defRPr>
-                </a:pPr>
-              </a:p>
-            </c:txPr>
-            <c:showLegendKey val="0"/>
-            <c:showVal val="1"/>
-            <c:showCatName val="0"/>
-            <c:showSerName val="0"/>
-            <c:showPercent val="0"/>
-            <c:showBubbleSize val="0"/>
-            <c:showLeaderLines val="0"/>
-          </c:dLbls>
           <c:dPt>
             <c:idx val="0"/>
             <c:invertIfNegative val="0"/>
@@ -267,6 +244,11 @@
               </a:solidFill>
               <a:effectLst/>
             </c:spPr>
+            <c:extLst>
+              <c:ext xmlns:c16="http://schemas.microsoft.com/office/drawing/2014/chart" uri="{C3380CC4-5D6E-409C-BE32-E72D297353CC}">
+                <c16:uniqueId val="{00000001-153F-C544-AB28-66CB1ECE020A}"/>
+              </c:ext>
+            </c:extLst>
           </c:dPt>
           <c:dPt>
             <c:idx val="1"/>
@@ -278,6 +260,11 @@
               </a:solidFill>
               <a:effectLst/>
             </c:spPr>
+            <c:extLst>
+              <c:ext xmlns:c16="http://schemas.microsoft.com/office/drawing/2014/chart" uri="{C3380CC4-5D6E-409C-BE32-E72D297353CC}">
+                <c16:uniqueId val="{00000003-153F-C544-AB28-66CB1ECE020A}"/>
+              </c:ext>
+            </c:extLst>
           </c:dPt>
           <c:dPt>
             <c:idx val="2"/>
@@ -289,6 +276,11 @@
               </a:solidFill>
               <a:effectLst/>
             </c:spPr>
+            <c:extLst>
+              <c:ext xmlns:c16="http://schemas.microsoft.com/office/drawing/2014/chart" uri="{C3380CC4-5D6E-409C-BE32-E72D297353CC}">
+                <c16:uniqueId val="{00000005-153F-C544-AB28-66CB1ECE020A}"/>
+              </c:ext>
+            </c:extLst>
           </c:dPt>
           <c:dPt>
             <c:idx val="3"/>
@@ -300,6 +292,11 @@
               </a:solidFill>
               <a:effectLst/>
             </c:spPr>
+            <c:extLst>
+              <c:ext xmlns:c16="http://schemas.microsoft.com/office/drawing/2014/chart" uri="{C3380CC4-5D6E-409C-BE32-E72D297353CC}">
+                <c16:uniqueId val="{00000007-153F-C544-AB28-66CB1ECE020A}"/>
+              </c:ext>
+            </c:extLst>
           </c:dPt>
           <c:dPt>
             <c:idx val="4"/>
@@ -311,31 +308,71 @@
               </a:solidFill>
               <a:effectLst/>
             </c:spPr>
+            <c:extLst>
+              <c:ext xmlns:c16="http://schemas.microsoft.com/office/drawing/2014/chart" uri="{C3380CC4-5D6E-409C-BE32-E72D297353CC}">
+                <c16:uniqueId val="{00000009-153F-C544-AB28-66CB1ECE020A}"/>
+              </c:ext>
+            </c:extLst>
           </c:dPt>
+          <c:dLbls>
+            <c:numFmt formatCode="#,##0" sourceLinked="0"/>
+            <c:spPr>
+              <a:noFill/>
+              <a:ln>
+                <a:noFill/>
+              </a:ln>
+              <a:effectLst/>
+            </c:spPr>
+            <c:txPr>
+              <a:bodyPr/>
+              <a:lstStyle/>
+              <a:p>
+                <a:pPr>
+                  <a:defRPr sz="1200" b="0" i="0" u="none" strike="noStrike">
+                    <a:solidFill>
+                      <a:srgbClr val="1B2130"/>
+                    </a:solidFill>
+                    <a:latin typeface="+mn-lt"/>
+                  </a:defRPr>
+                </a:pPr>
+                <a:endParaRPr lang="en-US"/>
+              </a:p>
+            </c:txPr>
+            <c:showLegendKey val="0"/>
+            <c:showVal val="1"/>
+            <c:showCatName val="0"/>
+            <c:showSerName val="0"/>
+            <c:showPercent val="0"/>
+            <c:showBubbleSize val="0"/>
+            <c:showLeaderLines val="0"/>
+            <c:extLst>
+              <c:ext xmlns:c15="http://schemas.microsoft.com/office/drawing/2012/chart" uri="{CE6537A1-D6FC-4f65-9D91-7224C49458BB}">
+                <c15:showLeaderLines val="0"/>
+              </c:ext>
+            </c:extLst>
+          </c:dLbls>
           <c:cat>
-            <c:multiLvlStrRef>
+            <c:strRef>
               <c:f>Sheet1!$A$2:$A$6</c:f>
-              <c:multiLvlStrCache>
+              <c:strCache>
                 <c:ptCount val="5"/>
-                <c:lvl>
-                  <c:pt idx="0">
-                    <c:v>0 (none)</c:v>
-                  </c:pt>
-                  <c:pt idx="1">
-                    <c:v>1</c:v>
-                  </c:pt>
-                  <c:pt idx="2">
-                    <c:v>2</c:v>
-                  </c:pt>
-                  <c:pt idx="3">
-                    <c:v>3</c:v>
-                  </c:pt>
-                  <c:pt idx="4">
-                    <c:v>4</c:v>
-                  </c:pt>
-                </c:lvl>
-              </c:multiLvlStrCache>
-            </c:multiLvlStrRef>
+                <c:pt idx="0">
+                  <c:v>0 (none)</c:v>
+                </c:pt>
+                <c:pt idx="1">
+                  <c:v>1</c:v>
+                </c:pt>
+                <c:pt idx="2">
+                  <c:v>2</c:v>
+                </c:pt>
+                <c:pt idx="3">
+                  <c:v>3</c:v>
+                </c:pt>
+                <c:pt idx="4">
+                  <c:v>4</c:v>
+                </c:pt>
+              </c:strCache>
+            </c:strRef>
           </c:cat>
           <c:val>
             <c:numRef>
@@ -361,36 +398,23 @@
               </c:numCache>
             </c:numRef>
           </c:val>
+          <c:extLst>
+            <c:ext xmlns:c16="http://schemas.microsoft.com/office/drawing/2014/chart" uri="{C3380CC4-5D6E-409C-BE32-E72D297353CC}">
+              <c16:uniqueId val="{0000000A-153F-C544-AB28-66CB1ECE020A}"/>
+            </c:ext>
+          </c:extLst>
         </c:ser>
         <c:dLbls>
-          <c:numFmt formatCode="#,##0" sourceLinked="0"/>
-          <c:txPr>
-            <a:bodyPr/>
-            <a:lstStyle/>
-            <a:p>
-              <a:pPr>
-                <a:defRPr b="0" i="0" strike="noStrike" sz="1200" u="none">
-                  <a:solidFill>
-                    <a:srgbClr val="1B2130"/>
-                  </a:solidFill>
-                  <a:latin typeface="+mn-lt"/>
-                </a:defRPr>
-              </a:pPr>
-            </a:p>
-          </c:txPr>
           <c:showLegendKey val="0"/>
           <c:showVal val="1"/>
           <c:showCatName val="0"/>
           <c:showSerName val="0"/>
           <c:showPercent val="0"/>
           <c:showBubbleSize val="0"/>
-          <c:showLeaderLines val="0"/>
         </c:dLbls>
         <c:gapWidth val="150"/>
-        <c:overlap val="0"/>
         <c:axId val="2094734554"/>
         <c:axId val="2094734552"/>
-        <c:axId val="2094734556"/>
       </c:barChart>
       <c:catAx>
         <c:axId val="2094734554"/>
@@ -414,7 +438,7 @@
                   </a:defRPr>
                 </a:pPr>
                 <a:r>
-                  <a:rPr sz="1100" b="0" i="0" u="none" strike="noStrike">
+                  <a:rPr lang="en-US" sz="1100" b="0" i="0" u="none" strike="noStrike">
                     <a:solidFill>
                       <a:srgbClr val="5B6475"/>
                     </a:solidFill>
@@ -425,7 +449,6 @@
               </a:p>
             </c:rich>
           </c:tx>
-          <c:layout/>
           <c:overlay val="0"/>
         </c:title>
         <c:numFmt formatCode="General" sourceLinked="1"/>
@@ -460,6 +483,7 @@
         <c:crosses val="autoZero"/>
         <c:auto val="1"/>
         <c:lblAlgn val="ctr"/>
+        <c:lblOffset val="100"/>
         <c:noMultiLvlLbl val="1"/>
       </c:catAx>
       <c:valAx>
@@ -484,30 +508,6 @@
         <c:majorTickMark val="out"/>
         <c:minorTickMark val="none"/>
         <c:tickLblPos val="nextTo"/>
-        <c:spPr>
-          <a:ln w="12700" cap="flat">
-            <a:solidFill>
-              <a:srgbClr val="888888"/>
-            </a:solidFill>
-            <a:prstDash val="solid"/>
-            <a:round/>
-          </a:ln>
-        </c:spPr>
-        <c:txPr>
-          <a:bodyPr/>
-          <a:lstStyle/>
-          <a:p>
-            <a:pPr>
-              <a:defRPr sz="1100" b="0" i="0" u="none" strike="noStrike">
-                <a:solidFill>
-                  <a:srgbClr val="5B6475"/>
-                </a:solidFill>
-                <a:latin typeface="+mn-lt"/>
-              </a:defRPr>
-            </a:pPr>
-            <a:endParaRPr lang="en-US"/>
-          </a:p>
-        </c:txPr>
         <c:crossAx val="2094734554"/>
         <c:crosses val="autoZero"/>
         <c:crossBetween val="between"/>
@@ -522,6 +522,7 @@
     </c:plotArea>
     <c:plotVisOnly val="1"/>
     <c:dispBlanksAs val="span"/>
+    <c:showDLblsOverMax val="1"/>
   </c:chart>
   <c:spPr>
     <a:noFill/>
@@ -537,9 +538,11 @@
 </file>
 
 <file path=ppt/charts/chart2.xml><?xml version="1.0" encoding="utf-8"?>
-<c:chartSpace xmlns:c="http://schemas.openxmlformats.org/drawingml/2006/chart" xmlns:a="http://schemas.openxmlformats.org/drawingml/2006/main" xmlns:r="http://schemas.openxmlformats.org/officeDocument/2006/relationships">
+<c:chartSpace xmlns:c="http://schemas.openxmlformats.org/drawingml/2006/chart" xmlns:a="http://schemas.openxmlformats.org/drawingml/2006/main" xmlns:r="http://schemas.openxmlformats.org/officeDocument/2006/relationships" xmlns:c16r2="http://schemas.microsoft.com/office/drawing/2015/06/chart">
   <c:date1904 val="0"/>
+  <c:lang val="en-US"/>
   <c:roundedCorners val="1"/>
+  <c:style val="2"/>
   <c:chart>
     <c:title>
       <c:tx>
@@ -556,7 +559,7 @@
               </a:defRPr>
             </a:pPr>
             <a:r>
-              <a:rPr sz="1400" b="0" i="0" u="none" strike="noStrike">
+              <a:rPr lang="en-US" sz="1400" b="0" i="0" u="none" strike="noStrike">
                 <a:solidFill>
                   <a:srgbClr val="1B2130"/>
                 </a:solidFill>
@@ -567,7 +570,6 @@
           </a:p>
         </c:rich>
       </c:tx>
-      <c:layout/>
       <c:overlay val="0"/>
     </c:title>
     <c:autoTitleDeleted val="0"/>
@@ -598,30 +600,6 @@
             <a:effectLst/>
           </c:spPr>
           <c:invertIfNegative val="0"/>
-          <c:dLbls>
-            <c:numFmt formatCode="0.000" sourceLinked="0"/>
-            <c:txPr>
-              <a:bodyPr/>
-              <a:lstStyle/>
-              <a:p>
-                <a:pPr>
-                  <a:defRPr b="0" i="0" strike="noStrike" sz="1200" u="none">
-                    <a:solidFill>
-                      <a:srgbClr val="1B2130"/>
-                    </a:solidFill>
-                    <a:latin typeface="+mn-lt"/>
-                  </a:defRPr>
-                </a:pPr>
-              </a:p>
-            </c:txPr>
-            <c:showLegendKey val="0"/>
-            <c:showVal val="1"/>
-            <c:showCatName val="0"/>
-            <c:showSerName val="0"/>
-            <c:showPercent val="0"/>
-            <c:showBubbleSize val="0"/>
-            <c:showLeaderLines val="0"/>
-          </c:dLbls>
           <c:dPt>
             <c:idx val="0"/>
             <c:invertIfNegative val="0"/>
@@ -632,6 +610,11 @@
               </a:solidFill>
               <a:effectLst/>
             </c:spPr>
+            <c:extLst>
+              <c:ext xmlns:c16="http://schemas.microsoft.com/office/drawing/2014/chart" uri="{C3380CC4-5D6E-409C-BE32-E72D297353CC}">
+                <c16:uniqueId val="{00000001-90CA-2640-B9BE-098EC1C91565}"/>
+              </c:ext>
+            </c:extLst>
           </c:dPt>
           <c:dPt>
             <c:idx val="1"/>
@@ -643,6 +626,11 @@
               </a:solidFill>
               <a:effectLst/>
             </c:spPr>
+            <c:extLst>
+              <c:ext xmlns:c16="http://schemas.microsoft.com/office/drawing/2014/chart" uri="{C3380CC4-5D6E-409C-BE32-E72D297353CC}">
+                <c16:uniqueId val="{00000003-90CA-2640-B9BE-098EC1C91565}"/>
+              </c:ext>
+            </c:extLst>
           </c:dPt>
           <c:dPt>
             <c:idx val="2"/>
@@ -654,6 +642,11 @@
               </a:solidFill>
               <a:effectLst/>
             </c:spPr>
+            <c:extLst>
+              <c:ext xmlns:c16="http://schemas.microsoft.com/office/drawing/2014/chart" uri="{C3380CC4-5D6E-409C-BE32-E72D297353CC}">
+                <c16:uniqueId val="{00000005-90CA-2640-B9BE-098EC1C91565}"/>
+              </c:ext>
+            </c:extLst>
           </c:dPt>
           <c:dPt>
             <c:idx val="3"/>
@@ -665,6 +658,11 @@
               </a:solidFill>
               <a:effectLst/>
             </c:spPr>
+            <c:extLst>
+              <c:ext xmlns:c16="http://schemas.microsoft.com/office/drawing/2014/chart" uri="{C3380CC4-5D6E-409C-BE32-E72D297353CC}">
+                <c16:uniqueId val="{00000007-90CA-2640-B9BE-098EC1C91565}"/>
+              </c:ext>
+            </c:extLst>
           </c:dPt>
           <c:dPt>
             <c:idx val="4"/>
@@ -676,6 +674,11 @@
               </a:solidFill>
               <a:effectLst/>
             </c:spPr>
+            <c:extLst>
+              <c:ext xmlns:c16="http://schemas.microsoft.com/office/drawing/2014/chart" uri="{C3380CC4-5D6E-409C-BE32-E72D297353CC}">
+                <c16:uniqueId val="{00000009-90CA-2640-B9BE-098EC1C91565}"/>
+              </c:ext>
+            </c:extLst>
           </c:dPt>
           <c:dPt>
             <c:idx val="5"/>
@@ -687,34 +690,74 @@
               </a:solidFill>
               <a:effectLst/>
             </c:spPr>
+            <c:extLst>
+              <c:ext xmlns:c16="http://schemas.microsoft.com/office/drawing/2014/chart" uri="{C3380CC4-5D6E-409C-BE32-E72D297353CC}">
+                <c16:uniqueId val="{0000000B-90CA-2640-B9BE-098EC1C91565}"/>
+              </c:ext>
+            </c:extLst>
           </c:dPt>
+          <c:dLbls>
+            <c:numFmt formatCode="0.000" sourceLinked="0"/>
+            <c:spPr>
+              <a:noFill/>
+              <a:ln>
+                <a:noFill/>
+              </a:ln>
+              <a:effectLst/>
+            </c:spPr>
+            <c:txPr>
+              <a:bodyPr/>
+              <a:lstStyle/>
+              <a:p>
+                <a:pPr>
+                  <a:defRPr sz="1200" b="0" i="0" u="none" strike="noStrike">
+                    <a:solidFill>
+                      <a:srgbClr val="1B2130"/>
+                    </a:solidFill>
+                    <a:latin typeface="+mn-lt"/>
+                  </a:defRPr>
+                </a:pPr>
+                <a:endParaRPr lang="en-US"/>
+              </a:p>
+            </c:txPr>
+            <c:showLegendKey val="0"/>
+            <c:showVal val="1"/>
+            <c:showCatName val="0"/>
+            <c:showSerName val="0"/>
+            <c:showPercent val="0"/>
+            <c:showBubbleSize val="0"/>
+            <c:showLeaderLines val="0"/>
+            <c:extLst>
+              <c:ext xmlns:c15="http://schemas.microsoft.com/office/drawing/2012/chart" uri="{CE6537A1-D6FC-4f65-9D91-7224C49458BB}">
+                <c15:showLeaderLines val="0"/>
+              </c:ext>
+            </c:extLst>
+          </c:dLbls>
           <c:cat>
-            <c:multiLvlStrRef>
+            <c:strRef>
               <c:f>Sheet1!$A$2:$A$7</c:f>
-              <c:multiLvlStrCache>
+              <c:strCache>
                 <c:ptCount val="6"/>
-                <c:lvl>
-                  <c:pt idx="0">
-                    <c:v>Bayesian network</c:v>
-                  </c:pt>
-                  <c:pt idx="1">
-                    <c:v>Naive Bayes</c:v>
-                  </c:pt>
-                  <c:pt idx="2">
-                    <c:v>Logistic Regression</c:v>
-                  </c:pt>
-                  <c:pt idx="3">
-                    <c:v>SVM</c:v>
-                  </c:pt>
-                  <c:pt idx="4">
-                    <c:v>Random Forest</c:v>
-                  </c:pt>
-                  <c:pt idx="5">
-                    <c:v>Gradient Boosting</c:v>
-                  </c:pt>
-                </c:lvl>
-              </c:multiLvlStrCache>
-            </c:multiLvlStrRef>
+                <c:pt idx="0">
+                  <c:v>Bayesian network</c:v>
+                </c:pt>
+                <c:pt idx="1">
+                  <c:v>Naive Bayes</c:v>
+                </c:pt>
+                <c:pt idx="2">
+                  <c:v>Logistic Regression</c:v>
+                </c:pt>
+                <c:pt idx="3">
+                  <c:v>SVM</c:v>
+                </c:pt>
+                <c:pt idx="4">
+                  <c:v>Random Forest</c:v>
+                </c:pt>
+                <c:pt idx="5">
+                  <c:v>Gradient Boosting</c:v>
+                </c:pt>
+              </c:strCache>
+            </c:strRef>
           </c:cat>
           <c:val>
             <c:numRef>
@@ -726,16 +769,16 @@
                   <c:v>0.91</c:v>
                 </c:pt>
                 <c:pt idx="1">
-                  <c:v>0.905</c:v>
+                  <c:v>0.90500000000000003</c:v>
                 </c:pt>
                 <c:pt idx="2">
-                  <c:v>0.904</c:v>
+                  <c:v>0.90400000000000003</c:v>
                 </c:pt>
                 <c:pt idx="3">
-                  <c:v>0.907</c:v>
+                  <c:v>0.90700000000000003</c:v>
                 </c:pt>
                 <c:pt idx="4">
-                  <c:v>0.903</c:v>
+                  <c:v>0.90300000000000002</c:v>
                 </c:pt>
                 <c:pt idx="5">
                   <c:v>0.89</c:v>
@@ -743,36 +786,23 @@
               </c:numCache>
             </c:numRef>
           </c:val>
+          <c:extLst>
+            <c:ext xmlns:c16="http://schemas.microsoft.com/office/drawing/2014/chart" uri="{C3380CC4-5D6E-409C-BE32-E72D297353CC}">
+              <c16:uniqueId val="{0000000C-90CA-2640-B9BE-098EC1C91565}"/>
+            </c:ext>
+          </c:extLst>
         </c:ser>
         <c:dLbls>
-          <c:numFmt formatCode="0.000" sourceLinked="0"/>
-          <c:txPr>
-            <a:bodyPr/>
-            <a:lstStyle/>
-            <a:p>
-              <a:pPr>
-                <a:defRPr b="0" i="0" strike="noStrike" sz="1200" u="none">
-                  <a:solidFill>
-                    <a:srgbClr val="1B2130"/>
-                  </a:solidFill>
-                  <a:latin typeface="+mn-lt"/>
-                </a:defRPr>
-              </a:pPr>
-            </a:p>
-          </c:txPr>
           <c:showLegendKey val="0"/>
           <c:showVal val="1"/>
           <c:showCatName val="0"/>
           <c:showSerName val="0"/>
           <c:showPercent val="0"/>
           <c:showBubbleSize val="0"/>
-          <c:showLeaderLines val="0"/>
         </c:dLbls>
         <c:gapWidth val="150"/>
-        <c:overlap val="0"/>
         <c:axId val="2094734554"/>
         <c:axId val="2094734552"/>
-        <c:axId val="2094734556"/>
       </c:barChart>
       <c:catAx>
         <c:axId val="2094734554"/>
@@ -813,6 +843,7 @@
         <c:crosses val="autoZero"/>
         <c:auto val="1"/>
         <c:lblAlgn val="ctr"/>
+        <c:lblOffset val="100"/>
         <c:noMultiLvlLbl val="1"/>
       </c:catAx>
       <c:valAx>
@@ -823,7 +854,7 @@
           <c:min val="0.8"/>
         </c:scaling>
         <c:delete val="0"/>
-        <c:axPos val="b"/>
+        <c:axPos val="t"/>
         <c:majorGridlines>
           <c:spPr>
             <a:ln w="6350" cap="flat">
@@ -878,6 +909,7 @@
     </c:plotArea>
     <c:plotVisOnly val="1"/>
     <c:dispBlanksAs val="span"/>
+    <c:showDLblsOverMax val="1"/>
   </c:chart>
   <c:spPr>
     <a:noFill/>
@@ -914,234 +946,10 @@
           <a:chExt cx="0" cy="0"/>
         </a:xfrm>
       </p:grpSpPr>
-      <p:sp>
-        <p:nvSpPr>
-          <p:cNvPr id="2" name="Header Placeholder 1"/>
-          <p:cNvSpPr>
-            <a:spLocks noGrp="1"/>
-          </p:cNvSpPr>
-          <p:nvPr>
-            <p:ph type="hdr" sz="quarter"/>
-          </p:nvPr>
-        </p:nvSpPr>
-        <p:spPr>
-          <a:xfrm>
-            <a:off x="0" y="0"/>
-            <a:ext cx="2971800" cy="458788"/>
-          </a:xfrm>
-          <a:prstGeom prst="rect">
-            <a:avLst/>
-          </a:prstGeom>
-        </p:spPr>
-        <p:txBody>
-          <a:bodyPr vert="horz" lIns="91440" tIns="45720" rIns="91440" bIns="45720" rtlCol="0"/>
-          <a:lstStyle>
-            <a:lvl1pPr algn="l">
-              <a:defRPr sz="1200"/>
-            </a:lvl1pPr>
-          </a:lstStyle>
-          <a:p>
-            <a:endParaRPr lang="en-US"/>
-          </a:p>
-        </p:txBody>
-      </p:sp>
-      <p:sp>
-        <p:nvSpPr>
-          <p:cNvPr id="3" name="Date Placeholder 2"/>
-          <p:cNvSpPr>
-            <a:spLocks noGrp="1"/>
-          </p:cNvSpPr>
-          <p:nvPr>
-            <p:ph type="dt" idx="1"/>
-          </p:nvPr>
-        </p:nvSpPr>
-        <p:spPr>
-          <a:xfrm>
-            <a:off x="3884613" y="0"/>
-            <a:ext cx="2971800" cy="458788"/>
-          </a:xfrm>
-          <a:prstGeom prst="rect">
-            <a:avLst/>
-          </a:prstGeom>
-        </p:spPr>
-        <p:txBody>
-          <a:bodyPr vert="horz" lIns="91440" tIns="45720" rIns="91440" bIns="45720" rtlCol="0"/>
-          <a:lstStyle>
-            <a:lvl1pPr algn="r">
-              <a:defRPr sz="1200"/>
-            </a:lvl1pPr>
-          </a:lstStyle>
-          <a:p>
-            <a:fld id="{5282F153-3F37-0F45-9E97-73ACFA13230C}" type="datetimeFigureOut">
-              <a:rPr lang="en-US"/>
-              <a:t>7/23/19</a:t>
-            </a:fld>
-            <a:endParaRPr lang="en-US"/>
-          </a:p>
-        </p:txBody>
-      </p:sp>
-      <p:sp>
-        <p:nvSpPr>
-          <p:cNvPr id="4" name="Slide Image Placeholder 3"/>
-          <p:cNvSpPr>
-            <a:spLocks noGrp="1" noRot="1" noChangeAspect="1"/>
-          </p:cNvSpPr>
-          <p:nvPr>
-            <p:ph type="sldImg" idx="2"/>
-          </p:nvPr>
-        </p:nvSpPr>
-        <p:spPr>
-          <a:xfrm>
-            <a:off x="685800" y="1143000"/>
-            <a:ext cx="5486400" cy="3086100"/>
-          </a:xfrm>
-          <a:prstGeom prst="rect">
-            <a:avLst/>
-          </a:prstGeom>
-          <a:noFill/>
-          <a:ln w="12700">
-            <a:solidFill>
-              <a:prstClr val="black"/>
-            </a:solidFill>
-          </a:ln>
-        </p:spPr>
-        <p:txBody>
-          <a:bodyPr vert="horz" lIns="91440" tIns="45720" rIns="91440" bIns="45720" rtlCol="0" anchor="ctr"/>
-          <a:lstStyle/>
-          <a:p>
-            <a:endParaRPr lang="en-US"/>
-          </a:p>
-        </p:txBody>
-      </p:sp>
-      <p:sp>
-        <p:nvSpPr>
-          <p:cNvPr id="5" name="Notes Placeholder 4"/>
-          <p:cNvSpPr>
-            <a:spLocks noGrp="1"/>
-          </p:cNvSpPr>
-          <p:nvPr>
-            <p:ph type="body" sz="quarter" idx="3"/>
-          </p:nvPr>
-        </p:nvSpPr>
-        <p:spPr>
-          <a:xfrm>
-            <a:off x="685800" y="4400550"/>
-            <a:ext cx="5486400" cy="3600450"/>
-          </a:xfrm>
-          <a:prstGeom prst="rect">
-            <a:avLst/>
-          </a:prstGeom>
-        </p:spPr>
-        <p:txBody>
-          <a:bodyPr vert="horz" lIns="91440" tIns="45720" rIns="91440" bIns="45720" rtlCol="0"/>
-          <a:lstStyle/>
-          <a:p>
-            <a:pPr lvl="0"/>
-            <a:r>
-              <a:rPr lang="en-US"/>
-              <a:t>Click to edit Master text styles</a:t>
-            </a:r>
-          </a:p>
-          <a:p>
-            <a:pPr lvl="1"/>
-            <a:r>
-              <a:rPr lang="en-US"/>
-              <a:t>Second level</a:t>
-            </a:r>
-          </a:p>
-          <a:p>
-            <a:pPr lvl="2"/>
-            <a:r>
-              <a:rPr lang="en-US"/>
-              <a:t>Third level</a:t>
-            </a:r>
-          </a:p>
-          <a:p>
-            <a:pPr lvl="3"/>
-            <a:r>
-              <a:rPr lang="en-US"/>
-              <a:t>Fourth level</a:t>
-            </a:r>
-          </a:p>
-          <a:p>
-            <a:pPr lvl="4"/>
-            <a:r>
-              <a:rPr lang="en-US"/>
-              <a:t>Fifth level</a:t>
-            </a:r>
-          </a:p>
-        </p:txBody>
-      </p:sp>
-      <p:sp>
-        <p:nvSpPr>
-          <p:cNvPr id="6" name="Footer Placeholder 5"/>
-          <p:cNvSpPr>
-            <a:spLocks noGrp="1"/>
-          </p:cNvSpPr>
-          <p:nvPr>
-            <p:ph type="ftr" sz="quarter" idx="4"/>
-          </p:nvPr>
-        </p:nvSpPr>
-        <p:spPr>
-          <a:xfrm>
-            <a:off x="0" y="8685213"/>
-            <a:ext cx="2971800" cy="458787"/>
-          </a:xfrm>
-          <a:prstGeom prst="rect">
-            <a:avLst/>
-          </a:prstGeom>
-        </p:spPr>
-        <p:txBody>
-          <a:bodyPr vert="horz" lIns="91440" tIns="45720" rIns="91440" bIns="45720" rtlCol="0" anchor="b"/>
-          <a:lstStyle>
-            <a:lvl1pPr algn="l">
-              <a:defRPr sz="1200"/>
-            </a:lvl1pPr>
-          </a:lstStyle>
-          <a:p>
-            <a:endParaRPr lang="en-US"/>
-          </a:p>
-        </p:txBody>
-      </p:sp>
-      <p:sp>
-        <p:nvSpPr>
-          <p:cNvPr id="7" name="Slide Number Placeholder 6"/>
-          <p:cNvSpPr>
-            <a:spLocks noGrp="1"/>
-          </p:cNvSpPr>
-          <p:nvPr>
-            <p:ph type="sldNum" sz="quarter" idx="5"/>
-          </p:nvPr>
-        </p:nvSpPr>
-        <p:spPr>
-          <a:xfrm>
-            <a:off x="3884613" y="8685213"/>
-            <a:ext cx="2971800" cy="458787"/>
-          </a:xfrm>
-          <a:prstGeom prst="rect">
-            <a:avLst/>
-          </a:prstGeom>
-        </p:spPr>
-        <p:txBody>
-          <a:bodyPr vert="horz" lIns="91440" tIns="45720" rIns="91440" bIns="45720" rtlCol="0" anchor="b"/>
-          <a:lstStyle>
-            <a:lvl1pPr algn="r">
-              <a:defRPr sz="1200"/>
-            </a:lvl1pPr>
-          </a:lstStyle>
-          <a:p>
-            <a:fld id="{CE5E9CC1-C706-0F49-92D6-E571CC5EEA8F}" type="slidenum">
-              <a:rPr lang="en-US"/>
-              <a:t>‹#›</a:t>
-            </a:fld>
-            <a:endParaRPr lang="en-US"/>
-          </a:p>
-        </p:txBody>
-      </p:sp>
     </p:spTree>
     <p:extLst>
       <p:ext uri="{BB962C8B-B14F-4D97-AF65-F5344CB8AC3E}">
-        <p14:creationId xmlns:p14="http://schemas.microsoft.com/office/powerpoint/2010/main" val="1024086991"/>
+        <p14:creationId xmlns:p14="http://schemas.microsoft.com/office/powerpoint/2010/main" val="2994819390"/>
       </p:ext>
     </p:extLst>
   </p:cSld>
@@ -1289,7 +1097,6 @@
               <a:rPr lang="en-US" dirty="0"/>
               <a:t>Hardik opens. One-line framing: an academic machine-learning comparison on a public dataset, not a diagnostic system. Phase 1 covers six classical models; each team member presents the part they built.</a:t>
             </a:r>
-            <a:endParaRPr lang="en-US" dirty="0"/>
           </a:p>
         </p:txBody>
       </p:sp>
@@ -1377,7 +1184,6 @@
               <a:rPr lang="en-US" dirty="0"/>
               <a:t>Both use the numeric pipeline (imputation, standardisation, one-hot). Standardisation matters for both: the L2 penalty and the RBF distance are scale-dependent. Implemented with scikit-learn.</a:t>
             </a:r>
-            <a:endParaRPr lang="en-US" dirty="0"/>
           </a:p>
         </p:txBody>
       </p:sp>
@@ -1465,7 +1271,6 @@
               <a:rPr lang="en-US" dirty="0"/>
               <a:t>Both use the same numeric pipeline as Logistic Regression (trees do not need scaling, but sharing the pipeline keeps the comparison simple). Implemented with scikit-learn.</a:t>
             </a:r>
-            <a:endParaRPr lang="en-US" dirty="0"/>
           </a:p>
         </p:txBody>
       </p:sp>
@@ -1553,7 +1358,6 @@
               <a:rPr lang="en-US" dirty="0"/>
               <a:t>Why nested: if we tuned on the same folds we report on, the score would be optimistic (Varma and Simon 2006; Cawley and Talbot 2010). The outer held-out labels are never used for choosing settings. Grids were declared before the Phase 1 run. The Bayesian network and Naive Bayes chose the largest smoothing value (10) in every fold: more smoothing kept making their over-confident probabilities more cautious. We report this rather than keep widening the grid after seeing results.</a:t>
             </a:r>
-            <a:endParaRPr lang="en-US" dirty="0"/>
           </a:p>
         </p:txBody>
       </p:sp>
@@ -1641,7 +1445,6 @@
               <a:rPr lang="en-US" dirty="0"/>
               <a:t>run_evaluation.py trains and evaluates all six models on the same 25 folds and writes every table and figure. Brier: lower is better; it measures how good the probabilities are, not just the yes/no calls.</a:t>
             </a:r>
-            <a:endParaRPr lang="en-US" dirty="0"/>
           </a:p>
         </p:txBody>
       </p:sp>
@@ -1729,7 +1532,6 @@
               <a:rPr lang="en-US" dirty="0"/>
               <a:t>Because all models are scored on exactly the same patients, the bootstrap is paired. Intervals that exclude zero: Bayesian Network - Gradient Boosting (ROC AUC +0.020); Logistic Regression - Gradient Boosting (accuracy +0.029); SVM - Gradient Boosting (accuracy +0.030); SVM - Gradient Boosting (ROC AUC +0.017); Random Forest - Gradient Boosting (accuracy +0.016); Random Forest - Gradient Boosting (ROC AUC +0.013). With 30 comparisons, one or two such intervals are expected by chance, so we treat them as weak evidence.</a:t>
             </a:r>
-            <a:endParaRPr lang="en-US" dirty="0"/>
           </a:p>
         </p:txBody>
       </p:sp>
@@ -1817,7 +1619,6 @@
               <a:rPr lang="en-US" dirty="0"/>
               <a:t>Computed on the five repeat-0 outer folds with the hyper-parameters chosen in each fold; 30 shuffles per feature. ca = vessels coloured by fluoroscopy, cp = chest pain type, thal = thallium scan. Correlated features share credit, so a low rank does not mean irrelevant.</a:t>
             </a:r>
-            <a:endParaRPr lang="en-US" dirty="0"/>
           </a:p>
         </p:txBody>
       </p:sp>
@@ -1905,7 +1706,6 @@
               <a:rPr lang="en-US" dirty="0"/>
               <a:t>Live demo, about two minutes: .venv/bin/python -m streamlit run app/streamlit_app.py, open localhost:8501. Show Model results, then Risk estimator: press Estimate with the defaults, then change ca to 3 and thal to reversible defect and press Estimate again.</a:t>
             </a:r>
-            <a:endParaRPr lang="en-US" dirty="0"/>
           </a:p>
         </p:txBody>
       </p:sp>
@@ -1993,7 +1793,6 @@
               <a:rPr lang="en-US" dirty="0"/>
               <a:t>The other three databases in the UCI archive give a natural external test set.</a:t>
             </a:r>
-            <a:endParaRPr lang="en-US" dirty="0"/>
           </a:p>
         </p:txBody>
       </p:sp>
@@ -2081,7 +1880,6 @@
               <a:rPr lang="en-US" dirty="0"/>
               <a:t>Likely questions: why nested CV (avoid optimistic scores); why stratified folds (keep the class balance); why the Bayesian network needs discrete inputs (conditional probability tables); why standardise for LR and SVM (penalty and kernel are scale-dependent); bagging vs boosting.</a:t>
             </a:r>
-            <a:endParaRPr lang="en-US" dirty="0"/>
           </a:p>
         </p:txBody>
       </p:sp>
@@ -2169,7 +1967,6 @@
               <a:rPr lang="en-US" dirty="0"/>
               <a:t>Each slide shows its presenter in the top-right corner. Order: Hardik (data), Ayush (evaluation design and Bayesian network), Kabir (Naive Bayes), Akshith (Logistic Regression, SVM and the comparison), Vansh (ensembles, tuning and feature importance), Ayush (are the differences real), Kabir (demo).</a:t>
             </a:r>
-            <a:endParaRPr lang="en-US" dirty="0"/>
           </a:p>
         </p:txBody>
       </p:sp>
@@ -2257,7 +2054,6 @@
               <a:rPr lang="en-US" dirty="0"/>
               <a:t>Headline first. All six models discriminate well (ROC AUC 0.890 to 0.910). The highest ROC AUC is Bayesian Network and the highest accuracy SVM, but among the top five the differences are much smaller than the uncertainty, so we do not claim a winner.</a:t>
             </a:r>
-            <a:endParaRPr lang="en-US" dirty="0"/>
           </a:p>
         </p:txBody>
       </p:sp>
@@ -2345,7 +2141,6 @@
               <a:rPr lang="en-US" dirty="0"/>
               <a:t>We use processed.cleveland.data (CC BY 4.0); the archive itself warns that the raw cleveland.data file is corrupted. The verification script checks the archive, the column count, value domains and duplicates before anything else runs.</a:t>
             </a:r>
-            <a:endParaRPr lang="en-US" dirty="0"/>
           </a:p>
         </p:txBody>
       </p:sp>
@@ -2433,7 +2228,6 @@
               <a:rPr lang="en-US" dirty="0"/>
               <a:t>Descriptive only; correlation is not causation. The full EDA notebook is notebooks/01_eda.ipynb.</a:t>
             </a:r>
-            <a:endParaRPr lang="en-US" dirty="0"/>
           </a:p>
         </p:txBody>
       </p:sp>
@@ -2521,7 +2315,6 @@
               <a:rPr lang="en-US" dirty="0"/>
               <a:t>Leakage means test information sneaking into training. If we scaled with the mean of all 303 patients, the held-out patients would influence the model. So the whole pipeline is refitted inside each training fold.</a:t>
             </a:r>
-            <a:endParaRPr lang="en-US" dirty="0"/>
           </a:p>
         </p:txBody>
       </p:sp>
@@ -2609,7 +2402,6 @@
               <a:rPr lang="en-US" dirty="0"/>
               <a:t>Hard-label metrics use a fixed threshold of 0.5 chosen in advance. Uncertainty: mean ± standard deviation over the 25 folds, plus a patient-level bootstrap (2000 resamples) for 95% intervals.</a:t>
             </a:r>
-            <a:endParaRPr lang="en-US" dirty="0"/>
           </a:p>
         </p:txBody>
       </p:sp>
@@ -2697,7 +2489,6 @@
               <a:rPr lang="en-US" dirty="0"/>
               <a:t>Joint distribution factorises as the product of P(node | parents). Blue edges are clinical reasoning, orange weak, green added to relax Naive Bayes independence. Most chosen pseudo-count: 10 (25 of 25 folds). Implemented with pgmpy.</a:t>
             </a:r>
-            <a:endParaRPr lang="en-US" dirty="0"/>
           </a:p>
         </p:txBody>
       </p:sp>
@@ -2785,7 +2576,6 @@
               <a:rPr lang="en-US" dirty="0"/>
               <a:t>Implemented with scikit-learn's CategoricalNB. Domingos and Pazzani (1997) explain why Naive Bayes ranks well even when independence is violated.</a:t>
             </a:r>
-            <a:endParaRPr lang="en-US" dirty="0"/>
           </a:p>
         </p:txBody>
       </p:sp>
@@ -2863,6 +2653,7 @@
         <a:solidFill>
           <a:schemeClr val="tx2"/>
         </a:solidFill>
+        <a:effectLst/>
       </p:bgPr>
     </p:bg>
     <p:spTree>
@@ -2882,9 +2673,11 @@
       <p:sp>
         <p:nvSpPr>
           <p:cNvPr id="2" name="Text 0"/>
-          <p:cNvSpPr/>
+          <p:cNvSpPr>
+            <a:spLocks noGrp="1"/>
+          </p:cNvSpPr>
           <p:nvPr>
-            <p:ph idx="100" type="title" hasCustomPrompt="1"/>
+            <p:ph type="title" idx="100" hasCustomPrompt="1"/>
           </p:nvPr>
         </p:nvSpPr>
         <p:spPr>
@@ -2901,7 +2694,7 @@
         <p:txBody>
           <a:bodyPr wrap="square" rtlCol="0"/>
           <a:lstStyle>
-            <a:lvl1pPr algn="l" indent="0" marL="0">
+            <a:lvl1pPr marL="0" indent="0" algn="l">
               <a:buNone/>
               <a:defRPr lang="en-US" sz="4400" b="1" dirty="0">
                 <a:solidFill>
@@ -2914,7 +2707,7 @@
             </a:lvl1pPr>
           </a:lstStyle>
           <a:p>
-            <a:pPr algn="l" indent="0" marL="0">
+            <a:pPr marL="0" indent="0" algn="l">
               <a:buNone/>
             </a:pPr>
             <a:endParaRPr lang="en-US" sz="4400" dirty="0"/>
@@ -2924,9 +2717,11 @@
       <p:sp>
         <p:nvSpPr>
           <p:cNvPr id="3" name="Text 0"/>
-          <p:cNvSpPr/>
+          <p:cNvSpPr>
+            <a:spLocks noGrp="1"/>
+          </p:cNvSpPr>
           <p:nvPr>
-            <p:ph idx="101" type="body" hasCustomPrompt="1"/>
+            <p:ph type="body" idx="101" hasCustomPrompt="1"/>
           </p:nvPr>
         </p:nvSpPr>
         <p:spPr>
@@ -2943,7 +2738,7 @@
         <p:txBody>
           <a:bodyPr wrap="square" rtlCol="0"/>
           <a:lstStyle>
-            <a:lvl1pPr indent="0" marL="0">
+            <a:lvl1pPr marL="0" indent="0">
               <a:buNone/>
               <a:defRPr lang="en-US" sz="2000" dirty="0">
                 <a:solidFill>
@@ -2953,7 +2748,7 @@
             </a:lvl1pPr>
           </a:lstStyle>
           <a:p>
-            <a:pPr indent="0" marL="0">
+            <a:pPr marL="0" indent="0">
               <a:buNone/>
             </a:pPr>
             <a:endParaRPr lang="en-US" sz="2000" dirty="0"/>
@@ -2963,9 +2758,11 @@
       <p:sp>
         <p:nvSpPr>
           <p:cNvPr id="4" name="Text 0"/>
-          <p:cNvSpPr/>
+          <p:cNvSpPr>
+            <a:spLocks noGrp="1"/>
+          </p:cNvSpPr>
           <p:nvPr>
-            <p:ph idx="102" type="body" hasCustomPrompt="1"/>
+            <p:ph type="body" idx="102" hasCustomPrompt="1"/>
           </p:nvPr>
         </p:nvSpPr>
         <p:spPr>
@@ -2982,7 +2779,7 @@
         <p:txBody>
           <a:bodyPr wrap="square" rtlCol="0"/>
           <a:lstStyle>
-            <a:lvl1pPr indent="0" marL="0">
+            <a:lvl1pPr marL="0" indent="0">
               <a:buNone/>
               <a:defRPr lang="en-US" sz="1600" dirty="0">
                 <a:solidFill>
@@ -2992,7 +2789,7 @@
             </a:lvl1pPr>
           </a:lstStyle>
           <a:p>
-            <a:pPr indent="0" marL="0">
+            <a:pPr marL="0" indent="0">
               <a:buNone/>
             </a:pPr>
             <a:endParaRPr lang="en-US" sz="1600" dirty="0"/>
@@ -3015,6 +2812,7 @@
         <a:solidFill>
           <a:schemeClr val="bg1"/>
         </a:solidFill>
+        <a:effectLst/>
       </p:bgPr>
     </p:bg>
     <p:spTree>
@@ -3034,9 +2832,11 @@
       <p:sp>
         <p:nvSpPr>
           <p:cNvPr id="2" name="Text 0"/>
-          <p:cNvSpPr/>
+          <p:cNvSpPr>
+            <a:spLocks noGrp="1"/>
+          </p:cNvSpPr>
           <p:nvPr>
-            <p:ph idx="100" type="title" hasCustomPrompt="1"/>
+            <p:ph type="title" idx="100" hasCustomPrompt="1"/>
           </p:nvPr>
         </p:nvSpPr>
         <p:spPr>
@@ -3053,7 +2853,7 @@
         <p:txBody>
           <a:bodyPr wrap="square" rtlCol="0"/>
           <a:lstStyle>
-            <a:lvl1pPr algn="l" indent="0" marL="0">
+            <a:lvl1pPr marL="0" indent="0" algn="l">
               <a:buNone/>
               <a:defRPr lang="en-US" sz="3200" b="1" dirty="0">
                 <a:solidFill>
@@ -3066,7 +2866,7 @@
             </a:lvl1pPr>
           </a:lstStyle>
           <a:p>
-            <a:pPr algn="l" indent="0" marL="0">
+            <a:pPr marL="0" indent="0" algn="l">
               <a:buNone/>
             </a:pPr>
             <a:endParaRPr lang="en-US" sz="3200" dirty="0"/>
@@ -3094,7 +2894,7 @@
           <a:bodyPr wrap="square" lIns="0" tIns="0" rIns="0" bIns="0" rtlCol="0" anchor="ctr"/>
           <a:lstStyle/>
           <a:p>
-            <a:pPr indent="0" marL="0">
+            <a:pPr marL="0" indent="0">
               <a:buNone/>
             </a:pPr>
             <a:r>
@@ -3129,7 +2929,7 @@
           </a:prstGeom>
           <a:extLst>
             <a:ext uri="{C572A759-6A51-4108-AA02-DFA0A04FC94B}">
-              <ma14:wrappingTextBoxFlag xmlns:ma14="http://schemas.microsoft.com/office/mac/drawingml/2011/main" val="0"/>
+              <ma14:wrappingTextBoxFlag xmlns:ma14="http://schemas.microsoft.com/office/mac/drawingml/2011/main" xmlns="" val="0"/>
             </a:ext>
           </a:extLst>
         </p:spPr>
@@ -3147,8 +2947,8 @@
           <a:p>
             <a:pPr algn="r"/>
             <a:fld id="{F7021451-1387-4CA6-816F-3879F97B5CBC}" type="slidenum">
-              <a:rPr b="0" lang="en-US"/>
-              <a:t>1003</a:t>
+              <a:rPr lang="en-US" b="0"/>
+              <a:t>‹#›</a:t>
             </a:fld>
             <a:endParaRPr lang="en-US"/>
           </a:p>
@@ -3170,6 +2970,7 @@
         <a:solidFill>
           <a:schemeClr val="tx2"/>
         </a:solidFill>
+        <a:effectLst/>
       </p:bgPr>
     </p:bg>
     <p:spTree>
@@ -3189,9 +2990,11 @@
       <p:sp>
         <p:nvSpPr>
           <p:cNvPr id="2" name="Text 0"/>
-          <p:cNvSpPr/>
+          <p:cNvSpPr>
+            <a:spLocks noGrp="1"/>
+          </p:cNvSpPr>
           <p:nvPr>
-            <p:ph idx="100" type="title" hasCustomPrompt="1"/>
+            <p:ph type="title" idx="100" hasCustomPrompt="1"/>
           </p:nvPr>
         </p:nvSpPr>
         <p:spPr>
@@ -3208,7 +3011,7 @@
         <p:txBody>
           <a:bodyPr wrap="square" rtlCol="0"/>
           <a:lstStyle>
-            <a:lvl1pPr algn="l" indent="0" marL="0">
+            <a:lvl1pPr marL="0" indent="0" algn="l">
               <a:buNone/>
               <a:defRPr lang="en-US" sz="3800" b="1" dirty="0">
                 <a:solidFill>
@@ -3221,7 +3024,7 @@
             </a:lvl1pPr>
           </a:lstStyle>
           <a:p>
-            <a:pPr algn="l" indent="0" marL="0">
+            <a:pPr marL="0" indent="0" algn="l">
               <a:buNone/>
             </a:pPr>
             <a:endParaRPr lang="en-US" sz="3800" dirty="0"/>
@@ -3239,6 +3042,11 @@
 <file path=ppt/slideMasters/slideMaster1.xml><?xml version="1.0" encoding="utf-8"?>
 <p:sldMaster xmlns:a="http://schemas.openxmlformats.org/drawingml/2006/main" xmlns:r="http://schemas.openxmlformats.org/officeDocument/2006/relationships" xmlns:p="http://schemas.openxmlformats.org/presentationml/2006/main">
   <p:cSld>
+    <p:bg>
+      <p:bgRef idx="1001">
+        <a:schemeClr val="bg1"/>
+      </p:bgRef>
+    </p:bg>
     <p:spTree>
       <p:nvGrpSpPr>
         <p:cNvPr id="1" name=""/>
@@ -3273,7 +3081,7 @@
           </a:prstGeom>
           <a:extLst>
             <a:ext uri="{C572A759-6A51-4108-AA02-DFA0A04FC94B}">
-              <ma14:wrappingTextBoxFlag xmlns:ma14="http://schemas.microsoft.com/office/mac/drawingml/2011/main" val="0"/>
+              <ma14:wrappingTextBoxFlag xmlns:ma14="http://schemas.microsoft.com/office/mac/drawingml/2011/main" xmlns="" val="0"/>
             </a:ext>
           </a:extLst>
         </p:spPr>
@@ -3291,8 +3099,8 @@
           <a:p>
             <a:pPr algn="r"/>
             <a:fld id="{F7021451-1387-4CA6-816F-3879F97B5CBC}" type="slidenum">
-              <a:rPr b="0" lang="en-US"/>
-              <a:t>null</a:t>
+              <a:rPr lang="en-US" b="0"/>
+              <a:t>‹#›</a:t>
             </a:fld>
             <a:endParaRPr lang="en-US"/>
           </a:p>
@@ -3581,9 +3389,11 @@
       <p:sp>
         <p:nvSpPr>
           <p:cNvPr id="2" name="Text 0"/>
-          <p:cNvSpPr/>
+          <p:cNvSpPr>
+            <a:spLocks noGrp="1"/>
+          </p:cNvSpPr>
           <p:nvPr>
-            <p:ph idx="100" type="title" hasCustomPrompt="1"/>
+            <p:ph type="title" idx="100" hasCustomPrompt="1"/>
           </p:nvPr>
         </p:nvSpPr>
         <p:spPr>
@@ -3601,7 +3411,7 @@
           <a:bodyPr wrap="square" lIns="0" tIns="0" rIns="0" bIns="0" rtlCol="0" anchor="b"/>
           <a:lstStyle/>
           <a:p>
-            <a:pPr algn="l" indent="0" marL="0">
+            <a:pPr marL="0" indent="0" algn="l">
               <a:buNone/>
             </a:pPr>
             <a:r>
@@ -3622,9 +3432,11 @@
       <p:sp>
         <p:nvSpPr>
           <p:cNvPr id="3" name="Text 0"/>
-          <p:cNvSpPr/>
+          <p:cNvSpPr>
+            <a:spLocks noGrp="1"/>
+          </p:cNvSpPr>
           <p:nvPr>
-            <p:ph idx="101" type="body" hasCustomPrompt="1"/>
+            <p:ph type="body" idx="101" hasCustomPrompt="1"/>
           </p:nvPr>
         </p:nvSpPr>
         <p:spPr>
@@ -3642,7 +3454,7 @@
           <a:bodyPr wrap="square" lIns="0" tIns="0" rIns="0" bIns="0" rtlCol="0" anchor="t"/>
           <a:lstStyle/>
           <a:p>
-            <a:pPr indent="0" marL="0">
+            <a:pPr marL="0" indent="0">
               <a:buNone/>
             </a:pPr>
             <a:r>
@@ -3660,9 +3472,11 @@
       <p:sp>
         <p:nvSpPr>
           <p:cNvPr id="4" name="Text 0"/>
-          <p:cNvSpPr/>
+          <p:cNvSpPr>
+            <a:spLocks noGrp="1"/>
+          </p:cNvSpPr>
           <p:nvPr>
-            <p:ph idx="102" type="body" hasCustomPrompt="1"/>
+            <p:ph type="body" idx="102" hasCustomPrompt="1"/>
           </p:nvPr>
         </p:nvSpPr>
         <p:spPr>
@@ -3680,7 +3494,7 @@
           <a:bodyPr wrap="square" lIns="0" tIns="0" rIns="0" bIns="0" rtlCol="0" anchor="t"/>
           <a:lstStyle/>
           <a:p>
-            <a:pPr indent="0" marL="0">
+            <a:pPr marL="0" indent="0">
               <a:buNone/>
             </a:pPr>
             <a:r>
@@ -3694,7 +3508,7 @@
             <a:endParaRPr lang="en-US" sz="1600" dirty="0"/>
           </a:p>
           <a:p>
-            <a:pPr indent="0" marL="0">
+            <a:pPr marL="0" indent="0">
               <a:buNone/>
             </a:pPr>
             <a:r>
@@ -3711,14 +3525,14 @@
       </p:sp>
       <p:pic>
         <p:nvPicPr>
-          <p:cNvPr id="5" name="heart icon" descr="preencoded.png">    </p:cNvPr>
+          <p:cNvPr id="5" name="heart icon" descr="preencoded.png"/>
           <p:cNvPicPr>
             <a:picLocks noChangeAspect="1"/>
           </p:cNvPicPr>
           <p:nvPr/>
         </p:nvPicPr>
         <p:blipFill>
-          <a:blip r:embed="rId1"/>
+          <a:blip r:embed="rId3"/>
           <a:stretch>
             <a:fillRect/>
           </a:stretch>
@@ -3760,79 +3574,12 @@
       </p:grpSpPr>
       <p:sp>
         <p:nvSpPr>
-          <p:cNvPr id="2" name="presenter chip"/>
-          <p:cNvSpPr/>
-          <p:nvPr/>
-        </p:nvSpPr>
-        <p:spPr>
-          <a:xfrm>
-            <a:off x="9921240" y="502920"/>
-            <a:ext cx="1691640" cy="457200"/>
-          </a:xfrm>
-          <a:prstGeom prst="roundRect">
-            <a:avLst>
-              <a:gd name="adj" fmla="val 50000"/>
-            </a:avLst>
-          </a:prstGeom>
-          <a:solidFill>
-            <a:schemeClr val="tx2"/>
-          </a:solidFill>
-          <a:ln/>
-        </p:spPr>
-      </p:sp>
-      <p:sp>
-        <p:nvSpPr>
-          <p:cNvPr id="3" name="Text 1"/>
-          <p:cNvSpPr txBox="1"/>
-          <p:nvPr/>
-        </p:nvSpPr>
-        <p:spPr>
-          <a:xfrm>
-            <a:off x="9921240" y="502920"/>
-            <a:ext cx="1691640" cy="457200"/>
-          </a:xfrm>
-          <a:prstGeom prst="rect">
-            <a:avLst/>
-          </a:prstGeom>
-          <a:noFill/>
-          <a:ln/>
-        </p:spPr>
-        <p:txBody>
-          <a:bodyPr wrap="square" lIns="0" tIns="0" rIns="0" bIns="0" rtlCol="0" anchor="ctr"/>
-          <a:lstStyle/>
-          <a:p>
-            <a:pPr algn="ctr" indent="0" marL="0">
-              <a:buNone/>
-            </a:pPr>
-            <a:r>
-              <a:rPr lang="en-US" sz="1100" dirty="0">
-                <a:solidFill>
-                  <a:schemeClr val="accent6"/>
-                </a:solidFill>
-              </a:rPr>
-              <a:t>Presenter  </a:t>
-            </a:r>
-            <a:pPr algn="ctr" indent="0" marL="0">
-              <a:buNone/>
-            </a:pPr>
-            <a:r>
-              <a:rPr lang="en-US" sz="1300" b="1" dirty="0">
-                <a:solidFill>
-                  <a:schemeClr val="bg1"/>
-                </a:solidFill>
-              </a:rPr>
-              <a:t>Akshith</a:t>
-            </a:r>
-            <a:endParaRPr lang="en-US" sz="1600" dirty="0"/>
-          </a:p>
-        </p:txBody>
-      </p:sp>
-      <p:sp>
-        <p:nvSpPr>
           <p:cNvPr id="4" name="Text 0"/>
-          <p:cNvSpPr/>
+          <p:cNvSpPr>
+            <a:spLocks noGrp="1"/>
+          </p:cNvSpPr>
           <p:nvPr>
-            <p:ph idx="100" type="title" hasCustomPrompt="1"/>
+            <p:ph type="title" idx="100" hasCustomPrompt="1"/>
           </p:nvPr>
         </p:nvSpPr>
         <p:spPr>
@@ -3850,7 +3597,7 @@
           <a:bodyPr wrap="square" lIns="0" tIns="0" rIns="0" bIns="0" rtlCol="0" anchor="ctr"/>
           <a:lstStyle/>
           <a:p>
-            <a:pPr algn="l" indent="0" marL="0">
+            <a:pPr marL="0" indent="0" algn="l">
               <a:buNone/>
             </a:pPr>
             <a:r>
@@ -3889,6 +3636,13 @@
           </a:solidFill>
           <a:ln/>
         </p:spPr>
+        <p:txBody>
+          <a:bodyPr/>
+          <a:lstStyle/>
+          <a:p>
+            <a:endParaRPr lang="en-US"/>
+          </a:p>
+        </p:txBody>
       </p:sp>
       <p:sp>
         <p:nvSpPr>
@@ -3909,17 +3663,24 @@
           </a:solidFill>
           <a:ln/>
         </p:spPr>
+        <p:txBody>
+          <a:bodyPr/>
+          <a:lstStyle/>
+          <a:p>
+            <a:endParaRPr lang="en-US"/>
+          </a:p>
+        </p:txBody>
       </p:sp>
       <p:pic>
         <p:nvPicPr>
-          <p:cNvPr id="7" name="model 1 icon" descr="preencoded.png">    </p:cNvPr>
+          <p:cNvPr id="7" name="model 1 icon" descr="preencoded.png"/>
           <p:cNvPicPr>
             <a:picLocks noChangeAspect="1"/>
           </p:cNvPicPr>
           <p:nvPr/>
         </p:nvPicPr>
         <p:blipFill>
-          <a:blip r:embed="rId1"/>
+          <a:blip r:embed="rId3"/>
           <a:stretch>
             <a:fillRect/>
           </a:stretch>
@@ -3955,7 +3716,7 @@
           <a:bodyPr wrap="square" lIns="0" tIns="0" rIns="0" bIns="0" rtlCol="0" anchor="t"/>
           <a:lstStyle/>
           <a:p>
-            <a:pPr indent="0" marL="0">
+            <a:pPr marL="0" indent="0">
               <a:buNone/>
             </a:pPr>
             <a:r>
@@ -4088,7 +3849,7 @@
           <a:bodyPr wrap="square" lIns="0" tIns="0" rIns="0" bIns="0" rtlCol="0" anchor="t"/>
           <a:lstStyle/>
           <a:p>
-            <a:pPr indent="0" marL="0">
+            <a:pPr marL="0" indent="0">
               <a:buNone/>
             </a:pPr>
             <a:r>
@@ -4099,9 +3860,6 @@
               </a:rPr>
               <a:t>ROC AUC 0.904</a:t>
             </a:r>
-            <a:pPr indent="0" marL="0">
-              <a:buNone/>
-            </a:pPr>
             <a:r>
               <a:rPr lang="en-US" sz="1800" dirty="0">
                 <a:solidFill>
@@ -4135,6 +3893,13 @@
           </a:solidFill>
           <a:ln/>
         </p:spPr>
+        <p:txBody>
+          <a:bodyPr/>
+          <a:lstStyle/>
+          <a:p>
+            <a:endParaRPr lang="en-US"/>
+          </a:p>
+        </p:txBody>
       </p:sp>
       <p:sp>
         <p:nvSpPr>
@@ -4155,17 +3920,24 @@
           </a:solidFill>
           <a:ln/>
         </p:spPr>
+        <p:txBody>
+          <a:bodyPr/>
+          <a:lstStyle/>
+          <a:p>
+            <a:endParaRPr lang="en-US"/>
+          </a:p>
+        </p:txBody>
       </p:sp>
       <p:pic>
         <p:nvPicPr>
-          <p:cNvPr id="13" name="model 2 icon" descr="preencoded.png">    </p:cNvPr>
+          <p:cNvPr id="13" name="model 2 icon" descr="preencoded.png"/>
           <p:cNvPicPr>
             <a:picLocks noChangeAspect="1"/>
           </p:cNvPicPr>
           <p:nvPr/>
         </p:nvPicPr>
         <p:blipFill>
-          <a:blip r:embed="rId2"/>
+          <a:blip r:embed="rId4"/>
           <a:stretch>
             <a:fillRect/>
           </a:stretch>
@@ -4201,7 +3973,7 @@
           <a:bodyPr wrap="square" lIns="0" tIns="0" rIns="0" bIns="0" rtlCol="0" anchor="t"/>
           <a:lstStyle/>
           <a:p>
-            <a:pPr indent="0" marL="0">
+            <a:pPr marL="0" indent="0">
               <a:buNone/>
             </a:pPr>
             <a:r>
@@ -4334,7 +4106,7 @@
           <a:bodyPr wrap="square" lIns="0" tIns="0" rIns="0" bIns="0" rtlCol="0" anchor="t"/>
           <a:lstStyle/>
           <a:p>
-            <a:pPr indent="0" marL="0">
+            <a:pPr marL="0" indent="0">
               <a:buNone/>
             </a:pPr>
             <a:r>
@@ -4345,9 +4117,6 @@
               </a:rPr>
               <a:t>ROC AUC 0.907</a:t>
             </a:r>
-            <a:pPr indent="0" marL="0">
-              <a:buNone/>
-            </a:pPr>
             <a:r>
               <a:rPr lang="en-US" sz="1800" dirty="0">
                 <a:solidFill>
@@ -4380,7 +4149,7 @@
           </a:prstGeom>
           <a:extLst>
             <a:ext uri="{C572A759-6A51-4108-AA02-DFA0A04FC94B}">
-              <ma14:wrappingTextBoxFlag xmlns:ma14="http://schemas.microsoft.com/office/mac/drawingml/2011/main" val="0"/>
+              <ma14:wrappingTextBoxFlag xmlns:ma14="http://schemas.microsoft.com/office/mac/drawingml/2011/main" xmlns="" val="0"/>
             </a:ext>
           </a:extLst>
         </p:spPr>
@@ -4398,7 +4167,7 @@
           <a:p>
             <a:pPr algn="r"/>
             <a:fld id="{F7021451-1387-4CA6-816F-3879F97B5CBC}" type="slidenum">
-              <a:rPr b="0" lang="en-US"/>
+              <a:rPr lang="en-US" b="0"/>
               <a:t>10</a:t>
             </a:fld>
             <a:endParaRPr lang="en-US"/>
@@ -4432,79 +4201,12 @@
       </p:grpSpPr>
       <p:sp>
         <p:nvSpPr>
-          <p:cNvPr id="2" name="presenter chip"/>
-          <p:cNvSpPr/>
-          <p:nvPr/>
-        </p:nvSpPr>
-        <p:spPr>
-          <a:xfrm>
-            <a:off x="9921240" y="502920"/>
-            <a:ext cx="1691640" cy="457200"/>
-          </a:xfrm>
-          <a:prstGeom prst="roundRect">
-            <a:avLst>
-              <a:gd name="adj" fmla="val 50000"/>
-            </a:avLst>
-          </a:prstGeom>
-          <a:solidFill>
-            <a:schemeClr val="tx2"/>
-          </a:solidFill>
-          <a:ln/>
-        </p:spPr>
-      </p:sp>
-      <p:sp>
-        <p:nvSpPr>
-          <p:cNvPr id="3" name="Text 1"/>
-          <p:cNvSpPr txBox="1"/>
-          <p:nvPr/>
-        </p:nvSpPr>
-        <p:spPr>
-          <a:xfrm>
-            <a:off x="9921240" y="502920"/>
-            <a:ext cx="1691640" cy="457200"/>
-          </a:xfrm>
-          <a:prstGeom prst="rect">
-            <a:avLst/>
-          </a:prstGeom>
-          <a:noFill/>
-          <a:ln/>
-        </p:spPr>
-        <p:txBody>
-          <a:bodyPr wrap="square" lIns="0" tIns="0" rIns="0" bIns="0" rtlCol="0" anchor="ctr"/>
-          <a:lstStyle/>
-          <a:p>
-            <a:pPr algn="ctr" indent="0" marL="0">
-              <a:buNone/>
-            </a:pPr>
-            <a:r>
-              <a:rPr lang="en-US" sz="1100" dirty="0">
-                <a:solidFill>
-                  <a:schemeClr val="accent6"/>
-                </a:solidFill>
-              </a:rPr>
-              <a:t>Presenter  </a:t>
-            </a:r>
-            <a:pPr algn="ctr" indent="0" marL="0">
-              <a:buNone/>
-            </a:pPr>
-            <a:r>
-              <a:rPr lang="en-US" sz="1300" b="1" dirty="0">
-                <a:solidFill>
-                  <a:schemeClr val="bg1"/>
-                </a:solidFill>
-              </a:rPr>
-              <a:t>Vansh</a:t>
-            </a:r>
-            <a:endParaRPr lang="en-US" sz="1600" dirty="0"/>
-          </a:p>
-        </p:txBody>
-      </p:sp>
-      <p:sp>
-        <p:nvSpPr>
           <p:cNvPr id="4" name="Text 0"/>
-          <p:cNvSpPr/>
+          <p:cNvSpPr>
+            <a:spLocks noGrp="1"/>
+          </p:cNvSpPr>
           <p:nvPr>
-            <p:ph idx="100" type="title" hasCustomPrompt="1"/>
+            <p:ph type="title" idx="100" hasCustomPrompt="1"/>
           </p:nvPr>
         </p:nvSpPr>
         <p:spPr>
@@ -4522,7 +4224,7 @@
           <a:bodyPr wrap="square" lIns="0" tIns="0" rIns="0" bIns="0" rtlCol="0" anchor="ctr"/>
           <a:lstStyle/>
           <a:p>
-            <a:pPr algn="l" indent="0" marL="0">
+            <a:pPr marL="0" indent="0" algn="l">
               <a:buNone/>
             </a:pPr>
             <a:r>
@@ -4561,6 +4263,13 @@
           </a:solidFill>
           <a:ln/>
         </p:spPr>
+        <p:txBody>
+          <a:bodyPr/>
+          <a:lstStyle/>
+          <a:p>
+            <a:endParaRPr lang="en-US"/>
+          </a:p>
+        </p:txBody>
       </p:sp>
       <p:sp>
         <p:nvSpPr>
@@ -4581,17 +4290,24 @@
           </a:solidFill>
           <a:ln/>
         </p:spPr>
+        <p:txBody>
+          <a:bodyPr/>
+          <a:lstStyle/>
+          <a:p>
+            <a:endParaRPr lang="en-US"/>
+          </a:p>
+        </p:txBody>
       </p:sp>
       <p:pic>
         <p:nvPicPr>
-          <p:cNvPr id="7" name="ensemble 1 icon" descr="preencoded.png">    </p:cNvPr>
+          <p:cNvPr id="7" name="ensemble 1 icon" descr="preencoded.png"/>
           <p:cNvPicPr>
             <a:picLocks noChangeAspect="1"/>
           </p:cNvPicPr>
           <p:nvPr/>
         </p:nvPicPr>
         <p:blipFill>
-          <a:blip r:embed="rId1"/>
+          <a:blip r:embed="rId3"/>
           <a:stretch>
             <a:fillRect/>
           </a:stretch>
@@ -4627,7 +4343,7 @@
           <a:bodyPr wrap="square" lIns="0" tIns="0" rIns="0" bIns="0" rtlCol="0" anchor="t"/>
           <a:lstStyle/>
           <a:p>
-            <a:pPr indent="0" marL="0">
+            <a:pPr marL="0" indent="0">
               <a:buNone/>
             </a:pPr>
             <a:r>
@@ -4760,7 +4476,7 @@
           <a:bodyPr wrap="square" lIns="0" tIns="0" rIns="0" bIns="0" rtlCol="0" anchor="t"/>
           <a:lstStyle/>
           <a:p>
-            <a:pPr indent="0" marL="0">
+            <a:pPr marL="0" indent="0">
               <a:buNone/>
             </a:pPr>
             <a:r>
@@ -4771,9 +4487,6 @@
               </a:rPr>
               <a:t>ROC AUC 0.903</a:t>
             </a:r>
-            <a:pPr indent="0" marL="0">
-              <a:buNone/>
-            </a:pPr>
             <a:r>
               <a:rPr lang="en-US" sz="1800" dirty="0">
                 <a:solidFill>
@@ -4807,6 +4520,13 @@
           </a:solidFill>
           <a:ln/>
         </p:spPr>
+        <p:txBody>
+          <a:bodyPr/>
+          <a:lstStyle/>
+          <a:p>
+            <a:endParaRPr lang="en-US"/>
+          </a:p>
+        </p:txBody>
       </p:sp>
       <p:sp>
         <p:nvSpPr>
@@ -4827,17 +4547,24 @@
           </a:solidFill>
           <a:ln/>
         </p:spPr>
+        <p:txBody>
+          <a:bodyPr/>
+          <a:lstStyle/>
+          <a:p>
+            <a:endParaRPr lang="en-US"/>
+          </a:p>
+        </p:txBody>
       </p:sp>
       <p:pic>
         <p:nvPicPr>
-          <p:cNvPr id="13" name="ensemble 2 icon" descr="preencoded.png">    </p:cNvPr>
+          <p:cNvPr id="13" name="ensemble 2 icon" descr="preencoded.png"/>
           <p:cNvPicPr>
             <a:picLocks noChangeAspect="1"/>
           </p:cNvPicPr>
           <p:nvPr/>
         </p:nvPicPr>
         <p:blipFill>
-          <a:blip r:embed="rId2"/>
+          <a:blip r:embed="rId4"/>
           <a:stretch>
             <a:fillRect/>
           </a:stretch>
@@ -4873,7 +4600,7 @@
           <a:bodyPr wrap="square" lIns="0" tIns="0" rIns="0" bIns="0" rtlCol="0" anchor="t"/>
           <a:lstStyle/>
           <a:p>
-            <a:pPr indent="0" marL="0">
+            <a:pPr marL="0" indent="0">
               <a:buNone/>
             </a:pPr>
             <a:r>
@@ -5006,7 +4733,7 @@
           <a:bodyPr wrap="square" lIns="0" tIns="0" rIns="0" bIns="0" rtlCol="0" anchor="t"/>
           <a:lstStyle/>
           <a:p>
-            <a:pPr indent="0" marL="0">
+            <a:pPr marL="0" indent="0">
               <a:buNone/>
             </a:pPr>
             <a:r>
@@ -5017,9 +4744,6 @@
               </a:rPr>
               <a:t>ROC AUC 0.890</a:t>
             </a:r>
-            <a:pPr indent="0" marL="0">
-              <a:buNone/>
-            </a:pPr>
             <a:r>
               <a:rPr lang="en-US" sz="1800" dirty="0">
                 <a:solidFill>
@@ -5052,7 +4776,7 @@
           </a:prstGeom>
           <a:extLst>
             <a:ext uri="{C572A759-6A51-4108-AA02-DFA0A04FC94B}">
-              <ma14:wrappingTextBoxFlag xmlns:ma14="http://schemas.microsoft.com/office/mac/drawingml/2011/main" val="0"/>
+              <ma14:wrappingTextBoxFlag xmlns:ma14="http://schemas.microsoft.com/office/mac/drawingml/2011/main" xmlns="" val="0"/>
             </a:ext>
           </a:extLst>
         </p:spPr>
@@ -5070,7 +4794,7 @@
           <a:p>
             <a:pPr algn="r"/>
             <a:fld id="{F7021451-1387-4CA6-816F-3879F97B5CBC}" type="slidenum">
-              <a:rPr b="0" lang="en-US"/>
+              <a:rPr lang="en-US" b="0"/>
               <a:t>11</a:t>
             </a:fld>
             <a:endParaRPr lang="en-US"/>
@@ -5104,79 +4828,12 @@
       </p:grpSpPr>
       <p:sp>
         <p:nvSpPr>
-          <p:cNvPr id="2" name="presenter chip"/>
-          <p:cNvSpPr/>
-          <p:nvPr/>
-        </p:nvSpPr>
-        <p:spPr>
-          <a:xfrm>
-            <a:off x="9921240" y="502920"/>
-            <a:ext cx="1691640" cy="457200"/>
-          </a:xfrm>
-          <a:prstGeom prst="roundRect">
-            <a:avLst>
-              <a:gd name="adj" fmla="val 50000"/>
-            </a:avLst>
-          </a:prstGeom>
-          <a:solidFill>
-            <a:schemeClr val="tx2"/>
-          </a:solidFill>
-          <a:ln/>
-        </p:spPr>
-      </p:sp>
-      <p:sp>
-        <p:nvSpPr>
-          <p:cNvPr id="3" name="Text 1"/>
-          <p:cNvSpPr txBox="1"/>
-          <p:nvPr/>
-        </p:nvSpPr>
-        <p:spPr>
-          <a:xfrm>
-            <a:off x="9921240" y="502920"/>
-            <a:ext cx="1691640" cy="457200"/>
-          </a:xfrm>
-          <a:prstGeom prst="rect">
-            <a:avLst/>
-          </a:prstGeom>
-          <a:noFill/>
-          <a:ln/>
-        </p:spPr>
-        <p:txBody>
-          <a:bodyPr wrap="square" lIns="0" tIns="0" rIns="0" bIns="0" rtlCol="0" anchor="ctr"/>
-          <a:lstStyle/>
-          <a:p>
-            <a:pPr algn="ctr" indent="0" marL="0">
-              <a:buNone/>
-            </a:pPr>
-            <a:r>
-              <a:rPr lang="en-US" sz="1100" dirty="0">
-                <a:solidFill>
-                  <a:schemeClr val="accent6"/>
-                </a:solidFill>
-              </a:rPr>
-              <a:t>Presenter  </a:t>
-            </a:r>
-            <a:pPr algn="ctr" indent="0" marL="0">
-              <a:buNone/>
-            </a:pPr>
-            <a:r>
-              <a:rPr lang="en-US" sz="1300" b="1" dirty="0">
-                <a:solidFill>
-                  <a:schemeClr val="bg1"/>
-                </a:solidFill>
-              </a:rPr>
-              <a:t>Vansh</a:t>
-            </a:r>
-            <a:endParaRPr lang="en-US" sz="1600" dirty="0"/>
-          </a:p>
-        </p:txBody>
-      </p:sp>
-      <p:sp>
-        <p:nvSpPr>
           <p:cNvPr id="4" name="Text 0"/>
-          <p:cNvSpPr/>
+          <p:cNvSpPr>
+            <a:spLocks noGrp="1"/>
+          </p:cNvSpPr>
           <p:nvPr>
-            <p:ph idx="100" type="title" hasCustomPrompt="1"/>
+            <p:ph type="title" idx="100" hasCustomPrompt="1"/>
           </p:nvPr>
         </p:nvSpPr>
         <p:spPr>
@@ -5194,7 +4851,7 @@
           <a:bodyPr wrap="square" lIns="0" tIns="0" rIns="0" bIns="0" rtlCol="0" anchor="ctr"/>
           <a:lstStyle/>
           <a:p>
-            <a:pPr algn="l" indent="0" marL="0">
+            <a:pPr marL="0" indent="0" algn="l">
               <a:buNone/>
             </a:pPr>
             <a:r>
@@ -5233,6 +4890,13 @@
           </a:solidFill>
           <a:ln/>
         </p:spPr>
+        <p:txBody>
+          <a:bodyPr/>
+          <a:lstStyle/>
+          <a:p>
+            <a:endParaRPr lang="en-US"/>
+          </a:p>
+        </p:txBody>
       </p:sp>
       <p:sp>
         <p:nvSpPr>
@@ -5255,7 +4919,7 @@
           <a:bodyPr wrap="square" lIns="0" tIns="0" rIns="0" bIns="0" rtlCol="0" anchor="t"/>
           <a:lstStyle/>
           <a:p>
-            <a:pPr indent="0" marL="0">
+            <a:pPr marL="0" indent="0">
               <a:buNone/>
             </a:pPr>
             <a:r>
@@ -5289,6 +4953,13 @@
           </a:solidFill>
           <a:ln/>
         </p:spPr>
+        <p:txBody>
+          <a:bodyPr/>
+          <a:lstStyle/>
+          <a:p>
+            <a:endParaRPr lang="en-US"/>
+          </a:p>
+        </p:txBody>
       </p:sp>
       <p:sp>
         <p:nvSpPr>
@@ -5311,7 +4982,7 @@
           <a:bodyPr wrap="square" lIns="0" tIns="0" rIns="0" bIns="0" rtlCol="0" anchor="ctr"/>
           <a:lstStyle/>
           <a:p>
-            <a:pPr algn="ctr" indent="0" marL="0">
+            <a:pPr marL="0" indent="0" algn="ctr">
               <a:buNone/>
             </a:pPr>
             <a:r>
@@ -5347,7 +5018,7 @@
           <a:bodyPr wrap="square" lIns="0" tIns="0" rIns="0" bIns="0" rtlCol="0" anchor="ctr"/>
           <a:lstStyle/>
           <a:p>
-            <a:pPr indent="0" marL="0">
+            <a:pPr marL="0" indent="0">
               <a:buNone/>
             </a:pPr>
             <a:r>
@@ -5381,6 +5052,13 @@
           </a:solidFill>
           <a:ln/>
         </p:spPr>
+        <p:txBody>
+          <a:bodyPr/>
+          <a:lstStyle/>
+          <a:p>
+            <a:endParaRPr lang="en-US"/>
+          </a:p>
+        </p:txBody>
       </p:sp>
       <p:sp>
         <p:nvSpPr>
@@ -5403,7 +5081,7 @@
           <a:bodyPr wrap="square" lIns="0" tIns="0" rIns="0" bIns="0" rtlCol="0" anchor="ctr"/>
           <a:lstStyle/>
           <a:p>
-            <a:pPr algn="ctr" indent="0" marL="0">
+            <a:pPr marL="0" indent="0" algn="ctr">
               <a:buNone/>
             </a:pPr>
             <a:r>
@@ -5439,7 +5117,7 @@
           <a:bodyPr wrap="square" lIns="0" tIns="0" rIns="0" bIns="0" rtlCol="0" anchor="ctr"/>
           <a:lstStyle/>
           <a:p>
-            <a:pPr indent="0" marL="0">
+            <a:pPr marL="0" indent="0">
               <a:buNone/>
             </a:pPr>
             <a:r>
@@ -5473,6 +5151,13 @@
           </a:solidFill>
           <a:ln/>
         </p:spPr>
+        <p:txBody>
+          <a:bodyPr/>
+          <a:lstStyle/>
+          <a:p>
+            <a:endParaRPr lang="en-US"/>
+          </a:p>
+        </p:txBody>
       </p:sp>
       <p:sp>
         <p:nvSpPr>
@@ -5495,7 +5180,7 @@
           <a:bodyPr wrap="square" lIns="0" tIns="0" rIns="0" bIns="0" rtlCol="0" anchor="ctr"/>
           <a:lstStyle/>
           <a:p>
-            <a:pPr algn="ctr" indent="0" marL="0">
+            <a:pPr marL="0" indent="0" algn="ctr">
               <a:buNone/>
             </a:pPr>
             <a:r>
@@ -5531,7 +5216,7 @@
           <a:bodyPr wrap="square" lIns="0" tIns="0" rIns="0" bIns="0" rtlCol="0" anchor="ctr"/>
           <a:lstStyle/>
           <a:p>
-            <a:pPr indent="0" marL="0">
+            <a:pPr marL="0" indent="0">
               <a:buNone/>
             </a:pPr>
             <a:r>
@@ -5565,6 +5250,13 @@
           </a:solidFill>
           <a:ln/>
         </p:spPr>
+        <p:txBody>
+          <a:bodyPr/>
+          <a:lstStyle/>
+          <a:p>
+            <a:endParaRPr lang="en-US"/>
+          </a:p>
+        </p:txBody>
       </p:sp>
       <p:sp>
         <p:nvSpPr>
@@ -5587,7 +5279,7 @@
           <a:bodyPr wrap="square" lIns="0" tIns="0" rIns="0" bIns="0" rtlCol="0" anchor="ctr"/>
           <a:lstStyle/>
           <a:p>
-            <a:pPr algn="ctr" indent="0" marL="0">
+            <a:pPr marL="0" indent="0" algn="ctr">
               <a:buNone/>
             </a:pPr>
             <a:r>
@@ -5623,7 +5315,7 @@
           <a:bodyPr wrap="square" lIns="0" tIns="0" rIns="0" bIns="0" rtlCol="0" anchor="ctr"/>
           <a:lstStyle/>
           <a:p>
-            <a:pPr indent="0" marL="0">
+            <a:pPr marL="0" indent="0">
               <a:buNone/>
             </a:pPr>
             <a:r>
@@ -5657,6 +5349,13 @@
           </a:solidFill>
           <a:ln/>
         </p:spPr>
+        <p:txBody>
+          <a:bodyPr/>
+          <a:lstStyle/>
+          <a:p>
+            <a:endParaRPr lang="en-US"/>
+          </a:p>
+        </p:txBody>
       </p:sp>
       <p:sp>
         <p:nvSpPr>
@@ -5679,7 +5378,7 @@
           <a:bodyPr wrap="square" lIns="0" tIns="0" rIns="0" bIns="0" rtlCol="0" anchor="ctr"/>
           <a:lstStyle/>
           <a:p>
-            <a:pPr algn="ctr" indent="0" marL="0">
+            <a:pPr marL="0" indent="0" algn="ctr">
               <a:buNone/>
             </a:pPr>
             <a:r>
@@ -5715,7 +5414,7 @@
           <a:bodyPr wrap="square" lIns="0" tIns="0" rIns="0" bIns="0" rtlCol="0" anchor="ctr"/>
           <a:lstStyle/>
           <a:p>
-            <a:pPr indent="0" marL="0">
+            <a:pPr marL="0" indent="0">
               <a:buNone/>
             </a:pPr>
             <a:r>
@@ -5732,7 +5431,7 @@
       </p:sp>
       <p:graphicFrame>
         <p:nvGraphicFramePr>
-          <p:cNvPr id="13" name="grid table"/>
+          <p:cNvPr id="22" name="grid table"/>
           <p:cNvGraphicFramePr>
             <a:graphicFrameLocks noGrp="1"/>
           </p:cNvGraphicFramePr>
@@ -5746,16 +5445,34 @@
         </p:nvGraphicFramePr>
         <p:xfrm>
           <a:off x="5669280" y="1417320"/>
-          <a:ext cx="5943600" cy="914400"/>
+          <a:ext cx="5943600" cy="3837432"/>
         </p:xfrm>
         <a:graphic>
           <a:graphicData uri="http://schemas.openxmlformats.org/drawingml/2006/table">
             <a:tbl>
               <a:tblPr/>
               <a:tblGrid>
-                <a:gridCol w="1600200"/>
-                <a:gridCol w="2514600"/>
-                <a:gridCol w="1828800"/>
+                <a:gridCol w="1600200">
+                  <a:extLst>
+                    <a:ext uri="{9D8B030D-6E8A-4147-A177-3AD203B41FA5}">
+                      <a16:colId xmlns:a16="http://schemas.microsoft.com/office/drawing/2014/main" val="20000"/>
+                    </a:ext>
+                  </a:extLst>
+                </a:gridCol>
+                <a:gridCol w="2514600">
+                  <a:extLst>
+                    <a:ext uri="{9D8B030D-6E8A-4147-A177-3AD203B41FA5}">
+                      <a16:colId xmlns:a16="http://schemas.microsoft.com/office/drawing/2014/main" val="20001"/>
+                    </a:ext>
+                  </a:extLst>
+                </a:gridCol>
+                <a:gridCol w="1828800">
+                  <a:extLst>
+                    <a:ext uri="{9D8B030D-6E8A-4147-A177-3AD203B41FA5}">
+                      <a16:colId xmlns:a16="http://schemas.microsoft.com/office/drawing/2014/main" val="20002"/>
+                    </a:ext>
+                  </a:extLst>
+                </a:gridCol>
               </a:tblGrid>
               <a:tr h="0">
                 <a:tc>
@@ -5763,7 +5480,7 @@
                     <a:bodyPr/>
                     <a:lstStyle/>
                     <a:p>
-                      <a:pPr indent="0" marL="0">
+                      <a:pPr marL="0" indent="0">
                         <a:buNone/>
                       </a:pPr>
                       <a:r>
@@ -5831,7 +5548,7 @@
                     <a:bodyPr/>
                     <a:lstStyle/>
                     <a:p>
-                      <a:pPr indent="0" marL="0">
+                      <a:pPr marL="0" indent="0">
                         <a:buNone/>
                       </a:pPr>
                       <a:r>
@@ -5899,7 +5616,7 @@
                     <a:bodyPr/>
                     <a:lstStyle/>
                     <a:p>
-                      <a:pPr indent="0" marL="0">
+                      <a:pPr marL="0" indent="0">
                         <a:buNone/>
                       </a:pPr>
                       <a:r>
@@ -5962,6 +5679,11 @@
                     </a:solidFill>
                   </a:tcPr>
                 </a:tc>
+                <a:extLst>
+                  <a:ext uri="{0D108BD9-81ED-4DB2-BD59-A6C34878D82A}">
+                    <a16:rowId xmlns:a16="http://schemas.microsoft.com/office/drawing/2014/main" val="10000"/>
+                  </a:ext>
+                </a:extLst>
               </a:tr>
               <a:tr h="0">
                 <a:tc>
@@ -5969,7 +5691,7 @@
                     <a:bodyPr/>
                     <a:lstStyle/>
                     <a:p>
-                      <a:pPr indent="0" marL="0">
+                      <a:pPr marL="0" indent="0">
                         <a:buNone/>
                       </a:pPr>
                       <a:r>
@@ -6037,7 +5759,7 @@
                     <a:bodyPr/>
                     <a:lstStyle/>
                     <a:p>
-                      <a:pPr indent="0" marL="0">
+                      <a:pPr marL="0" indent="0">
                         <a:buNone/>
                       </a:pPr>
                       <a:r>
@@ -6105,7 +5827,7 @@
                     <a:bodyPr/>
                     <a:lstStyle/>
                     <a:p>
-                      <a:pPr indent="0" marL="0">
+                      <a:pPr marL="0" indent="0">
                         <a:buNone/>
                       </a:pPr>
                       <a:r>
@@ -6126,7 +5848,7 @@
                       </a:endParaRPr>
                     </a:p>
                     <a:p>
-                      <a:pPr indent="0" marL="0">
+                      <a:pPr marL="0" indent="0">
                         <a:buNone/>
                       </a:pPr>
                       <a:r>
@@ -6189,6 +5911,11 @@
                     </a:solidFill>
                   </a:tcPr>
                 </a:tc>
+                <a:extLst>
+                  <a:ext uri="{0D108BD9-81ED-4DB2-BD59-A6C34878D82A}">
+                    <a16:rowId xmlns:a16="http://schemas.microsoft.com/office/drawing/2014/main" val="10001"/>
+                  </a:ext>
+                </a:extLst>
               </a:tr>
               <a:tr h="0">
                 <a:tc>
@@ -6196,7 +5923,7 @@
                     <a:bodyPr/>
                     <a:lstStyle/>
                     <a:p>
-                      <a:pPr indent="0" marL="0">
+                      <a:pPr marL="0" indent="0">
                         <a:buNone/>
                       </a:pPr>
                       <a:r>
@@ -6264,7 +5991,7 @@
                     <a:bodyPr/>
                     <a:lstStyle/>
                     <a:p>
-                      <a:pPr indent="0" marL="0">
+                      <a:pPr marL="0" indent="0">
                         <a:buNone/>
                       </a:pPr>
                       <a:r>
@@ -6332,7 +6059,7 @@
                     <a:bodyPr/>
                     <a:lstStyle/>
                     <a:p>
-                      <a:pPr indent="0" marL="0">
+                      <a:pPr marL="0" indent="0">
                         <a:buNone/>
                       </a:pPr>
                       <a:r>
@@ -6353,7 +6080,7 @@
                       </a:endParaRPr>
                     </a:p>
                     <a:p>
-                      <a:pPr indent="0" marL="0">
+                      <a:pPr marL="0" indent="0">
                         <a:buNone/>
                       </a:pPr>
                       <a:r>
@@ -6416,6 +6143,11 @@
                     </a:solidFill>
                   </a:tcPr>
                 </a:tc>
+                <a:extLst>
+                  <a:ext uri="{0D108BD9-81ED-4DB2-BD59-A6C34878D82A}">
+                    <a16:rowId xmlns:a16="http://schemas.microsoft.com/office/drawing/2014/main" val="10002"/>
+                  </a:ext>
+                </a:extLst>
               </a:tr>
               <a:tr h="0">
                 <a:tc>
@@ -6423,7 +6155,7 @@
                     <a:bodyPr/>
                     <a:lstStyle/>
                     <a:p>
-                      <a:pPr indent="0" marL="0">
+                      <a:pPr marL="0" indent="0">
                         <a:buNone/>
                       </a:pPr>
                       <a:r>
@@ -6491,7 +6223,7 @@
                     <a:bodyPr/>
                     <a:lstStyle/>
                     <a:p>
-                      <a:pPr indent="0" marL="0">
+                      <a:pPr marL="0" indent="0">
                         <a:buNone/>
                       </a:pPr>
                       <a:r>
@@ -6559,7 +6291,7 @@
                     <a:bodyPr/>
                     <a:lstStyle/>
                     <a:p>
-                      <a:pPr indent="0" marL="0">
+                      <a:pPr marL="0" indent="0">
                         <a:buNone/>
                       </a:pPr>
                       <a:r>
@@ -6580,7 +6312,7 @@
                       </a:endParaRPr>
                     </a:p>
                     <a:p>
-                      <a:pPr indent="0" marL="0">
+                      <a:pPr marL="0" indent="0">
                         <a:buNone/>
                       </a:pPr>
                       <a:r>
@@ -6643,6 +6375,11 @@
                     </a:solidFill>
                   </a:tcPr>
                 </a:tc>
+                <a:extLst>
+                  <a:ext uri="{0D108BD9-81ED-4DB2-BD59-A6C34878D82A}">
+                    <a16:rowId xmlns:a16="http://schemas.microsoft.com/office/drawing/2014/main" val="10003"/>
+                  </a:ext>
+                </a:extLst>
               </a:tr>
               <a:tr h="0">
                 <a:tc>
@@ -6650,7 +6387,7 @@
                     <a:bodyPr/>
                     <a:lstStyle/>
                     <a:p>
-                      <a:pPr indent="0" marL="0">
+                      <a:pPr marL="0" indent="0">
                         <a:buNone/>
                       </a:pPr>
                       <a:r>
@@ -6718,7 +6455,7 @@
                     <a:bodyPr/>
                     <a:lstStyle/>
                     <a:p>
-                      <a:pPr indent="0" marL="0">
+                      <a:pPr marL="0" indent="0">
                         <a:buNone/>
                       </a:pPr>
                       <a:r>
@@ -6739,7 +6476,7 @@
                       </a:endParaRPr>
                     </a:p>
                     <a:p>
-                      <a:pPr indent="0" marL="0">
+                      <a:pPr marL="0" indent="0">
                         <a:buNone/>
                       </a:pPr>
                       <a:r>
@@ -6807,7 +6544,7 @@
                     <a:bodyPr/>
                     <a:lstStyle/>
                     <a:p>
-                      <a:pPr indent="0" marL="0">
+                      <a:pPr marL="0" indent="0">
                         <a:buNone/>
                       </a:pPr>
                       <a:r>
@@ -6828,7 +6565,7 @@
                       </a:endParaRPr>
                     </a:p>
                     <a:p>
-                      <a:pPr indent="0" marL="0">
+                      <a:pPr marL="0" indent="0">
                         <a:buNone/>
                       </a:pPr>
                       <a:r>
@@ -6891,6 +6628,11 @@
                     </a:solidFill>
                   </a:tcPr>
                 </a:tc>
+                <a:extLst>
+                  <a:ext uri="{0D108BD9-81ED-4DB2-BD59-A6C34878D82A}">
+                    <a16:rowId xmlns:a16="http://schemas.microsoft.com/office/drawing/2014/main" val="10004"/>
+                  </a:ext>
+                </a:extLst>
               </a:tr>
               <a:tr h="0">
                 <a:tc>
@@ -6898,7 +6640,7 @@
                     <a:bodyPr/>
                     <a:lstStyle/>
                     <a:p>
-                      <a:pPr indent="0" marL="0">
+                      <a:pPr marL="0" indent="0">
                         <a:buNone/>
                       </a:pPr>
                       <a:r>
@@ -6966,7 +6708,7 @@
                     <a:bodyPr/>
                     <a:lstStyle/>
                     <a:p>
-                      <a:pPr indent="0" marL="0">
+                      <a:pPr marL="0" indent="0">
                         <a:buNone/>
                       </a:pPr>
                       <a:r>
@@ -6987,7 +6729,7 @@
                       </a:endParaRPr>
                     </a:p>
                     <a:p>
-                      <a:pPr indent="0" marL="0">
+                      <a:pPr marL="0" indent="0">
                         <a:buNone/>
                       </a:pPr>
                       <a:r>
@@ -7055,7 +6797,7 @@
                     <a:bodyPr/>
                     <a:lstStyle/>
                     <a:p>
-                      <a:pPr indent="0" marL="0">
+                      <a:pPr marL="0" indent="0">
                         <a:buNone/>
                       </a:pPr>
                       <a:r>
@@ -7076,7 +6818,7 @@
                       </a:endParaRPr>
                     </a:p>
                     <a:p>
-                      <a:pPr indent="0" marL="0">
+                      <a:pPr marL="0" indent="0">
                         <a:buNone/>
                       </a:pPr>
                       <a:r>
@@ -7139,6 +6881,11 @@
                     </a:solidFill>
                   </a:tcPr>
                 </a:tc>
+                <a:extLst>
+                  <a:ext uri="{0D108BD9-81ED-4DB2-BD59-A6C34878D82A}">
+                    <a16:rowId xmlns:a16="http://schemas.microsoft.com/office/drawing/2014/main" val="10005"/>
+                  </a:ext>
+                </a:extLst>
               </a:tr>
               <a:tr h="0">
                 <a:tc>
@@ -7146,7 +6893,7 @@
                     <a:bodyPr/>
                     <a:lstStyle/>
                     <a:p>
-                      <a:pPr indent="0" marL="0">
+                      <a:pPr marL="0" indent="0">
                         <a:buNone/>
                       </a:pPr>
                       <a:r>
@@ -7214,7 +6961,7 @@
                     <a:bodyPr/>
                     <a:lstStyle/>
                     <a:p>
-                      <a:pPr indent="0" marL="0">
+                      <a:pPr marL="0" indent="0">
                         <a:buNone/>
                       </a:pPr>
                       <a:r>
@@ -7235,7 +6982,7 @@
                       </a:endParaRPr>
                     </a:p>
                     <a:p>
-                      <a:pPr indent="0" marL="0">
+                      <a:pPr marL="0" indent="0">
                         <a:buNone/>
                       </a:pPr>
                       <a:r>
@@ -7256,7 +7003,7 @@
                       </a:endParaRPr>
                     </a:p>
                     <a:p>
-                      <a:pPr indent="0" marL="0">
+                      <a:pPr marL="0" indent="0">
                         <a:buNone/>
                       </a:pPr>
                       <a:r>
@@ -7324,7 +7071,7 @@
                     <a:bodyPr/>
                     <a:lstStyle/>
                     <a:p>
-                      <a:pPr indent="0" marL="0">
+                      <a:pPr marL="0" indent="0">
                         <a:buNone/>
                       </a:pPr>
                       <a:r>
@@ -7345,7 +7092,7 @@
                       </a:endParaRPr>
                     </a:p>
                     <a:p>
-                      <a:pPr indent="0" marL="0">
+                      <a:pPr marL="0" indent="0">
                         <a:buNone/>
                       </a:pPr>
                       <a:r>
@@ -7408,6 +7155,11 @@
                     </a:solidFill>
                   </a:tcPr>
                 </a:tc>
+                <a:extLst>
+                  <a:ext uri="{0D108BD9-81ED-4DB2-BD59-A6C34878D82A}">
+                    <a16:rowId xmlns:a16="http://schemas.microsoft.com/office/drawing/2014/main" val="10006"/>
+                  </a:ext>
+                </a:extLst>
               </a:tr>
             </a:tbl>
           </a:graphicData>
@@ -7433,7 +7185,7 @@
           </a:prstGeom>
           <a:extLst>
             <a:ext uri="{C572A759-6A51-4108-AA02-DFA0A04FC94B}">
-              <ma14:wrappingTextBoxFlag xmlns:ma14="http://schemas.microsoft.com/office/mac/drawingml/2011/main" val="0"/>
+              <ma14:wrappingTextBoxFlag xmlns:ma14="http://schemas.microsoft.com/office/mac/drawingml/2011/main" xmlns="" val="0"/>
             </a:ext>
           </a:extLst>
         </p:spPr>
@@ -7451,7 +7203,7 @@
           <a:p>
             <a:pPr algn="r"/>
             <a:fld id="{F7021451-1387-4CA6-816F-3879F97B5CBC}" type="slidenum">
-              <a:rPr b="0" lang="en-US"/>
+              <a:rPr lang="en-US" b="0"/>
               <a:t>12</a:t>
             </a:fld>
             <a:endParaRPr lang="en-US"/>
@@ -7485,79 +7237,12 @@
       </p:grpSpPr>
       <p:sp>
         <p:nvSpPr>
-          <p:cNvPr id="2" name="presenter chip"/>
-          <p:cNvSpPr/>
-          <p:nvPr/>
-        </p:nvSpPr>
-        <p:spPr>
-          <a:xfrm>
-            <a:off x="9921240" y="502920"/>
-            <a:ext cx="1691640" cy="457200"/>
-          </a:xfrm>
-          <a:prstGeom prst="roundRect">
-            <a:avLst>
-              <a:gd name="adj" fmla="val 50000"/>
-            </a:avLst>
-          </a:prstGeom>
-          <a:solidFill>
-            <a:schemeClr val="tx2"/>
-          </a:solidFill>
-          <a:ln/>
-        </p:spPr>
-      </p:sp>
-      <p:sp>
-        <p:nvSpPr>
-          <p:cNvPr id="3" name="Text 1"/>
-          <p:cNvSpPr txBox="1"/>
-          <p:nvPr/>
-        </p:nvSpPr>
-        <p:spPr>
-          <a:xfrm>
-            <a:off x="9921240" y="502920"/>
-            <a:ext cx="1691640" cy="457200"/>
-          </a:xfrm>
-          <a:prstGeom prst="rect">
-            <a:avLst/>
-          </a:prstGeom>
-          <a:noFill/>
-          <a:ln/>
-        </p:spPr>
-        <p:txBody>
-          <a:bodyPr wrap="square" lIns="0" tIns="0" rIns="0" bIns="0" rtlCol="0" anchor="ctr"/>
-          <a:lstStyle/>
-          <a:p>
-            <a:pPr algn="ctr" indent="0" marL="0">
-              <a:buNone/>
-            </a:pPr>
-            <a:r>
-              <a:rPr lang="en-US" sz="1100" dirty="0">
-                <a:solidFill>
-                  <a:schemeClr val="accent6"/>
-                </a:solidFill>
-              </a:rPr>
-              <a:t>Presenter  </a:t>
-            </a:r>
-            <a:pPr algn="ctr" indent="0" marL="0">
-              <a:buNone/>
-            </a:pPr>
-            <a:r>
-              <a:rPr lang="en-US" sz="1300" b="1" dirty="0">
-                <a:solidFill>
-                  <a:schemeClr val="bg1"/>
-                </a:solidFill>
-              </a:rPr>
-              <a:t>Akshith</a:t>
-            </a:r>
-            <a:endParaRPr lang="en-US" sz="1600" dirty="0"/>
-          </a:p>
-        </p:txBody>
-      </p:sp>
-      <p:sp>
-        <p:nvSpPr>
           <p:cNvPr id="4" name="Text 0"/>
-          <p:cNvSpPr/>
+          <p:cNvSpPr>
+            <a:spLocks noGrp="1"/>
+          </p:cNvSpPr>
           <p:nvPr>
-            <p:ph idx="100" type="title" hasCustomPrompt="1"/>
+            <p:ph type="title" idx="100" hasCustomPrompt="1"/>
           </p:nvPr>
         </p:nvSpPr>
         <p:spPr>
@@ -7575,7 +7260,7 @@
           <a:bodyPr wrap="square" lIns="0" tIns="0" rIns="0" bIns="0" rtlCol="0" anchor="ctr"/>
           <a:lstStyle/>
           <a:p>
-            <a:pPr algn="l" indent="0" marL="0">
+            <a:pPr marL="0" indent="0" algn="l">
               <a:buNone/>
             </a:pPr>
             <a:r>
@@ -7595,7 +7280,7 @@
       </p:sp>
       <p:graphicFrame>
         <p:nvGraphicFramePr>
-          <p:cNvPr id="5" name="Chart 0" descr=""/>
+          <p:cNvPr id="5" name="Chart 0"/>
           <p:cNvGraphicFramePr/>
           <p:nvPr/>
         </p:nvGraphicFramePr>
@@ -7603,9 +7288,9 @@
           <a:off x="457200" y="1325880"/>
           <a:ext cx="5120640" cy="4846320"/>
         </p:xfrm>
-        <a:graphic xmlns:a="http://schemas.openxmlformats.org/drawingml/2006/main">
+        <a:graphic>
           <a:graphicData uri="http://schemas.openxmlformats.org/drawingml/2006/chart">
-            <c:chart xmlns:c="http://schemas.openxmlformats.org/drawingml/2006/chart" r:id="rId1"/>
+            <c:chart xmlns:c="http://schemas.openxmlformats.org/drawingml/2006/chart" xmlns:r="http://schemas.openxmlformats.org/officeDocument/2006/relationships" r:id="rId3"/>
           </a:graphicData>
         </a:graphic>
       </p:graphicFrame>
@@ -7625,19 +7310,55 @@
         </p:nvGraphicFramePr>
         <p:xfrm>
           <a:off x="5852160" y="1463040"/>
-          <a:ext cx="5760720" cy="914400"/>
+          <a:ext cx="5760720" cy="3200400"/>
         </p:xfrm>
         <a:graphic>
           <a:graphicData uri="http://schemas.openxmlformats.org/drawingml/2006/table">
             <a:tbl>
               <a:tblPr/>
               <a:tblGrid>
-                <a:gridCol w="1828800"/>
-                <a:gridCol w="786384"/>
-                <a:gridCol w="786384"/>
-                <a:gridCol w="786384"/>
-                <a:gridCol w="786384"/>
-                <a:gridCol w="786384"/>
+                <a:gridCol w="1828800">
+                  <a:extLst>
+                    <a:ext uri="{9D8B030D-6E8A-4147-A177-3AD203B41FA5}">
+                      <a16:colId xmlns:a16="http://schemas.microsoft.com/office/drawing/2014/main" val="20000"/>
+                    </a:ext>
+                  </a:extLst>
+                </a:gridCol>
+                <a:gridCol w="786384">
+                  <a:extLst>
+                    <a:ext uri="{9D8B030D-6E8A-4147-A177-3AD203B41FA5}">
+                      <a16:colId xmlns:a16="http://schemas.microsoft.com/office/drawing/2014/main" val="20001"/>
+                    </a:ext>
+                  </a:extLst>
+                </a:gridCol>
+                <a:gridCol w="786384">
+                  <a:extLst>
+                    <a:ext uri="{9D8B030D-6E8A-4147-A177-3AD203B41FA5}">
+                      <a16:colId xmlns:a16="http://schemas.microsoft.com/office/drawing/2014/main" val="20002"/>
+                    </a:ext>
+                  </a:extLst>
+                </a:gridCol>
+                <a:gridCol w="786384">
+                  <a:extLst>
+                    <a:ext uri="{9D8B030D-6E8A-4147-A177-3AD203B41FA5}">
+                      <a16:colId xmlns:a16="http://schemas.microsoft.com/office/drawing/2014/main" val="20003"/>
+                    </a:ext>
+                  </a:extLst>
+                </a:gridCol>
+                <a:gridCol w="786384">
+                  <a:extLst>
+                    <a:ext uri="{9D8B030D-6E8A-4147-A177-3AD203B41FA5}">
+                      <a16:colId xmlns:a16="http://schemas.microsoft.com/office/drawing/2014/main" val="20004"/>
+                    </a:ext>
+                  </a:extLst>
+                </a:gridCol>
+                <a:gridCol w="786384">
+                  <a:extLst>
+                    <a:ext uri="{9D8B030D-6E8A-4147-A177-3AD203B41FA5}">
+                      <a16:colId xmlns:a16="http://schemas.microsoft.com/office/drawing/2014/main" val="20005"/>
+                    </a:ext>
+                  </a:extLst>
+                </a:gridCol>
               </a:tblGrid>
               <a:tr h="457200">
                 <a:tc>
@@ -7645,7 +7366,7 @@
                     <a:bodyPr/>
                     <a:lstStyle/>
                     <a:p>
-                      <a:pPr algn="ctr" indent="0" marL="0">
+                      <a:pPr marL="0" indent="0" algn="ctr">
                         <a:buNone/>
                       </a:pPr>
                       <a:r>
@@ -7713,7 +7434,7 @@
                     <a:bodyPr/>
                     <a:lstStyle/>
                     <a:p>
-                      <a:pPr algn="ctr" indent="0" marL="0">
+                      <a:pPr marL="0" indent="0" algn="ctr">
                         <a:buNone/>
                       </a:pPr>
                       <a:r>
@@ -7781,7 +7502,7 @@
                     <a:bodyPr/>
                     <a:lstStyle/>
                     <a:p>
-                      <a:pPr algn="ctr" indent="0" marL="0">
+                      <a:pPr marL="0" indent="0" algn="ctr">
                         <a:buNone/>
                       </a:pPr>
                       <a:r>
@@ -7849,7 +7570,7 @@
                     <a:bodyPr/>
                     <a:lstStyle/>
                     <a:p>
-                      <a:pPr algn="ctr" indent="0" marL="0">
+                      <a:pPr marL="0" indent="0" algn="ctr">
                         <a:buNone/>
                       </a:pPr>
                       <a:r>
@@ -7917,7 +7638,7 @@
                     <a:bodyPr/>
                     <a:lstStyle/>
                     <a:p>
-                      <a:pPr algn="ctr" indent="0" marL="0">
+                      <a:pPr marL="0" indent="0" algn="ctr">
                         <a:buNone/>
                       </a:pPr>
                       <a:r>
@@ -7985,7 +7706,7 @@
                     <a:bodyPr/>
                     <a:lstStyle/>
                     <a:p>
-                      <a:pPr algn="ctr" indent="0" marL="0">
+                      <a:pPr marL="0" indent="0" algn="ctr">
                         <a:buNone/>
                       </a:pPr>
                       <a:r>
@@ -8048,6 +7769,11 @@
                     </a:solidFill>
                   </a:tcPr>
                 </a:tc>
+                <a:extLst>
+                  <a:ext uri="{0D108BD9-81ED-4DB2-BD59-A6C34878D82A}">
+                    <a16:rowId xmlns:a16="http://schemas.microsoft.com/office/drawing/2014/main" val="10000"/>
+                  </a:ext>
+                </a:extLst>
               </a:tr>
               <a:tr h="457200">
                 <a:tc>
@@ -8055,7 +7781,7 @@
                     <a:bodyPr/>
                     <a:lstStyle/>
                     <a:p>
-                      <a:pPr indent="0" marL="0">
+                      <a:pPr marL="0" indent="0">
                         <a:buNone/>
                       </a:pPr>
                       <a:r>
@@ -8123,7 +7849,7 @@
                     <a:bodyPr/>
                     <a:lstStyle/>
                     <a:p>
-                      <a:pPr algn="ctr" indent="0" marL="0">
+                      <a:pPr marL="0" indent="0" algn="ctr">
                         <a:buNone/>
                       </a:pPr>
                       <a:r>
@@ -8191,7 +7917,7 @@
                     <a:bodyPr/>
                     <a:lstStyle/>
                     <a:p>
-                      <a:pPr algn="ctr" indent="0" marL="0">
+                      <a:pPr marL="0" indent="0" algn="ctr">
                         <a:buNone/>
                       </a:pPr>
                       <a:r>
@@ -8259,7 +7985,7 @@
                     <a:bodyPr/>
                     <a:lstStyle/>
                     <a:p>
-                      <a:pPr algn="ctr" indent="0" marL="0">
+                      <a:pPr marL="0" indent="0" algn="ctr">
                         <a:buNone/>
                       </a:pPr>
                       <a:r>
@@ -8327,7 +8053,7 @@
                     <a:bodyPr/>
                     <a:lstStyle/>
                     <a:p>
-                      <a:pPr algn="ctr" indent="0" marL="0">
+                      <a:pPr marL="0" indent="0" algn="ctr">
                         <a:buNone/>
                       </a:pPr>
                       <a:r>
@@ -8395,7 +8121,7 @@
                     <a:bodyPr/>
                     <a:lstStyle/>
                     <a:p>
-                      <a:pPr algn="ctr" indent="0" marL="0">
+                      <a:pPr marL="0" indent="0" algn="ctr">
                         <a:buNone/>
                       </a:pPr>
                       <a:r>
@@ -8458,6 +8184,11 @@
                     </a:solidFill>
                   </a:tcPr>
                 </a:tc>
+                <a:extLst>
+                  <a:ext uri="{0D108BD9-81ED-4DB2-BD59-A6C34878D82A}">
+                    <a16:rowId xmlns:a16="http://schemas.microsoft.com/office/drawing/2014/main" val="10001"/>
+                  </a:ext>
+                </a:extLst>
               </a:tr>
               <a:tr h="457200">
                 <a:tc>
@@ -8465,7 +8196,7 @@
                     <a:bodyPr/>
                     <a:lstStyle/>
                     <a:p>
-                      <a:pPr indent="0" marL="0">
+                      <a:pPr marL="0" indent="0">
                         <a:buNone/>
                       </a:pPr>
                       <a:r>
@@ -8533,7 +8264,7 @@
                     <a:bodyPr/>
                     <a:lstStyle/>
                     <a:p>
-                      <a:pPr algn="ctr" indent="0" marL="0">
+                      <a:pPr marL="0" indent="0" algn="ctr">
                         <a:buNone/>
                       </a:pPr>
                       <a:r>
@@ -8601,7 +8332,7 @@
                     <a:bodyPr/>
                     <a:lstStyle/>
                     <a:p>
-                      <a:pPr algn="ctr" indent="0" marL="0">
+                      <a:pPr marL="0" indent="0" algn="ctr">
                         <a:buNone/>
                       </a:pPr>
                       <a:r>
@@ -8669,7 +8400,7 @@
                     <a:bodyPr/>
                     <a:lstStyle/>
                     <a:p>
-                      <a:pPr algn="ctr" indent="0" marL="0">
+                      <a:pPr marL="0" indent="0" algn="ctr">
                         <a:buNone/>
                       </a:pPr>
                       <a:r>
@@ -8737,7 +8468,7 @@
                     <a:bodyPr/>
                     <a:lstStyle/>
                     <a:p>
-                      <a:pPr algn="ctr" indent="0" marL="0">
+                      <a:pPr marL="0" indent="0" algn="ctr">
                         <a:buNone/>
                       </a:pPr>
                       <a:r>
@@ -8805,7 +8536,7 @@
                     <a:bodyPr/>
                     <a:lstStyle/>
                     <a:p>
-                      <a:pPr algn="ctr" indent="0" marL="0">
+                      <a:pPr marL="0" indent="0" algn="ctr">
                         <a:buNone/>
                       </a:pPr>
                       <a:r>
@@ -8868,6 +8599,11 @@
                     </a:solidFill>
                   </a:tcPr>
                 </a:tc>
+                <a:extLst>
+                  <a:ext uri="{0D108BD9-81ED-4DB2-BD59-A6C34878D82A}">
+                    <a16:rowId xmlns:a16="http://schemas.microsoft.com/office/drawing/2014/main" val="10002"/>
+                  </a:ext>
+                </a:extLst>
               </a:tr>
               <a:tr h="457200">
                 <a:tc>
@@ -8875,7 +8611,7 @@
                     <a:bodyPr/>
                     <a:lstStyle/>
                     <a:p>
-                      <a:pPr indent="0" marL="0">
+                      <a:pPr marL="0" indent="0">
                         <a:buNone/>
                       </a:pPr>
                       <a:r>
@@ -8943,7 +8679,7 @@
                     <a:bodyPr/>
                     <a:lstStyle/>
                     <a:p>
-                      <a:pPr algn="ctr" indent="0" marL="0">
+                      <a:pPr marL="0" indent="0" algn="ctr">
                         <a:buNone/>
                       </a:pPr>
                       <a:r>
@@ -9011,7 +8747,7 @@
                     <a:bodyPr/>
                     <a:lstStyle/>
                     <a:p>
-                      <a:pPr algn="ctr" indent="0" marL="0">
+                      <a:pPr marL="0" indent="0" algn="ctr">
                         <a:buNone/>
                       </a:pPr>
                       <a:r>
@@ -9079,7 +8815,7 @@
                     <a:bodyPr/>
                     <a:lstStyle/>
                     <a:p>
-                      <a:pPr algn="ctr" indent="0" marL="0">
+                      <a:pPr marL="0" indent="0" algn="ctr">
                         <a:buNone/>
                       </a:pPr>
                       <a:r>
@@ -9147,7 +8883,7 @@
                     <a:bodyPr/>
                     <a:lstStyle/>
                     <a:p>
-                      <a:pPr algn="ctr" indent="0" marL="0">
+                      <a:pPr marL="0" indent="0" algn="ctr">
                         <a:buNone/>
                       </a:pPr>
                       <a:r>
@@ -9215,7 +8951,7 @@
                     <a:bodyPr/>
                     <a:lstStyle/>
                     <a:p>
-                      <a:pPr algn="ctr" indent="0" marL="0">
+                      <a:pPr marL="0" indent="0" algn="ctr">
                         <a:buNone/>
                       </a:pPr>
                       <a:r>
@@ -9278,6 +9014,11 @@
                     </a:solidFill>
                   </a:tcPr>
                 </a:tc>
+                <a:extLst>
+                  <a:ext uri="{0D108BD9-81ED-4DB2-BD59-A6C34878D82A}">
+                    <a16:rowId xmlns:a16="http://schemas.microsoft.com/office/drawing/2014/main" val="10003"/>
+                  </a:ext>
+                </a:extLst>
               </a:tr>
               <a:tr h="457200">
                 <a:tc>
@@ -9285,7 +9026,7 @@
                     <a:bodyPr/>
                     <a:lstStyle/>
                     <a:p>
-                      <a:pPr indent="0" marL="0">
+                      <a:pPr marL="0" indent="0">
                         <a:buNone/>
                       </a:pPr>
                       <a:r>
@@ -9353,7 +9094,7 @@
                     <a:bodyPr/>
                     <a:lstStyle/>
                     <a:p>
-                      <a:pPr algn="ctr" indent="0" marL="0">
+                      <a:pPr marL="0" indent="0" algn="ctr">
                         <a:buNone/>
                       </a:pPr>
                       <a:r>
@@ -9421,7 +9162,7 @@
                     <a:bodyPr/>
                     <a:lstStyle/>
                     <a:p>
-                      <a:pPr algn="ctr" indent="0" marL="0">
+                      <a:pPr marL="0" indent="0" algn="ctr">
                         <a:buNone/>
                       </a:pPr>
                       <a:r>
@@ -9489,7 +9230,7 @@
                     <a:bodyPr/>
                     <a:lstStyle/>
                     <a:p>
-                      <a:pPr algn="ctr" indent="0" marL="0">
+                      <a:pPr marL="0" indent="0" algn="ctr">
                         <a:buNone/>
                       </a:pPr>
                       <a:r>
@@ -9557,7 +9298,7 @@
                     <a:bodyPr/>
                     <a:lstStyle/>
                     <a:p>
-                      <a:pPr algn="ctr" indent="0" marL="0">
+                      <a:pPr marL="0" indent="0" algn="ctr">
                         <a:buNone/>
                       </a:pPr>
                       <a:r>
@@ -9625,7 +9366,7 @@
                     <a:bodyPr/>
                     <a:lstStyle/>
                     <a:p>
-                      <a:pPr algn="ctr" indent="0" marL="0">
+                      <a:pPr marL="0" indent="0" algn="ctr">
                         <a:buNone/>
                       </a:pPr>
                       <a:r>
@@ -9688,6 +9429,11 @@
                     </a:solidFill>
                   </a:tcPr>
                 </a:tc>
+                <a:extLst>
+                  <a:ext uri="{0D108BD9-81ED-4DB2-BD59-A6C34878D82A}">
+                    <a16:rowId xmlns:a16="http://schemas.microsoft.com/office/drawing/2014/main" val="10004"/>
+                  </a:ext>
+                </a:extLst>
               </a:tr>
               <a:tr h="457200">
                 <a:tc>
@@ -9695,7 +9441,7 @@
                     <a:bodyPr/>
                     <a:lstStyle/>
                     <a:p>
-                      <a:pPr indent="0" marL="0">
+                      <a:pPr marL="0" indent="0">
                         <a:buNone/>
                       </a:pPr>
                       <a:r>
@@ -9763,7 +9509,7 @@
                     <a:bodyPr/>
                     <a:lstStyle/>
                     <a:p>
-                      <a:pPr algn="ctr" indent="0" marL="0">
+                      <a:pPr marL="0" indent="0" algn="ctr">
                         <a:buNone/>
                       </a:pPr>
                       <a:r>
@@ -9831,7 +9577,7 @@
                     <a:bodyPr/>
                     <a:lstStyle/>
                     <a:p>
-                      <a:pPr algn="ctr" indent="0" marL="0">
+                      <a:pPr marL="0" indent="0" algn="ctr">
                         <a:buNone/>
                       </a:pPr>
                       <a:r>
@@ -9899,7 +9645,7 @@
                     <a:bodyPr/>
                     <a:lstStyle/>
                     <a:p>
-                      <a:pPr algn="ctr" indent="0" marL="0">
+                      <a:pPr marL="0" indent="0" algn="ctr">
                         <a:buNone/>
                       </a:pPr>
                       <a:r>
@@ -9967,7 +9713,7 @@
                     <a:bodyPr/>
                     <a:lstStyle/>
                     <a:p>
-                      <a:pPr algn="ctr" indent="0" marL="0">
+                      <a:pPr marL="0" indent="0" algn="ctr">
                         <a:buNone/>
                       </a:pPr>
                       <a:r>
@@ -10035,7 +9781,7 @@
                     <a:bodyPr/>
                     <a:lstStyle/>
                     <a:p>
-                      <a:pPr algn="ctr" indent="0" marL="0">
+                      <a:pPr marL="0" indent="0" algn="ctr">
                         <a:buNone/>
                       </a:pPr>
                       <a:r>
@@ -10098,6 +9844,11 @@
                     </a:solidFill>
                   </a:tcPr>
                 </a:tc>
+                <a:extLst>
+                  <a:ext uri="{0D108BD9-81ED-4DB2-BD59-A6C34878D82A}">
+                    <a16:rowId xmlns:a16="http://schemas.microsoft.com/office/drawing/2014/main" val="10005"/>
+                  </a:ext>
+                </a:extLst>
               </a:tr>
               <a:tr h="457200">
                 <a:tc>
@@ -10105,7 +9856,7 @@
                     <a:bodyPr/>
                     <a:lstStyle/>
                     <a:p>
-                      <a:pPr indent="0" marL="0">
+                      <a:pPr marL="0" indent="0">
                         <a:buNone/>
                       </a:pPr>
                       <a:r>
@@ -10173,7 +9924,7 @@
                     <a:bodyPr/>
                     <a:lstStyle/>
                     <a:p>
-                      <a:pPr algn="ctr" indent="0" marL="0">
+                      <a:pPr marL="0" indent="0" algn="ctr">
                         <a:buNone/>
                       </a:pPr>
                       <a:r>
@@ -10241,7 +9992,7 @@
                     <a:bodyPr/>
                     <a:lstStyle/>
                     <a:p>
-                      <a:pPr algn="ctr" indent="0" marL="0">
+                      <a:pPr marL="0" indent="0" algn="ctr">
                         <a:buNone/>
                       </a:pPr>
                       <a:r>
@@ -10309,7 +10060,7 @@
                     <a:bodyPr/>
                     <a:lstStyle/>
                     <a:p>
-                      <a:pPr algn="ctr" indent="0" marL="0">
+                      <a:pPr marL="0" indent="0" algn="ctr">
                         <a:buNone/>
                       </a:pPr>
                       <a:r>
@@ -10377,7 +10128,7 @@
                     <a:bodyPr/>
                     <a:lstStyle/>
                     <a:p>
-                      <a:pPr algn="ctr" indent="0" marL="0">
+                      <a:pPr marL="0" indent="0" algn="ctr">
                         <a:buNone/>
                       </a:pPr>
                       <a:r>
@@ -10445,7 +10196,7 @@
                     <a:bodyPr/>
                     <a:lstStyle/>
                     <a:p>
-                      <a:pPr algn="ctr" indent="0" marL="0">
+                      <a:pPr marL="0" indent="0" algn="ctr">
                         <a:buNone/>
                       </a:pPr>
                       <a:r>
@@ -10508,6 +10259,11 @@
                     </a:solidFill>
                   </a:tcPr>
                 </a:tc>
+                <a:extLst>
+                  <a:ext uri="{0D108BD9-81ED-4DB2-BD59-A6C34878D82A}">
+                    <a16:rowId xmlns:a16="http://schemas.microsoft.com/office/drawing/2014/main" val="10006"/>
+                  </a:ext>
+                </a:extLst>
               </a:tr>
             </a:tbl>
           </a:graphicData>
@@ -10534,7 +10290,7 @@
           <a:bodyPr wrap="square" lIns="0" tIns="0" rIns="0" bIns="0" rtlCol="0" anchor="t"/>
           <a:lstStyle/>
           <a:p>
-            <a:pPr indent="0" marL="0">
+            <a:pPr marL="0" indent="0">
               <a:buNone/>
             </a:pPr>
             <a:r>
@@ -10570,7 +10326,7 @@
           <a:bodyPr wrap="square" lIns="0" tIns="0" rIns="0" bIns="0" rtlCol="0" anchor="t"/>
           <a:lstStyle/>
           <a:p>
-            <a:pPr indent="0" marL="0">
+            <a:pPr marL="0" indent="0">
               <a:buNone/>
             </a:pPr>
             <a:r>
@@ -10605,7 +10361,7 @@
           </a:prstGeom>
           <a:extLst>
             <a:ext uri="{C572A759-6A51-4108-AA02-DFA0A04FC94B}">
-              <ma14:wrappingTextBoxFlag xmlns:ma14="http://schemas.microsoft.com/office/mac/drawingml/2011/main" val="0"/>
+              <ma14:wrappingTextBoxFlag xmlns:ma14="http://schemas.microsoft.com/office/mac/drawingml/2011/main" xmlns="" val="0"/>
             </a:ext>
           </a:extLst>
         </p:spPr>
@@ -10623,7 +10379,7 @@
           <a:p>
             <a:pPr algn="r"/>
             <a:fld id="{F7021451-1387-4CA6-816F-3879F97B5CBC}" type="slidenum">
-              <a:rPr b="0" lang="en-US"/>
+              <a:rPr lang="en-US" b="0"/>
               <a:t>13</a:t>
             </a:fld>
             <a:endParaRPr lang="en-US"/>
@@ -10657,79 +10413,12 @@
       </p:grpSpPr>
       <p:sp>
         <p:nvSpPr>
-          <p:cNvPr id="2" name="presenter chip"/>
-          <p:cNvSpPr/>
-          <p:nvPr/>
-        </p:nvSpPr>
-        <p:spPr>
-          <a:xfrm>
-            <a:off x="9921240" y="502920"/>
-            <a:ext cx="1691640" cy="457200"/>
-          </a:xfrm>
-          <a:prstGeom prst="roundRect">
-            <a:avLst>
-              <a:gd name="adj" fmla="val 50000"/>
-            </a:avLst>
-          </a:prstGeom>
-          <a:solidFill>
-            <a:schemeClr val="tx2"/>
-          </a:solidFill>
-          <a:ln/>
-        </p:spPr>
-      </p:sp>
-      <p:sp>
-        <p:nvSpPr>
-          <p:cNvPr id="3" name="Text 1"/>
-          <p:cNvSpPr txBox="1"/>
-          <p:nvPr/>
-        </p:nvSpPr>
-        <p:spPr>
-          <a:xfrm>
-            <a:off x="9921240" y="502920"/>
-            <a:ext cx="1691640" cy="457200"/>
-          </a:xfrm>
-          <a:prstGeom prst="rect">
-            <a:avLst/>
-          </a:prstGeom>
-          <a:noFill/>
-          <a:ln/>
-        </p:spPr>
-        <p:txBody>
-          <a:bodyPr wrap="square" lIns="0" tIns="0" rIns="0" bIns="0" rtlCol="0" anchor="ctr"/>
-          <a:lstStyle/>
-          <a:p>
-            <a:pPr algn="ctr" indent="0" marL="0">
-              <a:buNone/>
-            </a:pPr>
-            <a:r>
-              <a:rPr lang="en-US" sz="1100" dirty="0">
-                <a:solidFill>
-                  <a:schemeClr val="accent6"/>
-                </a:solidFill>
-              </a:rPr>
-              <a:t>Presenter  </a:t>
-            </a:r>
-            <a:pPr algn="ctr" indent="0" marL="0">
-              <a:buNone/>
-            </a:pPr>
-            <a:r>
-              <a:rPr lang="en-US" sz="1300" b="1" dirty="0">
-                <a:solidFill>
-                  <a:schemeClr val="bg1"/>
-                </a:solidFill>
-              </a:rPr>
-              <a:t>Ayush</a:t>
-            </a:r>
-            <a:endParaRPr lang="en-US" sz="1600" dirty="0"/>
-          </a:p>
-        </p:txBody>
-      </p:sp>
-      <p:sp>
-        <p:nvSpPr>
           <p:cNvPr id="4" name="Text 0"/>
-          <p:cNvSpPr/>
+          <p:cNvSpPr>
+            <a:spLocks noGrp="1"/>
+          </p:cNvSpPr>
           <p:nvPr>
-            <p:ph idx="100" type="title" hasCustomPrompt="1"/>
+            <p:ph type="title" idx="100" hasCustomPrompt="1"/>
           </p:nvPr>
         </p:nvSpPr>
         <p:spPr>
@@ -10747,7 +10436,7 @@
           <a:bodyPr wrap="square" lIns="0" tIns="0" rIns="0" bIns="0" rtlCol="0" anchor="ctr"/>
           <a:lstStyle/>
           <a:p>
-            <a:pPr algn="l" indent="0" marL="0">
+            <a:pPr marL="0" indent="0" algn="l">
               <a:buNone/>
             </a:pPr>
             <a:r>
@@ -10767,14 +10456,14 @@
       </p:sp>
       <p:pic>
         <p:nvPicPr>
-          <p:cNvPr id="5" name="roc curves" descr="ROC curves of the six models, nearly overlapping">    </p:cNvPr>
+          <p:cNvPr id="5" name="roc curves" descr="ROC curves of the six models, nearly overlapping"/>
           <p:cNvPicPr>
             <a:picLocks noChangeAspect="1"/>
           </p:cNvPicPr>
           <p:nvPr/>
         </p:nvPicPr>
         <p:blipFill>
-          <a:blip r:embed="rId1"/>
+          <a:blip r:embed="rId3"/>
           <a:stretch>
             <a:fillRect/>
           </a:stretch>
@@ -10810,7 +10499,7 @@
           <a:bodyPr wrap="square" lIns="0" tIns="0" rIns="0" bIns="0" rtlCol="0" anchor="t"/>
           <a:lstStyle/>
           <a:p>
-            <a:pPr indent="0" marL="0">
+            <a:pPr marL="0" indent="0">
               <a:buNone/>
             </a:pPr>
             <a:r>
@@ -10849,7 +10538,7 @@
           <a:bodyPr wrap="square" lIns="0" tIns="0" rIns="0" bIns="0" rtlCol="0" anchor="t"/>
           <a:lstStyle/>
           <a:p>
-            <a:pPr indent="0" marL="0">
+            <a:pPr marL="0" indent="0">
               <a:buNone/>
             </a:pPr>
             <a:r>
@@ -10885,7 +10574,7 @@
           <a:bodyPr wrap="square" lIns="0" tIns="0" rIns="0" bIns="0" rtlCol="0" anchor="t"/>
           <a:lstStyle/>
           <a:p>
-            <a:pPr indent="0" marL="0">
+            <a:pPr marL="0" indent="0">
               <a:buNone/>
             </a:pPr>
             <a:r>
@@ -10924,7 +10613,7 @@
           <a:bodyPr wrap="square" lIns="0" tIns="0" rIns="0" bIns="0" rtlCol="0" anchor="t"/>
           <a:lstStyle/>
           <a:p>
-            <a:pPr indent="0" marL="0">
+            <a:pPr marL="0" indent="0">
               <a:buNone/>
             </a:pPr>
             <a:r>
@@ -10960,6 +10649,13 @@
           </a:solidFill>
           <a:ln/>
         </p:spPr>
+        <p:txBody>
+          <a:bodyPr/>
+          <a:lstStyle/>
+          <a:p>
+            <a:endParaRPr lang="en-US"/>
+          </a:p>
+        </p:txBody>
       </p:sp>
       <p:sp>
         <p:nvSpPr>
@@ -10982,7 +10678,7 @@
           <a:bodyPr wrap="square" lIns="0" tIns="0" rIns="0" bIns="0" rtlCol="0" anchor="t"/>
           <a:lstStyle/>
           <a:p>
-            <a:pPr indent="0" marL="0">
+            <a:pPr marL="0" indent="0">
               <a:buNone/>
             </a:pPr>
             <a:r>
@@ -11111,7 +10807,7 @@
           </a:prstGeom>
           <a:extLst>
             <a:ext uri="{C572A759-6A51-4108-AA02-DFA0A04FC94B}">
-              <ma14:wrappingTextBoxFlag xmlns:ma14="http://schemas.microsoft.com/office/mac/drawingml/2011/main" val="0"/>
+              <ma14:wrappingTextBoxFlag xmlns:ma14="http://schemas.microsoft.com/office/mac/drawingml/2011/main" xmlns="" val="0"/>
             </a:ext>
           </a:extLst>
         </p:spPr>
@@ -11129,7 +10825,7 @@
           <a:p>
             <a:pPr algn="r"/>
             <a:fld id="{F7021451-1387-4CA6-816F-3879F97B5CBC}" type="slidenum">
-              <a:rPr b="0" lang="en-US"/>
+              <a:rPr lang="en-US" b="0"/>
               <a:t>14</a:t>
             </a:fld>
             <a:endParaRPr lang="en-US"/>
@@ -11163,79 +10859,12 @@
       </p:grpSpPr>
       <p:sp>
         <p:nvSpPr>
-          <p:cNvPr id="2" name="presenter chip"/>
-          <p:cNvSpPr/>
-          <p:nvPr/>
-        </p:nvSpPr>
-        <p:spPr>
-          <a:xfrm>
-            <a:off x="9921240" y="502920"/>
-            <a:ext cx="1691640" cy="457200"/>
-          </a:xfrm>
-          <a:prstGeom prst="roundRect">
-            <a:avLst>
-              <a:gd name="adj" fmla="val 50000"/>
-            </a:avLst>
-          </a:prstGeom>
-          <a:solidFill>
-            <a:schemeClr val="tx2"/>
-          </a:solidFill>
-          <a:ln/>
-        </p:spPr>
-      </p:sp>
-      <p:sp>
-        <p:nvSpPr>
-          <p:cNvPr id="3" name="Text 1"/>
-          <p:cNvSpPr txBox="1"/>
-          <p:nvPr/>
-        </p:nvSpPr>
-        <p:spPr>
-          <a:xfrm>
-            <a:off x="9921240" y="502920"/>
-            <a:ext cx="1691640" cy="457200"/>
-          </a:xfrm>
-          <a:prstGeom prst="rect">
-            <a:avLst/>
-          </a:prstGeom>
-          <a:noFill/>
-          <a:ln/>
-        </p:spPr>
-        <p:txBody>
-          <a:bodyPr wrap="square" lIns="0" tIns="0" rIns="0" bIns="0" rtlCol="0" anchor="ctr"/>
-          <a:lstStyle/>
-          <a:p>
-            <a:pPr algn="ctr" indent="0" marL="0">
-              <a:buNone/>
-            </a:pPr>
-            <a:r>
-              <a:rPr lang="en-US" sz="1100" dirty="0">
-                <a:solidFill>
-                  <a:schemeClr val="accent6"/>
-                </a:solidFill>
-              </a:rPr>
-              <a:t>Presenter  </a:t>
-            </a:r>
-            <a:pPr algn="ctr" indent="0" marL="0">
-              <a:buNone/>
-            </a:pPr>
-            <a:r>
-              <a:rPr lang="en-US" sz="1300" b="1" dirty="0">
-                <a:solidFill>
-                  <a:schemeClr val="bg1"/>
-                </a:solidFill>
-              </a:rPr>
-              <a:t>Vansh</a:t>
-            </a:r>
-            <a:endParaRPr lang="en-US" sz="1600" dirty="0"/>
-          </a:p>
-        </p:txBody>
-      </p:sp>
-      <p:sp>
-        <p:nvSpPr>
           <p:cNvPr id="4" name="Text 0"/>
-          <p:cNvSpPr/>
+          <p:cNvSpPr>
+            <a:spLocks noGrp="1"/>
+          </p:cNvSpPr>
           <p:nvPr>
-            <p:ph idx="100" type="title" hasCustomPrompt="1"/>
+            <p:ph type="title" idx="100" hasCustomPrompt="1"/>
           </p:nvPr>
         </p:nvSpPr>
         <p:spPr>
@@ -11253,7 +10882,7 @@
           <a:bodyPr wrap="square" lIns="0" tIns="0" rIns="0" bIns="0" rtlCol="0" anchor="ctr"/>
           <a:lstStyle/>
           <a:p>
-            <a:pPr algn="l" indent="0" marL="0">
+            <a:pPr marL="0" indent="0" algn="l">
               <a:buNone/>
             </a:pPr>
             <a:r>
@@ -11273,14 +10902,14 @@
       </p:sp>
       <p:pic>
         <p:nvPicPr>
-          <p:cNvPr id="5" name="feature importance" descr="Permutation importance bars for Logistic Regression, Random Forest and Gradient Boosting">    </p:cNvPr>
+          <p:cNvPr id="5" name="feature importance" descr="Permutation importance bars for Logistic Regression, Random Forest and Gradient Boosting"/>
           <p:cNvPicPr>
             <a:picLocks noChangeAspect="1"/>
           </p:cNvPicPr>
           <p:nvPr/>
         </p:nvPicPr>
         <p:blipFill>
-          <a:blip r:embed="rId1"/>
+          <a:blip r:embed="rId3"/>
           <a:stretch>
             <a:fillRect/>
           </a:stretch>
@@ -11316,6 +10945,13 @@
           </a:solidFill>
           <a:ln/>
         </p:spPr>
+        <p:txBody>
+          <a:bodyPr/>
+          <a:lstStyle/>
+          <a:p>
+            <a:endParaRPr lang="en-US"/>
+          </a:p>
+        </p:txBody>
       </p:sp>
       <p:sp>
         <p:nvSpPr>
@@ -11338,7 +10974,7 @@
           <a:bodyPr wrap="square" lIns="0" tIns="0" rIns="0" bIns="0" rtlCol="0" anchor="t"/>
           <a:lstStyle/>
           <a:p>
-            <a:pPr indent="0" marL="0">
+            <a:pPr marL="0" indent="0">
               <a:buNone/>
             </a:pPr>
             <a:r>
@@ -11349,9 +10985,6 @@
               </a:rPr>
               <a:t>Permutation importance: </a:t>
             </a:r>
-            <a:pPr indent="0" marL="0">
-              <a:buNone/>
-            </a:pPr>
             <a:r>
               <a:rPr lang="en-US" sz="1400" dirty="0">
                 <a:solidFill>
@@ -11385,6 +11018,13 @@
           </a:solidFill>
           <a:ln/>
         </p:spPr>
+        <p:txBody>
+          <a:bodyPr/>
+          <a:lstStyle/>
+          <a:p>
+            <a:endParaRPr lang="en-US"/>
+          </a:p>
+        </p:txBody>
       </p:sp>
       <p:sp>
         <p:nvSpPr>
@@ -11407,7 +11047,7 @@
           <a:bodyPr wrap="square" lIns="0" tIns="0" rIns="0" bIns="0" rtlCol="0" anchor="t"/>
           <a:lstStyle/>
           <a:p>
-            <a:pPr indent="0" marL="0">
+            <a:pPr marL="0" indent="0">
               <a:buNone/>
             </a:pPr>
             <a:r>
@@ -11418,9 +11058,6 @@
               </a:rPr>
               <a:t>All three agree: </a:t>
             </a:r>
-            <a:pPr indent="0" marL="0">
-              <a:buNone/>
-            </a:pPr>
             <a:r>
               <a:rPr lang="en-US" sz="1400" dirty="0">
                 <a:solidFill>
@@ -11453,7 +11090,7 @@
           </a:prstGeom>
           <a:extLst>
             <a:ext uri="{C572A759-6A51-4108-AA02-DFA0A04FC94B}">
-              <ma14:wrappingTextBoxFlag xmlns:ma14="http://schemas.microsoft.com/office/mac/drawingml/2011/main" val="0"/>
+              <ma14:wrappingTextBoxFlag xmlns:ma14="http://schemas.microsoft.com/office/mac/drawingml/2011/main" xmlns="" val="0"/>
             </a:ext>
           </a:extLst>
         </p:spPr>
@@ -11471,7 +11108,7 @@
           <a:p>
             <a:pPr algn="r"/>
             <a:fld id="{F7021451-1387-4CA6-816F-3879F97B5CBC}" type="slidenum">
-              <a:rPr b="0" lang="en-US"/>
+              <a:rPr lang="en-US" b="0"/>
               <a:t>15</a:t>
             </a:fld>
             <a:endParaRPr lang="en-US"/>
@@ -11505,79 +11142,12 @@
       </p:grpSpPr>
       <p:sp>
         <p:nvSpPr>
-          <p:cNvPr id="2" name="presenter chip"/>
-          <p:cNvSpPr/>
-          <p:nvPr/>
-        </p:nvSpPr>
-        <p:spPr>
-          <a:xfrm>
-            <a:off x="9921240" y="502920"/>
-            <a:ext cx="1691640" cy="457200"/>
-          </a:xfrm>
-          <a:prstGeom prst="roundRect">
-            <a:avLst>
-              <a:gd name="adj" fmla="val 50000"/>
-            </a:avLst>
-          </a:prstGeom>
-          <a:solidFill>
-            <a:schemeClr val="tx2"/>
-          </a:solidFill>
-          <a:ln/>
-        </p:spPr>
-      </p:sp>
-      <p:sp>
-        <p:nvSpPr>
-          <p:cNvPr id="3" name="Text 1"/>
-          <p:cNvSpPr txBox="1"/>
-          <p:nvPr/>
-        </p:nvSpPr>
-        <p:spPr>
-          <a:xfrm>
-            <a:off x="9921240" y="502920"/>
-            <a:ext cx="1691640" cy="457200"/>
-          </a:xfrm>
-          <a:prstGeom prst="rect">
-            <a:avLst/>
-          </a:prstGeom>
-          <a:noFill/>
-          <a:ln/>
-        </p:spPr>
-        <p:txBody>
-          <a:bodyPr wrap="square" lIns="0" tIns="0" rIns="0" bIns="0" rtlCol="0" anchor="ctr"/>
-          <a:lstStyle/>
-          <a:p>
-            <a:pPr algn="ctr" indent="0" marL="0">
-              <a:buNone/>
-            </a:pPr>
-            <a:r>
-              <a:rPr lang="en-US" sz="1100" dirty="0">
-                <a:solidFill>
-                  <a:schemeClr val="accent6"/>
-                </a:solidFill>
-              </a:rPr>
-              <a:t>Presenter  </a:t>
-            </a:r>
-            <a:pPr algn="ctr" indent="0" marL="0">
-              <a:buNone/>
-            </a:pPr>
-            <a:r>
-              <a:rPr lang="en-US" sz="1300" b="1" dirty="0">
-                <a:solidFill>
-                  <a:schemeClr val="bg1"/>
-                </a:solidFill>
-              </a:rPr>
-              <a:t>Kabir</a:t>
-            </a:r>
-            <a:endParaRPr lang="en-US" sz="1600" dirty="0"/>
-          </a:p>
-        </p:txBody>
-      </p:sp>
-      <p:sp>
-        <p:nvSpPr>
           <p:cNvPr id="4" name="Text 0"/>
-          <p:cNvSpPr/>
+          <p:cNvSpPr>
+            <a:spLocks noGrp="1"/>
+          </p:cNvSpPr>
           <p:nvPr>
-            <p:ph idx="100" type="title" hasCustomPrompt="1"/>
+            <p:ph type="title" idx="100" hasCustomPrompt="1"/>
           </p:nvPr>
         </p:nvSpPr>
         <p:spPr>
@@ -11595,7 +11165,7 @@
           <a:bodyPr wrap="square" lIns="0" tIns="0" rIns="0" bIns="0" rtlCol="0" anchor="ctr"/>
           <a:lstStyle/>
           <a:p>
-            <a:pPr algn="l" indent="0" marL="0">
+            <a:pPr marL="0" indent="0" algn="l">
               <a:buNone/>
             </a:pPr>
             <a:r>
@@ -11615,14 +11185,14 @@
       </p:sp>
       <p:pic>
         <p:nvPicPr>
-          <p:cNvPr id="5" name="app overview" descr="Overview page of the web app with each model's ROC AUC">    </p:cNvPr>
+          <p:cNvPr id="5" name="app overview" descr="Overview page of the web app with each model's ROC AUC"/>
           <p:cNvPicPr>
             <a:picLocks noChangeAspect="1"/>
           </p:cNvPicPr>
           <p:nvPr/>
         </p:nvPicPr>
         <p:blipFill>
-          <a:blip r:embed="rId1"/>
+          <a:blip r:embed="rId3"/>
           <a:stretch>
             <a:fillRect/>
           </a:stretch>
@@ -11636,7 +11206,7 @@
             <a:avLst/>
           </a:prstGeom>
           <a:effectLst>
-            <a:outerShdw sx="100000" sy="100000" kx="0" ky="0" algn="bl" rotWithShape="0" blurRad="76200" dist="25400" dir="5400000">
+            <a:outerShdw blurRad="76200" dist="25400" dir="5400000" algn="bl" rotWithShape="0">
               <a:srgbClr val="000000">
                 <a:alpha val="12000"/>
               </a:srgbClr>
@@ -11646,14 +11216,14 @@
       </p:pic>
       <p:pic>
         <p:nvPicPr>
-          <p:cNvPr id="6" name="app estimator" descr="Risk estimator page showing the probability of disease from the six models">    </p:cNvPr>
+          <p:cNvPr id="6" name="app estimator" descr="Risk estimator page showing the probability of disease from the six models"/>
           <p:cNvPicPr>
             <a:picLocks noChangeAspect="1"/>
           </p:cNvPicPr>
           <p:nvPr/>
         </p:nvPicPr>
         <p:blipFill>
-          <a:blip r:embed="rId2"/>
+          <a:blip r:embed="rId4"/>
           <a:stretch>
             <a:fillRect/>
           </a:stretch>
@@ -11667,7 +11237,7 @@
             <a:avLst/>
           </a:prstGeom>
           <a:effectLst>
-            <a:outerShdw sx="100000" sy="100000" kx="0" ky="0" algn="bl" rotWithShape="0" blurRad="76200" dist="25400" dir="5400000">
+            <a:outerShdw blurRad="76200" dist="25400" dir="5400000" algn="bl" rotWithShape="0">
               <a:srgbClr val="000000">
                 <a:alpha val="12000"/>
               </a:srgbClr>
@@ -11696,7 +11266,7 @@
           <a:bodyPr wrap="square" lIns="0" tIns="0" rIns="0" bIns="0" rtlCol="0" anchor="t"/>
           <a:lstStyle/>
           <a:p>
-            <a:pPr indent="0" marL="0">
+            <a:pPr marL="0" indent="0">
               <a:buNone/>
             </a:pPr>
             <a:r>
@@ -11732,7 +11302,7 @@
           <a:bodyPr wrap="square" lIns="0" tIns="0" rIns="0" bIns="0" rtlCol="0" anchor="t"/>
           <a:lstStyle/>
           <a:p>
-            <a:pPr indent="0" marL="0">
+            <a:pPr marL="0" indent="0">
               <a:buNone/>
             </a:pPr>
             <a:r>
@@ -11768,7 +11338,7 @@
           <a:bodyPr wrap="square" lIns="0" tIns="0" rIns="0" bIns="0" rtlCol="0" anchor="t"/>
           <a:lstStyle/>
           <a:p>
-            <a:pPr indent="0" marL="0">
+            <a:pPr marL="0" indent="0">
               <a:buNone/>
             </a:pPr>
             <a:r>
@@ -11803,7 +11373,7 @@
           </a:prstGeom>
           <a:extLst>
             <a:ext uri="{C572A759-6A51-4108-AA02-DFA0A04FC94B}">
-              <ma14:wrappingTextBoxFlag xmlns:ma14="http://schemas.microsoft.com/office/mac/drawingml/2011/main" val="0"/>
+              <ma14:wrappingTextBoxFlag xmlns:ma14="http://schemas.microsoft.com/office/mac/drawingml/2011/main" xmlns="" val="0"/>
             </a:ext>
           </a:extLst>
         </p:spPr>
@@ -11821,7 +11391,7 @@
           <a:p>
             <a:pPr algn="r"/>
             <a:fld id="{F7021451-1387-4CA6-816F-3879F97B5CBC}" type="slidenum">
-              <a:rPr b="0" lang="en-US"/>
+              <a:rPr lang="en-US" b="0"/>
               <a:t>16</a:t>
             </a:fld>
             <a:endParaRPr lang="en-US"/>
@@ -11855,79 +11425,12 @@
       </p:grpSpPr>
       <p:sp>
         <p:nvSpPr>
-          <p:cNvPr id="2" name="presenter chip"/>
-          <p:cNvSpPr/>
-          <p:nvPr/>
-        </p:nvSpPr>
-        <p:spPr>
-          <a:xfrm>
-            <a:off x="9921240" y="502920"/>
-            <a:ext cx="1691640" cy="457200"/>
-          </a:xfrm>
-          <a:prstGeom prst="roundRect">
-            <a:avLst>
-              <a:gd name="adj" fmla="val 50000"/>
-            </a:avLst>
-          </a:prstGeom>
-          <a:solidFill>
-            <a:schemeClr val="tx2"/>
-          </a:solidFill>
-          <a:ln/>
-        </p:spPr>
-      </p:sp>
-      <p:sp>
-        <p:nvSpPr>
-          <p:cNvPr id="3" name="Text 1"/>
-          <p:cNvSpPr txBox="1"/>
-          <p:nvPr/>
-        </p:nvSpPr>
-        <p:spPr>
-          <a:xfrm>
-            <a:off x="9921240" y="502920"/>
-            <a:ext cx="1691640" cy="457200"/>
-          </a:xfrm>
-          <a:prstGeom prst="rect">
-            <a:avLst/>
-          </a:prstGeom>
-          <a:noFill/>
-          <a:ln/>
-        </p:spPr>
-        <p:txBody>
-          <a:bodyPr wrap="square" lIns="0" tIns="0" rIns="0" bIns="0" rtlCol="0" anchor="ctr"/>
-          <a:lstStyle/>
-          <a:p>
-            <a:pPr algn="ctr" indent="0" marL="0">
-              <a:buNone/>
-            </a:pPr>
-            <a:r>
-              <a:rPr lang="en-US" sz="1100" dirty="0">
-                <a:solidFill>
-                  <a:schemeClr val="accent6"/>
-                </a:solidFill>
-              </a:rPr>
-              <a:t>Presenter  </a:t>
-            </a:r>
-            <a:pPr algn="ctr" indent="0" marL="0">
-              <a:buNone/>
-            </a:pPr>
-            <a:r>
-              <a:rPr lang="en-US" sz="1300" b="1" dirty="0">
-                <a:solidFill>
-                  <a:schemeClr val="bg1"/>
-                </a:solidFill>
-              </a:rPr>
-              <a:t>Hardik</a:t>
-            </a:r>
-            <a:endParaRPr lang="en-US" sz="1600" dirty="0"/>
-          </a:p>
-        </p:txBody>
-      </p:sp>
-      <p:sp>
-        <p:nvSpPr>
           <p:cNvPr id="4" name="Text 0"/>
-          <p:cNvSpPr/>
+          <p:cNvSpPr>
+            <a:spLocks noGrp="1"/>
+          </p:cNvSpPr>
           <p:nvPr>
-            <p:ph idx="100" type="title" hasCustomPrompt="1"/>
+            <p:ph type="title" idx="100" hasCustomPrompt="1"/>
           </p:nvPr>
         </p:nvSpPr>
         <p:spPr>
@@ -11945,7 +11448,7 @@
           <a:bodyPr wrap="square" lIns="0" tIns="0" rIns="0" bIns="0" rtlCol="0" anchor="ctr"/>
           <a:lstStyle/>
           <a:p>
-            <a:pPr algn="l" indent="0" marL="0">
+            <a:pPr marL="0" indent="0" algn="l">
               <a:buNone/>
             </a:pPr>
             <a:r>
@@ -11984,6 +11487,13 @@
           </a:solidFill>
           <a:ln/>
         </p:spPr>
+        <p:txBody>
+          <a:bodyPr/>
+          <a:lstStyle/>
+          <a:p>
+            <a:endParaRPr lang="en-US"/>
+          </a:p>
+        </p:txBody>
       </p:sp>
       <p:sp>
         <p:nvSpPr>
@@ -12006,7 +11516,7 @@
           <a:bodyPr wrap="square" lIns="0" tIns="0" rIns="0" bIns="0" rtlCol="0" anchor="t"/>
           <a:lstStyle/>
           <a:p>
-            <a:pPr indent="0" marL="0">
+            <a:pPr marL="0" indent="0">
               <a:buNone/>
             </a:pPr>
             <a:r>
@@ -12157,6 +11667,13 @@
           </a:solidFill>
           <a:ln/>
         </p:spPr>
+        <p:txBody>
+          <a:bodyPr/>
+          <a:lstStyle/>
+          <a:p>
+            <a:endParaRPr lang="en-US"/>
+          </a:p>
+        </p:txBody>
       </p:sp>
       <p:sp>
         <p:nvSpPr>
@@ -12179,7 +11696,7 @@
           <a:bodyPr wrap="square" lIns="0" tIns="0" rIns="0" bIns="0" rtlCol="0" anchor="t"/>
           <a:lstStyle/>
           <a:p>
-            <a:pPr indent="0" marL="0">
+            <a:pPr marL="0" indent="0">
               <a:buNone/>
             </a:pPr>
             <a:r>
@@ -12329,7 +11846,7 @@
           </a:prstGeom>
           <a:extLst>
             <a:ext uri="{C572A759-6A51-4108-AA02-DFA0A04FC94B}">
-              <ma14:wrappingTextBoxFlag xmlns:ma14="http://schemas.microsoft.com/office/mac/drawingml/2011/main" val="0"/>
+              <ma14:wrappingTextBoxFlag xmlns:ma14="http://schemas.microsoft.com/office/mac/drawingml/2011/main" xmlns="" val="0"/>
             </a:ext>
           </a:extLst>
         </p:spPr>
@@ -12347,7 +11864,7 @@
           <a:p>
             <a:pPr algn="r"/>
             <a:fld id="{F7021451-1387-4CA6-816F-3879F97B5CBC}" type="slidenum">
-              <a:rPr b="0" lang="en-US"/>
+              <a:rPr lang="en-US" b="0"/>
               <a:t>17</a:t>
             </a:fld>
             <a:endParaRPr lang="en-US"/>
@@ -12382,9 +11899,11 @@
       <p:sp>
         <p:nvSpPr>
           <p:cNvPr id="2" name="Text 0"/>
-          <p:cNvSpPr/>
+          <p:cNvSpPr>
+            <a:spLocks noGrp="1"/>
+          </p:cNvSpPr>
           <p:nvPr>
-            <p:ph idx="100" type="title" hasCustomPrompt="1"/>
+            <p:ph type="title" idx="100" hasCustomPrompt="1"/>
           </p:nvPr>
         </p:nvSpPr>
         <p:spPr>
@@ -12402,7 +11921,7 @@
           <a:bodyPr wrap="square" lIns="0" tIns="0" rIns="0" bIns="0" rtlCol="0" anchor="ctr"/>
           <a:lstStyle/>
           <a:p>
-            <a:pPr algn="l" indent="0" marL="0">
+            <a:pPr marL="0" indent="0" algn="l">
               <a:buNone/>
             </a:pPr>
             <a:r>
@@ -12439,6 +11958,13 @@
           </a:solidFill>
           <a:ln/>
         </p:spPr>
+        <p:txBody>
+          <a:bodyPr/>
+          <a:lstStyle/>
+          <a:p>
+            <a:endParaRPr lang="en-US"/>
+          </a:p>
+        </p:txBody>
       </p:sp>
       <p:sp>
         <p:nvSpPr>
@@ -12461,7 +11987,7 @@
           <a:bodyPr wrap="square" lIns="0" tIns="0" rIns="0" bIns="0" rtlCol="0" anchor="t"/>
           <a:lstStyle/>
           <a:p>
-            <a:pPr indent="0" marL="0">
+            <a:pPr marL="0" indent="0">
               <a:buNone/>
             </a:pPr>
             <a:r>
@@ -12500,7 +12026,7 @@
           <a:bodyPr wrap="square" lIns="0" tIns="0" rIns="0" bIns="0" rtlCol="0" anchor="t"/>
           <a:lstStyle/>
           <a:p>
-            <a:pPr indent="0" marL="0">
+            <a:pPr marL="0" indent="0">
               <a:buNone/>
             </a:pPr>
             <a:r>
@@ -12534,6 +12060,13 @@
           </a:solidFill>
           <a:ln/>
         </p:spPr>
+        <p:txBody>
+          <a:bodyPr/>
+          <a:lstStyle/>
+          <a:p>
+            <a:endParaRPr lang="en-US"/>
+          </a:p>
+        </p:txBody>
       </p:sp>
       <p:sp>
         <p:nvSpPr>
@@ -12556,7 +12089,7 @@
           <a:bodyPr wrap="square" lIns="0" tIns="0" rIns="0" bIns="0" rtlCol="0" anchor="t"/>
           <a:lstStyle/>
           <a:p>
-            <a:pPr indent="0" marL="0">
+            <a:pPr marL="0" indent="0">
               <a:buNone/>
             </a:pPr>
             <a:r>
@@ -12595,7 +12128,7 @@
           <a:bodyPr wrap="square" lIns="0" tIns="0" rIns="0" bIns="0" rtlCol="0" anchor="t"/>
           <a:lstStyle/>
           <a:p>
-            <a:pPr indent="0" marL="0">
+            <a:pPr marL="0" indent="0">
               <a:buNone/>
             </a:pPr>
             <a:r>
@@ -12629,6 +12162,13 @@
           </a:solidFill>
           <a:ln/>
         </p:spPr>
+        <p:txBody>
+          <a:bodyPr/>
+          <a:lstStyle/>
+          <a:p>
+            <a:endParaRPr lang="en-US"/>
+          </a:p>
+        </p:txBody>
       </p:sp>
       <p:sp>
         <p:nvSpPr>
@@ -12651,7 +12191,7 @@
           <a:bodyPr wrap="square" lIns="0" tIns="0" rIns="0" bIns="0" rtlCol="0" anchor="t"/>
           <a:lstStyle/>
           <a:p>
-            <a:pPr indent="0" marL="0">
+            <a:pPr marL="0" indent="0">
               <a:buNone/>
             </a:pPr>
             <a:r>
@@ -12690,7 +12230,7 @@
           <a:bodyPr wrap="square" lIns="0" tIns="0" rIns="0" bIns="0" rtlCol="0" anchor="t"/>
           <a:lstStyle/>
           <a:p>
-            <a:pPr indent="0" marL="0">
+            <a:pPr marL="0" indent="0">
               <a:buNone/>
             </a:pPr>
             <a:r>
@@ -12726,7 +12266,7 @@
           <a:bodyPr wrap="square" lIns="0" tIns="0" rIns="0" bIns="0" rtlCol="0" anchor="t"/>
           <a:lstStyle/>
           <a:p>
-            <a:pPr indent="0" marL="0">
+            <a:pPr marL="0" indent="0">
               <a:buNone/>
             </a:pPr>
             <a:r>
@@ -12771,79 +12311,12 @@
       </p:grpSpPr>
       <p:sp>
         <p:nvSpPr>
-          <p:cNvPr id="2" name="presenter chip"/>
-          <p:cNvSpPr/>
-          <p:nvPr/>
-        </p:nvSpPr>
-        <p:spPr>
-          <a:xfrm>
-            <a:off x="9921240" y="502920"/>
-            <a:ext cx="1691640" cy="457200"/>
-          </a:xfrm>
-          <a:prstGeom prst="roundRect">
-            <a:avLst>
-              <a:gd name="adj" fmla="val 50000"/>
-            </a:avLst>
-          </a:prstGeom>
-          <a:solidFill>
-            <a:schemeClr val="tx2"/>
-          </a:solidFill>
-          <a:ln/>
-        </p:spPr>
-      </p:sp>
-      <p:sp>
-        <p:nvSpPr>
-          <p:cNvPr id="3" name="Text 1"/>
-          <p:cNvSpPr txBox="1"/>
-          <p:nvPr/>
-        </p:nvSpPr>
-        <p:spPr>
-          <a:xfrm>
-            <a:off x="9921240" y="502920"/>
-            <a:ext cx="1691640" cy="457200"/>
-          </a:xfrm>
-          <a:prstGeom prst="rect">
-            <a:avLst/>
-          </a:prstGeom>
-          <a:noFill/>
-          <a:ln/>
-        </p:spPr>
-        <p:txBody>
-          <a:bodyPr wrap="square" lIns="0" tIns="0" rIns="0" bIns="0" rtlCol="0" anchor="ctr"/>
-          <a:lstStyle/>
-          <a:p>
-            <a:pPr algn="ctr" indent="0" marL="0">
-              <a:buNone/>
-            </a:pPr>
-            <a:r>
-              <a:rPr lang="en-US" sz="1100" dirty="0">
-                <a:solidFill>
-                  <a:schemeClr val="accent6"/>
-                </a:solidFill>
-              </a:rPr>
-              <a:t>Presenter  </a:t>
-            </a:r>
-            <a:pPr algn="ctr" indent="0" marL="0">
-              <a:buNone/>
-            </a:pPr>
-            <a:r>
-              <a:rPr lang="en-US" sz="1300" b="1" dirty="0">
-                <a:solidFill>
-                  <a:schemeClr val="bg1"/>
-                </a:solidFill>
-              </a:rPr>
-              <a:t>Hardik</a:t>
-            </a:r>
-            <a:endParaRPr lang="en-US" sz="1600" dirty="0"/>
-          </a:p>
-        </p:txBody>
-      </p:sp>
-      <p:sp>
-        <p:nvSpPr>
           <p:cNvPr id="4" name="Text 0"/>
-          <p:cNvSpPr/>
+          <p:cNvSpPr>
+            <a:spLocks noGrp="1"/>
+          </p:cNvSpPr>
           <p:nvPr>
-            <p:ph idx="100" type="title" hasCustomPrompt="1"/>
+            <p:ph type="title" idx="100" hasCustomPrompt="1"/>
           </p:nvPr>
         </p:nvSpPr>
         <p:spPr>
@@ -12861,7 +12334,7 @@
           <a:bodyPr wrap="square" lIns="0" tIns="0" rIns="0" bIns="0" rtlCol="0" anchor="ctr"/>
           <a:lstStyle/>
           <a:p>
-            <a:pPr algn="l" indent="0" marL="0">
+            <a:pPr marL="0" indent="0" algn="l">
               <a:buNone/>
             </a:pPr>
             <a:r>
@@ -12881,30 +12354,48 @@
       </p:sp>
       <p:graphicFrame>
         <p:nvGraphicFramePr>
-          <p:cNvPr id="3" name="team table"/>
+          <p:cNvPr id="5" name="team table"/>
           <p:cNvGraphicFramePr>
             <a:graphicFrameLocks noGrp="1"/>
           </p:cNvGraphicFramePr>
           <p:nvPr>
             <p:extLst>
               <p:ext uri="{D42A27DB-BD31-4B8C-83A1-F6EECF244321}">
-                <p14:modId xmlns:p14="http://schemas.microsoft.com/office/powerpoint/2010/main" val="1579011935"/>
+                <p14:modId xmlns:p14="http://schemas.microsoft.com/office/powerpoint/2010/main" val="3796194893"/>
               </p:ext>
             </p:extLst>
           </p:nvPr>
         </p:nvGraphicFramePr>
         <p:xfrm>
           <a:off x="548640" y="1417320"/>
-          <a:ext cx="11064240" cy="914400"/>
+          <a:ext cx="11064240" cy="4343400"/>
         </p:xfrm>
         <a:graphic>
           <a:graphicData uri="http://schemas.openxmlformats.org/drawingml/2006/table">
             <a:tbl>
               <a:tblPr/>
               <a:tblGrid>
-                <a:gridCol w="1554480"/>
-                <a:gridCol w="5760720"/>
-                <a:gridCol w="3749040"/>
+                <a:gridCol w="1554480">
+                  <a:extLst>
+                    <a:ext uri="{9D8B030D-6E8A-4147-A177-3AD203B41FA5}">
+                      <a16:colId xmlns:a16="http://schemas.microsoft.com/office/drawing/2014/main" val="20000"/>
+                    </a:ext>
+                  </a:extLst>
+                </a:gridCol>
+                <a:gridCol w="5760720">
+                  <a:extLst>
+                    <a:ext uri="{9D8B030D-6E8A-4147-A177-3AD203B41FA5}">
+                      <a16:colId xmlns:a16="http://schemas.microsoft.com/office/drawing/2014/main" val="20001"/>
+                    </a:ext>
+                  </a:extLst>
+                </a:gridCol>
+                <a:gridCol w="3749040">
+                  <a:extLst>
+                    <a:ext uri="{9D8B030D-6E8A-4147-A177-3AD203B41FA5}">
+                      <a16:colId xmlns:a16="http://schemas.microsoft.com/office/drawing/2014/main" val="20002"/>
+                    </a:ext>
+                  </a:extLst>
+                </a:gridCol>
               </a:tblGrid>
               <a:tr h="457200">
                 <a:tc>
@@ -12912,7 +12403,7 @@
                     <a:bodyPr/>
                     <a:lstStyle/>
                     <a:p>
-                      <a:pPr indent="0" marL="0">
+                      <a:pPr marL="0" indent="0">
                         <a:buNone/>
                       </a:pPr>
                       <a:r>
@@ -12980,7 +12471,7 @@
                     <a:bodyPr/>
                     <a:lstStyle/>
                     <a:p>
-                      <a:pPr indent="0" marL="0">
+                      <a:pPr marL="0" indent="0">
                         <a:buNone/>
                       </a:pPr>
                       <a:r>
@@ -13048,7 +12539,7 @@
                     <a:bodyPr/>
                     <a:lstStyle/>
                     <a:p>
-                      <a:pPr indent="0" marL="0">
+                      <a:pPr marL="0" indent="0">
                         <a:buNone/>
                       </a:pPr>
                       <a:r>
@@ -13111,6 +12602,11 @@
                     </a:solidFill>
                   </a:tcPr>
                 </a:tc>
+                <a:extLst>
+                  <a:ext uri="{0D108BD9-81ED-4DB2-BD59-A6C34878D82A}">
+                    <a16:rowId xmlns:a16="http://schemas.microsoft.com/office/drawing/2014/main" val="10000"/>
+                  </a:ext>
+                </a:extLst>
               </a:tr>
               <a:tr h="777240">
                 <a:tc>
@@ -13118,7 +12614,429 @@
                     <a:bodyPr/>
                     <a:lstStyle/>
                     <a:p>
-                      <a:pPr indent="0" marL="0">
+                      <a:pPr marL="0" indent="0">
+                        <a:buNone/>
+                      </a:pPr>
+                      <a:r>
+                        <a:rPr lang="en-US" sz="1500" b="1" dirty="0">
+                          <a:solidFill>
+                            <a:schemeClr val="tx2"/>
+                          </a:solidFill>
+                          <a:latin typeface="Calibri" pitchFamily="34" charset="0"/>
+                          <a:ea typeface="Calibri" pitchFamily="34" charset="-122"/>
+                          <a:cs typeface="Calibri" pitchFamily="34" charset="-120"/>
+                        </a:rPr>
+                        <a:t>Ayush</a:t>
+                      </a:r>
+                      <a:endParaRPr lang="en-US" sz="1500" dirty="0">
+                        <a:latin typeface="Calibri" charset="0"/>
+                        <a:ea typeface="Calibri" charset="0"/>
+                        <a:cs typeface="Calibri" charset="0"/>
+                      </a:endParaRPr>
+                    </a:p>
+                  </a:txBody>
+                  <a:tcPr marL="109728" marR="109728" marT="109728" marB="109728" anchor="ctr">
+                    <a:lnL w="12700" cap="flat" cmpd="sng" algn="ctr">
+                      <a:solidFill>
+                        <a:srgbClr val="FFFFFF"/>
+                      </a:solidFill>
+                      <a:prstDash val="solid"/>
+                      <a:round/>
+                      <a:headEnd type="none" w="med" len="med"/>
+                      <a:tailEnd type="none" w="med" len="med"/>
+                    </a:lnL>
+                    <a:lnR w="12700" cap="flat" cmpd="sng" algn="ctr">
+                      <a:solidFill>
+                        <a:srgbClr val="FFFFFF"/>
+                      </a:solidFill>
+                      <a:prstDash val="solid"/>
+                      <a:round/>
+                      <a:headEnd type="none" w="med" len="med"/>
+                      <a:tailEnd type="none" w="med" len="med"/>
+                    </a:lnR>
+                    <a:lnT w="12700" cap="flat" cmpd="sng" algn="ctr">
+                      <a:solidFill>
+                        <a:srgbClr val="FFFFFF"/>
+                      </a:solidFill>
+                      <a:prstDash val="solid"/>
+                      <a:round/>
+                      <a:headEnd type="none" w="med" len="med"/>
+                      <a:tailEnd type="none" w="med" len="med"/>
+                    </a:lnT>
+                    <a:lnB w="12700" cap="flat" cmpd="sng" algn="ctr">
+                      <a:solidFill>
+                        <a:srgbClr val="FFFFFF"/>
+                      </a:solidFill>
+                      <a:prstDash val="solid"/>
+                      <a:round/>
+                      <a:headEnd type="none" w="med" len="med"/>
+                      <a:tailEnd type="none" w="med" len="med"/>
+                    </a:lnB>
+                    <a:solidFill>
+                      <a:schemeClr val="bg2"/>
+                    </a:solidFill>
+                  </a:tcPr>
+                </a:tc>
+                <a:tc>
+                  <a:txBody>
+                    <a:bodyPr/>
+                    <a:lstStyle/>
+                    <a:p>
+                      <a:pPr marL="0" indent="0">
+                        <a:buNone/>
+                      </a:pPr>
+                      <a:r>
+                        <a:rPr lang="en-US" sz="1400" dirty="0">
+                          <a:solidFill>
+                            <a:srgbClr val="000000"/>
+                          </a:solidFill>
+                          <a:latin typeface="Calibri" pitchFamily="34" charset="0"/>
+                          <a:ea typeface="Calibri" pitchFamily="34" charset="-122"/>
+                          <a:cs typeface="Calibri" pitchFamily="34" charset="-120"/>
+                        </a:rPr>
+                        <a:t>Data loading, verification, EDA and notebook, preprocessing / feature engineering</a:t>
+                      </a:r>
+                      <a:endParaRPr lang="en-US" sz="1400" dirty="0">
+                        <a:latin typeface="Calibri" charset="0"/>
+                        <a:ea typeface="Calibri" charset="0"/>
+                        <a:cs typeface="Calibri" charset="0"/>
+                      </a:endParaRPr>
+                    </a:p>
+                  </a:txBody>
+                  <a:tcPr marL="109728" marR="109728" marT="109728" marB="109728" anchor="ctr">
+                    <a:lnL w="12700" cap="flat" cmpd="sng" algn="ctr">
+                      <a:solidFill>
+                        <a:srgbClr val="FFFFFF"/>
+                      </a:solidFill>
+                      <a:prstDash val="solid"/>
+                      <a:round/>
+                      <a:headEnd type="none" w="med" len="med"/>
+                      <a:tailEnd type="none" w="med" len="med"/>
+                    </a:lnL>
+                    <a:lnR w="12700" cap="flat" cmpd="sng" algn="ctr">
+                      <a:solidFill>
+                        <a:srgbClr val="FFFFFF"/>
+                      </a:solidFill>
+                      <a:prstDash val="solid"/>
+                      <a:round/>
+                      <a:headEnd type="none" w="med" len="med"/>
+                      <a:tailEnd type="none" w="med" len="med"/>
+                    </a:lnR>
+                    <a:lnT w="12700" cap="flat" cmpd="sng" algn="ctr">
+                      <a:solidFill>
+                        <a:srgbClr val="FFFFFF"/>
+                      </a:solidFill>
+                      <a:prstDash val="solid"/>
+                      <a:round/>
+                      <a:headEnd type="none" w="med" len="med"/>
+                      <a:tailEnd type="none" w="med" len="med"/>
+                    </a:lnT>
+                    <a:lnB w="12700" cap="flat" cmpd="sng" algn="ctr">
+                      <a:solidFill>
+                        <a:srgbClr val="FFFFFF"/>
+                      </a:solidFill>
+                      <a:prstDash val="solid"/>
+                      <a:round/>
+                      <a:headEnd type="none" w="med" len="med"/>
+                      <a:tailEnd type="none" w="med" len="med"/>
+                    </a:lnB>
+                    <a:solidFill>
+                      <a:schemeClr val="bg2"/>
+                    </a:solidFill>
+                  </a:tcPr>
+                </a:tc>
+                <a:tc>
+                  <a:txBody>
+                    <a:bodyPr/>
+                    <a:lstStyle/>
+                    <a:p>
+                      <a:pPr marL="0" indent="0">
+                        <a:buNone/>
+                      </a:pPr>
+                      <a:r>
+                        <a:rPr lang="en-US" sz="1400" dirty="0">
+                          <a:solidFill>
+                            <a:srgbClr val="000000"/>
+                          </a:solidFill>
+                          <a:latin typeface="Calibri" pitchFamily="34" charset="0"/>
+                          <a:ea typeface="Calibri" pitchFamily="34" charset="-122"/>
+                          <a:cs typeface="Calibri" pitchFamily="34" charset="-120"/>
+                        </a:rPr>
+                        <a:t>Dataset quality and EDA, feature engineering</a:t>
+                      </a:r>
+                      <a:endParaRPr lang="en-US" sz="1400" dirty="0">
+                        <a:latin typeface="Calibri" charset="0"/>
+                        <a:ea typeface="Calibri" charset="0"/>
+                        <a:cs typeface="Calibri" charset="0"/>
+                      </a:endParaRPr>
+                    </a:p>
+                  </a:txBody>
+                  <a:tcPr marL="109728" marR="109728" marT="109728" marB="109728" anchor="ctr">
+                    <a:lnL w="12700" cap="flat" cmpd="sng" algn="ctr">
+                      <a:solidFill>
+                        <a:srgbClr val="FFFFFF"/>
+                      </a:solidFill>
+                      <a:prstDash val="solid"/>
+                      <a:round/>
+                      <a:headEnd type="none" w="med" len="med"/>
+                      <a:tailEnd type="none" w="med" len="med"/>
+                    </a:lnL>
+                    <a:lnR w="12700" cap="flat" cmpd="sng" algn="ctr">
+                      <a:solidFill>
+                        <a:srgbClr val="FFFFFF"/>
+                      </a:solidFill>
+                      <a:prstDash val="solid"/>
+                      <a:round/>
+                      <a:headEnd type="none" w="med" len="med"/>
+                      <a:tailEnd type="none" w="med" len="med"/>
+                    </a:lnR>
+                    <a:lnT w="12700" cap="flat" cmpd="sng" algn="ctr">
+                      <a:solidFill>
+                        <a:srgbClr val="FFFFFF"/>
+                      </a:solidFill>
+                      <a:prstDash val="solid"/>
+                      <a:round/>
+                      <a:headEnd type="none" w="med" len="med"/>
+                      <a:tailEnd type="none" w="med" len="med"/>
+                    </a:lnT>
+                    <a:lnB w="12700" cap="flat" cmpd="sng" algn="ctr">
+                      <a:solidFill>
+                        <a:srgbClr val="FFFFFF"/>
+                      </a:solidFill>
+                      <a:prstDash val="solid"/>
+                      <a:round/>
+                      <a:headEnd type="none" w="med" len="med"/>
+                      <a:tailEnd type="none" w="med" len="med"/>
+                    </a:lnB>
+                    <a:solidFill>
+                      <a:schemeClr val="bg2"/>
+                    </a:solidFill>
+                  </a:tcPr>
+                </a:tc>
+                <a:extLst>
+                  <a:ext uri="{0D108BD9-81ED-4DB2-BD59-A6C34878D82A}">
+                    <a16:rowId xmlns:a16="http://schemas.microsoft.com/office/drawing/2014/main" val="10001"/>
+                  </a:ext>
+                </a:extLst>
+              </a:tr>
+              <a:tr h="777240">
+                <a:tc>
+                  <a:txBody>
+                    <a:bodyPr/>
+                    <a:lstStyle/>
+                    <a:p>
+                      <a:pPr marL="0" indent="0">
+                        <a:buNone/>
+                      </a:pPr>
+                      <a:r>
+                        <a:rPr lang="en-US" sz="1500" b="1" dirty="0">
+                          <a:solidFill>
+                            <a:schemeClr val="tx2"/>
+                          </a:solidFill>
+                          <a:latin typeface="Calibri" pitchFamily="34" charset="0"/>
+                          <a:ea typeface="Calibri" charset="0"/>
+                          <a:cs typeface="Calibri" pitchFamily="34" charset="-120"/>
+                        </a:rPr>
+                        <a:t>Vansh</a:t>
+                      </a:r>
+                      <a:endParaRPr lang="en-US" sz="1500" dirty="0">
+                        <a:latin typeface="Calibri" charset="0"/>
+                        <a:ea typeface="Calibri" charset="0"/>
+                        <a:cs typeface="Calibri" charset="0"/>
+                      </a:endParaRPr>
+                    </a:p>
+                  </a:txBody>
+                  <a:tcPr marL="109728" marR="109728" marT="109728" marB="109728" anchor="ctr">
+                    <a:lnL w="12700" cap="flat" cmpd="sng" algn="ctr">
+                      <a:solidFill>
+                        <a:srgbClr val="FFFFFF"/>
+                      </a:solidFill>
+                      <a:prstDash val="solid"/>
+                      <a:round/>
+                      <a:headEnd type="none" w="med" len="med"/>
+                      <a:tailEnd type="none" w="med" len="med"/>
+                    </a:lnL>
+                    <a:lnR w="12700" cap="flat" cmpd="sng" algn="ctr">
+                      <a:solidFill>
+                        <a:srgbClr val="FFFFFF"/>
+                      </a:solidFill>
+                      <a:prstDash val="solid"/>
+                      <a:round/>
+                      <a:headEnd type="none" w="med" len="med"/>
+                      <a:tailEnd type="none" w="med" len="med"/>
+                    </a:lnR>
+                    <a:lnT w="12700" cap="flat" cmpd="sng" algn="ctr">
+                      <a:solidFill>
+                        <a:srgbClr val="FFFFFF"/>
+                      </a:solidFill>
+                      <a:prstDash val="solid"/>
+                      <a:round/>
+                      <a:headEnd type="none" w="med" len="med"/>
+                      <a:tailEnd type="none" w="med" len="med"/>
+                    </a:lnT>
+                    <a:lnB w="12700" cap="flat" cmpd="sng" algn="ctr">
+                      <a:solidFill>
+                        <a:srgbClr val="FFFFFF"/>
+                      </a:solidFill>
+                      <a:prstDash val="solid"/>
+                      <a:round/>
+                      <a:headEnd type="none" w="med" len="med"/>
+                      <a:tailEnd type="none" w="med" len="med"/>
+                    </a:lnB>
+                    <a:solidFill>
+                      <a:schemeClr val="bg1"/>
+                    </a:solidFill>
+                  </a:tcPr>
+                </a:tc>
+                <a:tc>
+                  <a:txBody>
+                    <a:bodyPr/>
+                    <a:lstStyle/>
+                    <a:p>
+                      <a:pPr marL="0" indent="0">
+                        <a:buNone/>
+                      </a:pPr>
+                      <a:r>
+                        <a:rPr lang="en-US" sz="1400" dirty="0">
+                          <a:solidFill>
+                            <a:srgbClr val="000000"/>
+                          </a:solidFill>
+                          <a:latin typeface="Calibri" pitchFamily="34" charset="0"/>
+                          <a:ea typeface="Calibri" pitchFamily="34" charset="-122"/>
+                          <a:cs typeface="Calibri" pitchFamily="34" charset="-120"/>
+                        </a:rPr>
+                        <a:t>Bayesian network (structure, conditional probability tables, inference), data splits, metrics, Methods page</a:t>
+                      </a:r>
+                      <a:endParaRPr lang="en-US" sz="1400" dirty="0">
+                        <a:latin typeface="Calibri" charset="0"/>
+                        <a:ea typeface="Calibri" charset="0"/>
+                        <a:cs typeface="Calibri" charset="0"/>
+                      </a:endParaRPr>
+                    </a:p>
+                  </a:txBody>
+                  <a:tcPr marL="109728" marR="109728" marT="109728" marB="109728" anchor="ctr">
+                    <a:lnL w="12700" cap="flat" cmpd="sng" algn="ctr">
+                      <a:solidFill>
+                        <a:srgbClr val="FFFFFF"/>
+                      </a:solidFill>
+                      <a:prstDash val="solid"/>
+                      <a:round/>
+                      <a:headEnd type="none" w="med" len="med"/>
+                      <a:tailEnd type="none" w="med" len="med"/>
+                    </a:lnL>
+                    <a:lnR w="12700" cap="flat" cmpd="sng" algn="ctr">
+                      <a:solidFill>
+                        <a:srgbClr val="FFFFFF"/>
+                      </a:solidFill>
+                      <a:prstDash val="solid"/>
+                      <a:round/>
+                      <a:headEnd type="none" w="med" len="med"/>
+                      <a:tailEnd type="none" w="med" len="med"/>
+                    </a:lnR>
+                    <a:lnT w="12700" cap="flat" cmpd="sng" algn="ctr">
+                      <a:solidFill>
+                        <a:srgbClr val="FFFFFF"/>
+                      </a:solidFill>
+                      <a:prstDash val="solid"/>
+                      <a:round/>
+                      <a:headEnd type="none" w="med" len="med"/>
+                      <a:tailEnd type="none" w="med" len="med"/>
+                    </a:lnT>
+                    <a:lnB w="12700" cap="flat" cmpd="sng" algn="ctr">
+                      <a:solidFill>
+                        <a:srgbClr val="FFFFFF"/>
+                      </a:solidFill>
+                      <a:prstDash val="solid"/>
+                      <a:round/>
+                      <a:headEnd type="none" w="med" len="med"/>
+                      <a:tailEnd type="none" w="med" len="med"/>
+                    </a:lnB>
+                    <a:solidFill>
+                      <a:schemeClr val="bg1"/>
+                    </a:solidFill>
+                  </a:tcPr>
+                </a:tc>
+                <a:tc>
+                  <a:txBody>
+                    <a:bodyPr/>
+                    <a:lstStyle/>
+                    <a:p>
+                      <a:pPr marL="0" indent="0">
+                        <a:buNone/>
+                      </a:pPr>
+                      <a:r>
+                        <a:rPr lang="en-US" sz="1400" dirty="0">
+                          <a:solidFill>
+                            <a:srgbClr val="000000"/>
+                          </a:solidFill>
+                          <a:latin typeface="Calibri" pitchFamily="34" charset="0"/>
+                          <a:ea typeface="Calibri" pitchFamily="34" charset="-122"/>
+                          <a:cs typeface="Calibri" pitchFamily="34" charset="-120"/>
+                        </a:rPr>
+                        <a:t>Theoretical rigour (probabilistic graphical models)</a:t>
+                      </a:r>
+                      <a:endParaRPr lang="en-US" sz="1400" dirty="0">
+                        <a:latin typeface="Calibri" charset="0"/>
+                        <a:ea typeface="Calibri" charset="0"/>
+                        <a:cs typeface="Calibri" charset="0"/>
+                      </a:endParaRPr>
+                    </a:p>
+                  </a:txBody>
+                  <a:tcPr marL="109728" marR="109728" marT="109728" marB="109728" anchor="ctr">
+                    <a:lnL w="12700" cap="flat" cmpd="sng" algn="ctr">
+                      <a:solidFill>
+                        <a:srgbClr val="FFFFFF"/>
+                      </a:solidFill>
+                      <a:prstDash val="solid"/>
+                      <a:round/>
+                      <a:headEnd type="none" w="med" len="med"/>
+                      <a:tailEnd type="none" w="med" len="med"/>
+                    </a:lnL>
+                    <a:lnR w="12700" cap="flat" cmpd="sng" algn="ctr">
+                      <a:solidFill>
+                        <a:srgbClr val="FFFFFF"/>
+                      </a:solidFill>
+                      <a:prstDash val="solid"/>
+                      <a:round/>
+                      <a:headEnd type="none" w="med" len="med"/>
+                      <a:tailEnd type="none" w="med" len="med"/>
+                    </a:lnR>
+                    <a:lnT w="12700" cap="flat" cmpd="sng" algn="ctr">
+                      <a:solidFill>
+                        <a:srgbClr val="FFFFFF"/>
+                      </a:solidFill>
+                      <a:prstDash val="solid"/>
+                      <a:round/>
+                      <a:headEnd type="none" w="med" len="med"/>
+                      <a:tailEnd type="none" w="med" len="med"/>
+                    </a:lnT>
+                    <a:lnB w="12700" cap="flat" cmpd="sng" algn="ctr">
+                      <a:solidFill>
+                        <a:srgbClr val="FFFFFF"/>
+                      </a:solidFill>
+                      <a:prstDash val="solid"/>
+                      <a:round/>
+                      <a:headEnd type="none" w="med" len="med"/>
+                      <a:tailEnd type="none" w="med" len="med"/>
+                    </a:lnB>
+                    <a:solidFill>
+                      <a:schemeClr val="bg1"/>
+                    </a:solidFill>
+                  </a:tcPr>
+                </a:tc>
+                <a:extLst>
+                  <a:ext uri="{0D108BD9-81ED-4DB2-BD59-A6C34878D82A}">
+                    <a16:rowId xmlns:a16="http://schemas.microsoft.com/office/drawing/2014/main" val="10002"/>
+                  </a:ext>
+                </a:extLst>
+              </a:tr>
+              <a:tr h="777240">
+                <a:tc>
+                  <a:txBody>
+                    <a:bodyPr/>
+                    <a:lstStyle/>
+                    <a:p>
+                      <a:pPr marL="0" indent="0">
                         <a:buNone/>
                       </a:pPr>
                       <a:r>
@@ -13186,7 +13104,7 @@
                     <a:bodyPr/>
                     <a:lstStyle/>
                     <a:p>
-                      <a:pPr indent="0" marL="0">
+                      <a:pPr marL="0" indent="0">
                         <a:buNone/>
                       </a:pPr>
                       <a:r>
@@ -13198,7 +13116,7 @@
                           <a:ea typeface="Calibri" pitchFamily="34" charset="-122"/>
                           <a:cs typeface="Calibri" pitchFamily="34" charset="-120"/>
                         </a:rPr>
-                        <a:t>Data loading, verification, EDA and notebook, preprocessing / feature engineering</a:t>
+                        <a:t>Logistic Regression and SVM, model pipelines, the script that trains and compares all models</a:t>
                       </a:r>
                       <a:endParaRPr lang="en-US" sz="1400" dirty="0">
                         <a:latin typeface="Calibri" charset="0"/>
@@ -13254,7 +13172,7 @@
                     <a:bodyPr/>
                     <a:lstStyle/>
                     <a:p>
-                      <a:pPr indent="0" marL="0">
+                      <a:pPr marL="0" indent="0">
                         <a:buNone/>
                       </a:pPr>
                       <a:r>
@@ -13266,7 +13184,7 @@
                           <a:ea typeface="Calibri" pitchFamily="34" charset="-122"/>
                           <a:cs typeface="Calibri" pitchFamily="34" charset="-120"/>
                         </a:rPr>
-                        <a:t>Dataset quality and EDA, feature engineering</a:t>
+                        <a:t>Model application (linear and kernel models)</a:t>
                       </a:r>
                       <a:endParaRPr lang="en-US" sz="1400" dirty="0">
                         <a:latin typeface="Calibri" charset="0"/>
@@ -13317,6 +13235,11 @@
                     </a:solidFill>
                   </a:tcPr>
                 </a:tc>
+                <a:extLst>
+                  <a:ext uri="{0D108BD9-81ED-4DB2-BD59-A6C34878D82A}">
+                    <a16:rowId xmlns:a16="http://schemas.microsoft.com/office/drawing/2014/main" val="10003"/>
+                  </a:ext>
+                </a:extLst>
               </a:tr>
               <a:tr h="777240">
                 <a:tc>
@@ -13324,213 +13247,7 @@
                     <a:bodyPr/>
                     <a:lstStyle/>
                     <a:p>
-                      <a:pPr indent="0" marL="0">
-                        <a:buNone/>
-                      </a:pPr>
-                      <a:r>
-                        <a:rPr lang="en-US" sz="1500" b="1" dirty="0">
-                          <a:solidFill>
-                            <a:schemeClr val="tx2"/>
-                          </a:solidFill>
-                          <a:latin typeface="Calibri" pitchFamily="34" charset="0"/>
-                          <a:ea typeface="Calibri" pitchFamily="34" charset="-122"/>
-                          <a:cs typeface="Calibri" pitchFamily="34" charset="-120"/>
-                        </a:rPr>
-                        <a:t>Ayush</a:t>
-                      </a:r>
-                      <a:endParaRPr lang="en-US" sz="1500" dirty="0">
-                        <a:latin typeface="Calibri" charset="0"/>
-                        <a:ea typeface="Calibri" charset="0"/>
-                        <a:cs typeface="Calibri" charset="0"/>
-                      </a:endParaRPr>
-                    </a:p>
-                  </a:txBody>
-                  <a:tcPr marL="109728" marR="109728" marT="109728" marB="109728" anchor="ctr">
-                    <a:lnL w="12700" cap="flat" cmpd="sng" algn="ctr">
-                      <a:solidFill>
-                        <a:srgbClr val="FFFFFF"/>
-                      </a:solidFill>
-                      <a:prstDash val="solid"/>
-                      <a:round/>
-                      <a:headEnd type="none" w="med" len="med"/>
-                      <a:tailEnd type="none" w="med" len="med"/>
-                    </a:lnL>
-                    <a:lnR w="12700" cap="flat" cmpd="sng" algn="ctr">
-                      <a:solidFill>
-                        <a:srgbClr val="FFFFFF"/>
-                      </a:solidFill>
-                      <a:prstDash val="solid"/>
-                      <a:round/>
-                      <a:headEnd type="none" w="med" len="med"/>
-                      <a:tailEnd type="none" w="med" len="med"/>
-                    </a:lnR>
-                    <a:lnT w="12700" cap="flat" cmpd="sng" algn="ctr">
-                      <a:solidFill>
-                        <a:srgbClr val="FFFFFF"/>
-                      </a:solidFill>
-                      <a:prstDash val="solid"/>
-                      <a:round/>
-                      <a:headEnd type="none" w="med" len="med"/>
-                      <a:tailEnd type="none" w="med" len="med"/>
-                    </a:lnT>
-                    <a:lnB w="12700" cap="flat" cmpd="sng" algn="ctr">
-                      <a:solidFill>
-                        <a:srgbClr val="FFFFFF"/>
-                      </a:solidFill>
-                      <a:prstDash val="solid"/>
-                      <a:round/>
-                      <a:headEnd type="none" w="med" len="med"/>
-                      <a:tailEnd type="none" w="med" len="med"/>
-                    </a:lnB>
-                    <a:solidFill>
-                      <a:schemeClr val="bg1"/>
-                    </a:solidFill>
-                  </a:tcPr>
-                </a:tc>
-                <a:tc>
-                  <a:txBody>
-                    <a:bodyPr/>
-                    <a:lstStyle/>
-                    <a:p>
-                      <a:pPr indent="0" marL="0">
-                        <a:buNone/>
-                      </a:pPr>
-                      <a:r>
-                        <a:rPr lang="en-US" sz="1400" dirty="0">
-                          <a:solidFill>
-                            <a:srgbClr val="000000"/>
-                          </a:solidFill>
-                          <a:latin typeface="Calibri" pitchFamily="34" charset="0"/>
-                          <a:ea typeface="Calibri" pitchFamily="34" charset="-122"/>
-                          <a:cs typeface="Calibri" pitchFamily="34" charset="-120"/>
-                        </a:rPr>
-                        <a:t>Bayesian network (structure, conditional probability tables, inference), data splits, metrics, Methods page</a:t>
-                      </a:r>
-                      <a:endParaRPr lang="en-US" sz="1400" dirty="0">
-                        <a:latin typeface="Calibri" charset="0"/>
-                        <a:ea typeface="Calibri" charset="0"/>
-                        <a:cs typeface="Calibri" charset="0"/>
-                      </a:endParaRPr>
-                    </a:p>
-                  </a:txBody>
-                  <a:tcPr marL="109728" marR="109728" marT="109728" marB="109728" anchor="ctr">
-                    <a:lnL w="12700" cap="flat" cmpd="sng" algn="ctr">
-                      <a:solidFill>
-                        <a:srgbClr val="FFFFFF"/>
-                      </a:solidFill>
-                      <a:prstDash val="solid"/>
-                      <a:round/>
-                      <a:headEnd type="none" w="med" len="med"/>
-                      <a:tailEnd type="none" w="med" len="med"/>
-                    </a:lnL>
-                    <a:lnR w="12700" cap="flat" cmpd="sng" algn="ctr">
-                      <a:solidFill>
-                        <a:srgbClr val="FFFFFF"/>
-                      </a:solidFill>
-                      <a:prstDash val="solid"/>
-                      <a:round/>
-                      <a:headEnd type="none" w="med" len="med"/>
-                      <a:tailEnd type="none" w="med" len="med"/>
-                    </a:lnR>
-                    <a:lnT w="12700" cap="flat" cmpd="sng" algn="ctr">
-                      <a:solidFill>
-                        <a:srgbClr val="FFFFFF"/>
-                      </a:solidFill>
-                      <a:prstDash val="solid"/>
-                      <a:round/>
-                      <a:headEnd type="none" w="med" len="med"/>
-                      <a:tailEnd type="none" w="med" len="med"/>
-                    </a:lnT>
-                    <a:lnB w="12700" cap="flat" cmpd="sng" algn="ctr">
-                      <a:solidFill>
-                        <a:srgbClr val="FFFFFF"/>
-                      </a:solidFill>
-                      <a:prstDash val="solid"/>
-                      <a:round/>
-                      <a:headEnd type="none" w="med" len="med"/>
-                      <a:tailEnd type="none" w="med" len="med"/>
-                    </a:lnB>
-                    <a:solidFill>
-                      <a:schemeClr val="bg1"/>
-                    </a:solidFill>
-                  </a:tcPr>
-                </a:tc>
-                <a:tc>
-                  <a:txBody>
-                    <a:bodyPr/>
-                    <a:lstStyle/>
-                    <a:p>
-                      <a:pPr indent="0" marL="0">
-                        <a:buNone/>
-                      </a:pPr>
-                      <a:r>
-                        <a:rPr lang="en-US" sz="1400" dirty="0">
-                          <a:solidFill>
-                            <a:srgbClr val="000000"/>
-                          </a:solidFill>
-                          <a:latin typeface="Calibri" pitchFamily="34" charset="0"/>
-                          <a:ea typeface="Calibri" pitchFamily="34" charset="-122"/>
-                          <a:cs typeface="Calibri" pitchFamily="34" charset="-120"/>
-                        </a:rPr>
-                        <a:t>Theoretical rigour (probabilistic graphical models)</a:t>
-                      </a:r>
-                      <a:endParaRPr lang="en-US" sz="1400" dirty="0">
-                        <a:latin typeface="Calibri" charset="0"/>
-                        <a:ea typeface="Calibri" charset="0"/>
-                        <a:cs typeface="Calibri" charset="0"/>
-                      </a:endParaRPr>
-                    </a:p>
-                  </a:txBody>
-                  <a:tcPr marL="109728" marR="109728" marT="109728" marB="109728" anchor="ctr">
-                    <a:lnL w="12700" cap="flat" cmpd="sng" algn="ctr">
-                      <a:solidFill>
-                        <a:srgbClr val="FFFFFF"/>
-                      </a:solidFill>
-                      <a:prstDash val="solid"/>
-                      <a:round/>
-                      <a:headEnd type="none" w="med" len="med"/>
-                      <a:tailEnd type="none" w="med" len="med"/>
-                    </a:lnL>
-                    <a:lnR w="12700" cap="flat" cmpd="sng" algn="ctr">
-                      <a:solidFill>
-                        <a:srgbClr val="FFFFFF"/>
-                      </a:solidFill>
-                      <a:prstDash val="solid"/>
-                      <a:round/>
-                      <a:headEnd type="none" w="med" len="med"/>
-                      <a:tailEnd type="none" w="med" len="med"/>
-                    </a:lnR>
-                    <a:lnT w="12700" cap="flat" cmpd="sng" algn="ctr">
-                      <a:solidFill>
-                        <a:srgbClr val="FFFFFF"/>
-                      </a:solidFill>
-                      <a:prstDash val="solid"/>
-                      <a:round/>
-                      <a:headEnd type="none" w="med" len="med"/>
-                      <a:tailEnd type="none" w="med" len="med"/>
-                    </a:lnT>
-                    <a:lnB w="12700" cap="flat" cmpd="sng" algn="ctr">
-                      <a:solidFill>
-                        <a:srgbClr val="FFFFFF"/>
-                      </a:solidFill>
-                      <a:prstDash val="solid"/>
-                      <a:round/>
-                      <a:headEnd type="none" w="med" len="med"/>
-                      <a:tailEnd type="none" w="med" len="med"/>
-                    </a:lnB>
-                    <a:solidFill>
-                      <a:schemeClr val="bg1"/>
-                    </a:solidFill>
-                  </a:tcPr>
-                </a:tc>
-              </a:tr>
-              <a:tr h="777240">
-                <a:tc>
-                  <a:txBody>
-                    <a:bodyPr/>
-                    <a:lstStyle/>
-                    <a:p>
-                      <a:pPr indent="0" marL="0">
+                      <a:pPr marL="0" indent="0">
                         <a:buNone/>
                       </a:pPr>
                       <a:r>
@@ -13589,212 +13306,6 @@
                       <a:tailEnd type="none" w="med" len="med"/>
                     </a:lnB>
                     <a:solidFill>
-                      <a:schemeClr val="bg2"/>
-                    </a:solidFill>
-                  </a:tcPr>
-                </a:tc>
-                <a:tc>
-                  <a:txBody>
-                    <a:bodyPr/>
-                    <a:lstStyle/>
-                    <a:p>
-                      <a:pPr indent="0" marL="0">
-                        <a:buNone/>
-                      </a:pPr>
-                      <a:r>
-                        <a:rPr lang="en-US" sz="1400" dirty="0">
-                          <a:solidFill>
-                            <a:srgbClr val="000000"/>
-                          </a:solidFill>
-                          <a:latin typeface="Calibri" pitchFamily="34" charset="0"/>
-                          <a:ea typeface="Calibri" pitchFamily="34" charset="-122"/>
-                          <a:cs typeface="Calibri" pitchFamily="34" charset="-120"/>
-                        </a:rPr>
-                        <a:t>Logistic Regression and SVM, model pipelines, the script that trains and compares all models</a:t>
-                      </a:r>
-                      <a:endParaRPr lang="en-US" sz="1400" dirty="0">
-                        <a:latin typeface="Calibri" charset="0"/>
-                        <a:ea typeface="Calibri" charset="0"/>
-                        <a:cs typeface="Calibri" charset="0"/>
-                      </a:endParaRPr>
-                    </a:p>
-                  </a:txBody>
-                  <a:tcPr marL="109728" marR="109728" marT="109728" marB="109728" anchor="ctr">
-                    <a:lnL w="12700" cap="flat" cmpd="sng" algn="ctr">
-                      <a:solidFill>
-                        <a:srgbClr val="FFFFFF"/>
-                      </a:solidFill>
-                      <a:prstDash val="solid"/>
-                      <a:round/>
-                      <a:headEnd type="none" w="med" len="med"/>
-                      <a:tailEnd type="none" w="med" len="med"/>
-                    </a:lnL>
-                    <a:lnR w="12700" cap="flat" cmpd="sng" algn="ctr">
-                      <a:solidFill>
-                        <a:srgbClr val="FFFFFF"/>
-                      </a:solidFill>
-                      <a:prstDash val="solid"/>
-                      <a:round/>
-                      <a:headEnd type="none" w="med" len="med"/>
-                      <a:tailEnd type="none" w="med" len="med"/>
-                    </a:lnR>
-                    <a:lnT w="12700" cap="flat" cmpd="sng" algn="ctr">
-                      <a:solidFill>
-                        <a:srgbClr val="FFFFFF"/>
-                      </a:solidFill>
-                      <a:prstDash val="solid"/>
-                      <a:round/>
-                      <a:headEnd type="none" w="med" len="med"/>
-                      <a:tailEnd type="none" w="med" len="med"/>
-                    </a:lnT>
-                    <a:lnB w="12700" cap="flat" cmpd="sng" algn="ctr">
-                      <a:solidFill>
-                        <a:srgbClr val="FFFFFF"/>
-                      </a:solidFill>
-                      <a:prstDash val="solid"/>
-                      <a:round/>
-                      <a:headEnd type="none" w="med" len="med"/>
-                      <a:tailEnd type="none" w="med" len="med"/>
-                    </a:lnB>
-                    <a:solidFill>
-                      <a:schemeClr val="bg2"/>
-                    </a:solidFill>
-                  </a:tcPr>
-                </a:tc>
-                <a:tc>
-                  <a:txBody>
-                    <a:bodyPr/>
-                    <a:lstStyle/>
-                    <a:p>
-                      <a:pPr indent="0" marL="0">
-                        <a:buNone/>
-                      </a:pPr>
-                      <a:r>
-                        <a:rPr lang="en-US" sz="1400" dirty="0">
-                          <a:solidFill>
-                            <a:srgbClr val="000000"/>
-                          </a:solidFill>
-                          <a:latin typeface="Calibri" pitchFamily="34" charset="0"/>
-                          <a:ea typeface="Calibri" pitchFamily="34" charset="-122"/>
-                          <a:cs typeface="Calibri" pitchFamily="34" charset="-120"/>
-                        </a:rPr>
-                        <a:t>Model application (linear and kernel models)</a:t>
-                      </a:r>
-                      <a:endParaRPr lang="en-US" sz="1400" dirty="0">
-                        <a:latin typeface="Calibri" charset="0"/>
-                        <a:ea typeface="Calibri" charset="0"/>
-                        <a:cs typeface="Calibri" charset="0"/>
-                      </a:endParaRPr>
-                    </a:p>
-                  </a:txBody>
-                  <a:tcPr marL="109728" marR="109728" marT="109728" marB="109728" anchor="ctr">
-                    <a:lnL w="12700" cap="flat" cmpd="sng" algn="ctr">
-                      <a:solidFill>
-                        <a:srgbClr val="FFFFFF"/>
-                      </a:solidFill>
-                      <a:prstDash val="solid"/>
-                      <a:round/>
-                      <a:headEnd type="none" w="med" len="med"/>
-                      <a:tailEnd type="none" w="med" len="med"/>
-                    </a:lnL>
-                    <a:lnR w="12700" cap="flat" cmpd="sng" algn="ctr">
-                      <a:solidFill>
-                        <a:srgbClr val="FFFFFF"/>
-                      </a:solidFill>
-                      <a:prstDash val="solid"/>
-                      <a:round/>
-                      <a:headEnd type="none" w="med" len="med"/>
-                      <a:tailEnd type="none" w="med" len="med"/>
-                    </a:lnR>
-                    <a:lnT w="12700" cap="flat" cmpd="sng" algn="ctr">
-                      <a:solidFill>
-                        <a:srgbClr val="FFFFFF"/>
-                      </a:solidFill>
-                      <a:prstDash val="solid"/>
-                      <a:round/>
-                      <a:headEnd type="none" w="med" len="med"/>
-                      <a:tailEnd type="none" w="med" len="med"/>
-                    </a:lnT>
-                    <a:lnB w="12700" cap="flat" cmpd="sng" algn="ctr">
-                      <a:solidFill>
-                        <a:srgbClr val="FFFFFF"/>
-                      </a:solidFill>
-                      <a:prstDash val="solid"/>
-                      <a:round/>
-                      <a:headEnd type="none" w="med" len="med"/>
-                      <a:tailEnd type="none" w="med" len="med"/>
-                    </a:lnB>
-                    <a:solidFill>
-                      <a:schemeClr val="bg2"/>
-                    </a:solidFill>
-                  </a:tcPr>
-                </a:tc>
-              </a:tr>
-              <a:tr h="777240">
-                <a:tc>
-                  <a:txBody>
-                    <a:bodyPr/>
-                    <a:lstStyle/>
-                    <a:p>
-                      <a:pPr indent="0" marL="0">
-                        <a:buNone/>
-                      </a:pPr>
-                      <a:r>
-                        <a:rPr lang="en-US" sz="1500" b="1" dirty="0">
-                          <a:solidFill>
-                            <a:schemeClr val="tx2"/>
-                          </a:solidFill>
-                          <a:latin typeface="Calibri" pitchFamily="34" charset="0"/>
-                          <a:ea typeface="Calibri" pitchFamily="34" charset="-122"/>
-                          <a:cs typeface="Calibri" pitchFamily="34" charset="-120"/>
-                        </a:rPr>
-                        <a:t>Vansh</a:t>
-                      </a:r>
-                      <a:endParaRPr lang="en-US" sz="1500" dirty="0">
-                        <a:latin typeface="Calibri" charset="0"/>
-                        <a:ea typeface="Calibri" charset="0"/>
-                        <a:cs typeface="Calibri" charset="0"/>
-                      </a:endParaRPr>
-                    </a:p>
-                  </a:txBody>
-                  <a:tcPr marL="109728" marR="109728" marT="109728" marB="109728" anchor="ctr">
-                    <a:lnL w="12700" cap="flat" cmpd="sng" algn="ctr">
-                      <a:solidFill>
-                        <a:srgbClr val="FFFFFF"/>
-                      </a:solidFill>
-                      <a:prstDash val="solid"/>
-                      <a:round/>
-                      <a:headEnd type="none" w="med" len="med"/>
-                      <a:tailEnd type="none" w="med" len="med"/>
-                    </a:lnL>
-                    <a:lnR w="12700" cap="flat" cmpd="sng" algn="ctr">
-                      <a:solidFill>
-                        <a:srgbClr val="FFFFFF"/>
-                      </a:solidFill>
-                      <a:prstDash val="solid"/>
-                      <a:round/>
-                      <a:headEnd type="none" w="med" len="med"/>
-                      <a:tailEnd type="none" w="med" len="med"/>
-                    </a:lnR>
-                    <a:lnT w="12700" cap="flat" cmpd="sng" algn="ctr">
-                      <a:solidFill>
-                        <a:srgbClr val="FFFFFF"/>
-                      </a:solidFill>
-                      <a:prstDash val="solid"/>
-                      <a:round/>
-                      <a:headEnd type="none" w="med" len="med"/>
-                      <a:tailEnd type="none" w="med" len="med"/>
-                    </a:lnT>
-                    <a:lnB w="12700" cap="flat" cmpd="sng" algn="ctr">
-                      <a:solidFill>
-                        <a:srgbClr val="FFFFFF"/>
-                      </a:solidFill>
-                      <a:prstDash val="solid"/>
-                      <a:round/>
-                      <a:headEnd type="none" w="med" len="med"/>
-                      <a:tailEnd type="none" w="med" len="med"/>
-                    </a:lnB>
-                    <a:solidFill>
                       <a:schemeClr val="bg1"/>
                     </a:solidFill>
                   </a:tcPr>
@@ -13804,7 +13315,7 @@
                     <a:bodyPr/>
                     <a:lstStyle/>
                     <a:p>
-                      <a:pPr indent="0" marL="0">
+                      <a:pPr marL="0" indent="0">
                         <a:buNone/>
                       </a:pPr>
                       <a:r>
@@ -13872,7 +13383,7 @@
                     <a:bodyPr/>
                     <a:lstStyle/>
                     <a:p>
-                      <a:pPr indent="0" marL="0">
+                      <a:pPr marL="0" indent="0">
                         <a:buNone/>
                       </a:pPr>
                       <a:r>
@@ -13935,6 +13446,11 @@
                     </a:solidFill>
                   </a:tcPr>
                 </a:tc>
+                <a:extLst>
+                  <a:ext uri="{0D108BD9-81ED-4DB2-BD59-A6C34878D82A}">
+                    <a16:rowId xmlns:a16="http://schemas.microsoft.com/office/drawing/2014/main" val="10004"/>
+                  </a:ext>
+                </a:extLst>
               </a:tr>
               <a:tr h="777240">
                 <a:tc>
@@ -13942,7 +13458,7 @@
                     <a:bodyPr/>
                     <a:lstStyle/>
                     <a:p>
-                      <a:pPr indent="0" marL="0">
+                      <a:pPr marL="0" indent="0">
                         <a:buNone/>
                       </a:pPr>
                       <a:r>
@@ -14010,7 +13526,7 @@
                     <a:bodyPr/>
                     <a:lstStyle/>
                     <a:p>
-                      <a:pPr indent="0" marL="0">
+                      <a:pPr marL="0" indent="0">
                         <a:buNone/>
                       </a:pPr>
                       <a:r>
@@ -14078,7 +13594,7 @@
                     <a:bodyPr/>
                     <a:lstStyle/>
                     <a:p>
-                      <a:pPr indent="0" marL="0">
+                      <a:pPr marL="0" indent="0">
                         <a:buNone/>
                       </a:pPr>
                       <a:r>
@@ -14141,6 +13657,11 @@
                     </a:solidFill>
                   </a:tcPr>
                 </a:tc>
+                <a:extLst>
+                  <a:ext uri="{0D108BD9-81ED-4DB2-BD59-A6C34878D82A}">
+                    <a16:rowId xmlns:a16="http://schemas.microsoft.com/office/drawing/2014/main" val="10005"/>
+                  </a:ext>
+                </a:extLst>
               </a:tr>
             </a:tbl>
           </a:graphicData>
@@ -14166,7 +13687,7 @@
           </a:prstGeom>
           <a:extLst>
             <a:ext uri="{C572A759-6A51-4108-AA02-DFA0A04FC94B}">
-              <ma14:wrappingTextBoxFlag xmlns:ma14="http://schemas.microsoft.com/office/mac/drawingml/2011/main" val="0"/>
+              <ma14:wrappingTextBoxFlag xmlns:ma14="http://schemas.microsoft.com/office/mac/drawingml/2011/main" xmlns="" val="0"/>
             </a:ext>
           </a:extLst>
         </p:spPr>
@@ -14184,7 +13705,7 @@
           <a:p>
             <a:pPr algn="r"/>
             <a:fld id="{F7021451-1387-4CA6-816F-3879F97B5CBC}" type="slidenum">
-              <a:rPr b="0" lang="en-US"/>
+              <a:rPr lang="en-US" b="0"/>
               <a:t>2</a:t>
             </a:fld>
             <a:endParaRPr lang="en-US"/>
@@ -14218,79 +13739,12 @@
       </p:grpSpPr>
       <p:sp>
         <p:nvSpPr>
-          <p:cNvPr id="2" name="presenter chip"/>
-          <p:cNvSpPr/>
-          <p:nvPr/>
-        </p:nvSpPr>
-        <p:spPr>
-          <a:xfrm>
-            <a:off x="9921240" y="502920"/>
-            <a:ext cx="1691640" cy="457200"/>
-          </a:xfrm>
-          <a:prstGeom prst="roundRect">
-            <a:avLst>
-              <a:gd name="adj" fmla="val 50000"/>
-            </a:avLst>
-          </a:prstGeom>
-          <a:solidFill>
-            <a:schemeClr val="tx2"/>
-          </a:solidFill>
-          <a:ln/>
-        </p:spPr>
-      </p:sp>
-      <p:sp>
-        <p:nvSpPr>
-          <p:cNvPr id="3" name="Text 1"/>
-          <p:cNvSpPr txBox="1"/>
-          <p:nvPr/>
-        </p:nvSpPr>
-        <p:spPr>
-          <a:xfrm>
-            <a:off x="9921240" y="502920"/>
-            <a:ext cx="1691640" cy="457200"/>
-          </a:xfrm>
-          <a:prstGeom prst="rect">
-            <a:avLst/>
-          </a:prstGeom>
-          <a:noFill/>
-          <a:ln/>
-        </p:spPr>
-        <p:txBody>
-          <a:bodyPr wrap="square" lIns="0" tIns="0" rIns="0" bIns="0" rtlCol="0" anchor="ctr"/>
-          <a:lstStyle/>
-          <a:p>
-            <a:pPr algn="ctr" indent="0" marL="0">
-              <a:buNone/>
-            </a:pPr>
-            <a:r>
-              <a:rPr lang="en-US" sz="1100" dirty="0">
-                <a:solidFill>
-                  <a:schemeClr val="accent6"/>
-                </a:solidFill>
-              </a:rPr>
-              <a:t>Presenter  </a:t>
-            </a:r>
-            <a:pPr algn="ctr" indent="0" marL="0">
-              <a:buNone/>
-            </a:pPr>
-            <a:r>
-              <a:rPr lang="en-US" sz="1300" b="1" dirty="0">
-                <a:solidFill>
-                  <a:schemeClr val="bg1"/>
-                </a:solidFill>
-              </a:rPr>
-              <a:t>Hardik</a:t>
-            </a:r>
-            <a:endParaRPr lang="en-US" sz="1600" dirty="0"/>
-          </a:p>
-        </p:txBody>
-      </p:sp>
-      <p:sp>
-        <p:nvSpPr>
           <p:cNvPr id="4" name="Text 0"/>
-          <p:cNvSpPr/>
+          <p:cNvSpPr>
+            <a:spLocks noGrp="1"/>
+          </p:cNvSpPr>
           <p:nvPr>
-            <p:ph idx="100" type="title" hasCustomPrompt="1"/>
+            <p:ph type="title" idx="100" hasCustomPrompt="1"/>
           </p:nvPr>
         </p:nvSpPr>
         <p:spPr>
@@ -14308,7 +13762,7 @@
           <a:bodyPr wrap="square" lIns="0" tIns="0" rIns="0" bIns="0" rtlCol="0" anchor="ctr"/>
           <a:lstStyle/>
           <a:p>
-            <a:pPr algn="l" indent="0" marL="0">
+            <a:pPr marL="0" indent="0" algn="l">
               <a:buNone/>
             </a:pPr>
             <a:r>
@@ -14347,6 +13801,13 @@
           </a:solidFill>
           <a:ln/>
         </p:spPr>
+        <p:txBody>
+          <a:bodyPr/>
+          <a:lstStyle/>
+          <a:p>
+            <a:endParaRPr lang="en-US"/>
+          </a:p>
+        </p:txBody>
       </p:sp>
       <p:sp>
         <p:nvSpPr>
@@ -14369,11 +13830,11 @@
           <a:bodyPr wrap="square" lIns="0" tIns="0" rIns="0" bIns="0" rtlCol="0" anchor="t"/>
           <a:lstStyle/>
           <a:p>
-            <a:pPr indent="0" marL="0">
+            <a:pPr marL="0" indent="0">
               <a:buNone/>
             </a:pPr>
             <a:r>
-              <a:rPr lang="en-US" sz="1200" b="1" spc="200" kern="0" dirty="0">
+              <a:rPr lang="en-US" sz="1200" b="1" kern="0" spc="200" dirty="0">
                 <a:solidFill>
                   <a:schemeClr val="accent6"/>
                 </a:solidFill>
@@ -14405,7 +13866,7 @@
           <a:bodyPr wrap="square" lIns="0" tIns="0" rIns="0" bIns="0" rtlCol="0" anchor="t"/>
           <a:lstStyle/>
           <a:p>
-            <a:pPr indent="0" marL="0">
+            <a:pPr marL="0" indent="0">
               <a:buNone/>
             </a:pPr>
             <a:r>
@@ -14444,7 +13905,7 @@
           <a:bodyPr wrap="square" lIns="0" tIns="0" rIns="0" bIns="0" rtlCol="0" anchor="t"/>
           <a:lstStyle/>
           <a:p>
-            <a:pPr indent="0" marL="0">
+            <a:pPr marL="0" indent="0">
               <a:buNone/>
             </a:pPr>
             <a:r>
@@ -14480,6 +13941,13 @@
           </a:solidFill>
           <a:ln/>
         </p:spPr>
+        <p:txBody>
+          <a:bodyPr/>
+          <a:lstStyle/>
+          <a:p>
+            <a:endParaRPr lang="en-US"/>
+          </a:p>
+        </p:txBody>
       </p:sp>
       <p:sp>
         <p:nvSpPr>
@@ -14500,286 +13968,17 @@
           </a:solidFill>
           <a:ln/>
         </p:spPr>
+        <p:txBody>
+          <a:bodyPr/>
+          <a:lstStyle/>
+          <a:p>
+            <a:endParaRPr lang="en-US"/>
+          </a:p>
+        </p:txBody>
       </p:sp>
       <p:pic>
         <p:nvPicPr>
-          <p:cNvPr id="11" name="answer 1 icon" descr="preencoded.png">    </p:cNvPr>
-          <p:cNvPicPr>
-            <a:picLocks noChangeAspect="1"/>
-          </p:cNvPicPr>
-          <p:nvPr/>
-        </p:nvPicPr>
-        <p:blipFill>
-          <a:blip r:embed="rId1"/>
-          <a:stretch>
-            <a:fillRect/>
-          </a:stretch>
-        </p:blipFill>
-        <p:spPr>
-          <a:xfrm>
-            <a:off x="5532120" y="1920240"/>
-            <a:ext cx="365760" cy="365760"/>
-          </a:xfrm>
-          <a:prstGeom prst="rect">
-            <a:avLst/>
-          </a:prstGeom>
-        </p:spPr>
-      </p:pic>
-      <p:sp>
-        <p:nvSpPr>
-          <p:cNvPr id="12" name="Text 9"/>
-          <p:cNvSpPr txBox="1"/>
-          <p:nvPr/>
-        </p:nvSpPr>
-        <p:spPr>
-          <a:xfrm>
-            <a:off x="6309360" y="1600200"/>
-            <a:ext cx="5120640" cy="365760"/>
-          </a:xfrm>
-          <a:prstGeom prst="rect">
-            <a:avLst/>
-          </a:prstGeom>
-          <a:noFill/>
-          <a:ln/>
-        </p:spPr>
-        <p:txBody>
-          <a:bodyPr wrap="square" lIns="0" tIns="0" rIns="0" bIns="0" rtlCol="0" anchor="t"/>
-          <a:lstStyle/>
-          <a:p>
-            <a:pPr indent="0" marL="0">
-              <a:buNone/>
-            </a:pPr>
-            <a:r>
-              <a:rPr lang="en-US" sz="1800" b="1" dirty="0">
-                <a:solidFill>
-                  <a:schemeClr val="tx2"/>
-                </a:solidFill>
-              </a:rPr>
-              <a:t>Yes, they predict well</a:t>
-            </a:r>
-            <a:endParaRPr lang="en-US" sz="1800" dirty="0"/>
-          </a:p>
-        </p:txBody>
-      </p:sp>
-      <p:sp>
-        <p:nvSpPr>
-          <p:cNvPr id="13" name="Text 10"/>
-          <p:cNvSpPr txBox="1"/>
-          <p:nvPr/>
-        </p:nvSpPr>
-        <p:spPr>
-          <a:xfrm>
-            <a:off x="6309360" y="1984248"/>
-            <a:ext cx="5120640" cy="731520"/>
-          </a:xfrm>
-          <a:prstGeom prst="rect">
-            <a:avLst/>
-          </a:prstGeom>
-          <a:noFill/>
-          <a:ln/>
-        </p:spPr>
-        <p:txBody>
-          <a:bodyPr wrap="square" lIns="0" tIns="0" rIns="0" bIns="0" rtlCol="0" anchor="t"/>
-          <a:lstStyle/>
-          <a:p>
-            <a:pPr indent="0" marL="0">
-              <a:buNone/>
-            </a:pPr>
-            <a:r>
-              <a:rPr lang="en-US" sz="1400" dirty="0">
-                <a:solidFill>
-                  <a:schemeClr val="tx1"/>
-                </a:solidFill>
-              </a:rPr>
-              <a:t>ROC AUC 0.89–0.91 and accuracy 81.8%–84.9% on patients the models had not seen.</a:t>
-            </a:r>
-            <a:endParaRPr lang="en-US" sz="1400" dirty="0"/>
-          </a:p>
-        </p:txBody>
-      </p:sp>
-      <p:sp>
-        <p:nvSpPr>
-          <p:cNvPr id="14" name="answer card 2"/>
-          <p:cNvSpPr/>
-          <p:nvPr/>
-        </p:nvSpPr>
-        <p:spPr>
-          <a:xfrm>
-            <a:off x="5120640" y="3017520"/>
-            <a:ext cx="6492240" cy="1371600"/>
-          </a:xfrm>
-          <a:prstGeom prst="roundRect">
-            <a:avLst>
-              <a:gd name="adj" fmla="val 8000"/>
-            </a:avLst>
-          </a:prstGeom>
-          <a:solidFill>
-            <a:schemeClr val="bg2"/>
-          </a:solidFill>
-          <a:ln/>
-        </p:spPr>
-      </p:sp>
-      <p:sp>
-        <p:nvSpPr>
-          <p:cNvPr id="15" name="answer 2 circle"/>
-          <p:cNvSpPr/>
-          <p:nvPr/>
-        </p:nvSpPr>
-        <p:spPr>
-          <a:xfrm>
-            <a:off x="5349240" y="3337560"/>
-            <a:ext cx="731520" cy="731520"/>
-          </a:xfrm>
-          <a:prstGeom prst="ellipse">
-            <a:avLst/>
-          </a:prstGeom>
-          <a:solidFill>
-            <a:schemeClr val="accent1"/>
-          </a:solidFill>
-          <a:ln/>
-        </p:spPr>
-      </p:sp>
-      <p:pic>
-        <p:nvPicPr>
-          <p:cNvPr id="16" name="answer 2 icon" descr="preencoded.png">    </p:cNvPr>
-          <p:cNvPicPr>
-            <a:picLocks noChangeAspect="1"/>
-          </p:cNvPicPr>
-          <p:nvPr/>
-        </p:nvPicPr>
-        <p:blipFill>
-          <a:blip r:embed="rId2"/>
-          <a:stretch>
-            <a:fillRect/>
-          </a:stretch>
-        </p:blipFill>
-        <p:spPr>
-          <a:xfrm>
-            <a:off x="5532120" y="3520440"/>
-            <a:ext cx="365760" cy="365760"/>
-          </a:xfrm>
-          <a:prstGeom prst="rect">
-            <a:avLst/>
-          </a:prstGeom>
-        </p:spPr>
-      </p:pic>
-      <p:sp>
-        <p:nvSpPr>
-          <p:cNvPr id="17" name="Text 13"/>
-          <p:cNvSpPr txBox="1"/>
-          <p:nvPr/>
-        </p:nvSpPr>
-        <p:spPr>
-          <a:xfrm>
-            <a:off x="6309360" y="3200400"/>
-            <a:ext cx="5120640" cy="365760"/>
-          </a:xfrm>
-          <a:prstGeom prst="rect">
-            <a:avLst/>
-          </a:prstGeom>
-          <a:noFill/>
-          <a:ln/>
-        </p:spPr>
-        <p:txBody>
-          <a:bodyPr wrap="square" lIns="0" tIns="0" rIns="0" bIns="0" rtlCol="0" anchor="t"/>
-          <a:lstStyle/>
-          <a:p>
-            <a:pPr indent="0" marL="0">
-              <a:buNone/>
-            </a:pPr>
-            <a:r>
-              <a:rPr lang="en-US" sz="1800" b="1" dirty="0">
-                <a:solidFill>
-                  <a:schemeClr val="tx2"/>
-                </a:solidFill>
-              </a:rPr>
-              <a:t>The choice of model barely matters</a:t>
-            </a:r>
-            <a:endParaRPr lang="en-US" sz="1800" dirty="0"/>
-          </a:p>
-        </p:txBody>
-      </p:sp>
-      <p:sp>
-        <p:nvSpPr>
-          <p:cNvPr id="18" name="Text 14"/>
-          <p:cNvSpPr txBox="1"/>
-          <p:nvPr/>
-        </p:nvSpPr>
-        <p:spPr>
-          <a:xfrm>
-            <a:off x="6309360" y="3584448"/>
-            <a:ext cx="5120640" cy="731520"/>
-          </a:xfrm>
-          <a:prstGeom prst="rect">
-            <a:avLst/>
-          </a:prstGeom>
-          <a:noFill/>
-          <a:ln/>
-        </p:spPr>
-        <p:txBody>
-          <a:bodyPr wrap="square" lIns="0" tIns="0" rIns="0" bIns="0" rtlCol="0" anchor="t"/>
-          <a:lstStyle/>
-          <a:p>
-            <a:pPr indent="0" marL="0">
-              <a:buNone/>
-            </a:pPr>
-            <a:r>
-              <a:rPr lang="en-US" sz="1400" dirty="0">
-                <a:solidFill>
-                  <a:schemeClr val="tx1"/>
-                </a:solidFill>
-              </a:rPr>
-              <a:t>Five models cannot be told apart; Gradient Boosting is slightly behind. Every other paired difference includes zero.</a:t>
-            </a:r>
-            <a:endParaRPr lang="en-US" sz="1400" dirty="0"/>
-          </a:p>
-        </p:txBody>
-      </p:sp>
-      <p:sp>
-        <p:nvSpPr>
-          <p:cNvPr id="19" name="answer card 3"/>
-          <p:cNvSpPr/>
-          <p:nvPr/>
-        </p:nvSpPr>
-        <p:spPr>
-          <a:xfrm>
-            <a:off x="5120640" y="4617720"/>
-            <a:ext cx="6492240" cy="1371600"/>
-          </a:xfrm>
-          <a:prstGeom prst="roundRect">
-            <a:avLst>
-              <a:gd name="adj" fmla="val 8000"/>
-            </a:avLst>
-          </a:prstGeom>
-          <a:solidFill>
-            <a:schemeClr val="bg2"/>
-          </a:solidFill>
-          <a:ln/>
-        </p:spPr>
-      </p:sp>
-      <p:sp>
-        <p:nvSpPr>
-          <p:cNvPr id="20" name="answer 3 circle"/>
-          <p:cNvSpPr/>
-          <p:nvPr/>
-        </p:nvSpPr>
-        <p:spPr>
-          <a:xfrm>
-            <a:off x="5349240" y="4937760"/>
-            <a:ext cx="731520" cy="731520"/>
-          </a:xfrm>
-          <a:prstGeom prst="ellipse">
-            <a:avLst/>
-          </a:prstGeom>
-          <a:solidFill>
-            <a:schemeClr val="accent4"/>
-          </a:solidFill>
-          <a:ln/>
-        </p:spPr>
-      </p:sp>
-      <p:pic>
-        <p:nvPicPr>
-          <p:cNvPr id="21" name="answer 3 icon" descr="preencoded.png">    </p:cNvPr>
+          <p:cNvPr id="11" name="answer 1 icon" descr="preencoded.png"/>
           <p:cNvPicPr>
             <a:picLocks noChangeAspect="1"/>
           </p:cNvPicPr>
@@ -14793,6 +13992,310 @@
         </p:blipFill>
         <p:spPr>
           <a:xfrm>
+            <a:off x="5532120" y="1920240"/>
+            <a:ext cx="365760" cy="365760"/>
+          </a:xfrm>
+          <a:prstGeom prst="rect">
+            <a:avLst/>
+          </a:prstGeom>
+        </p:spPr>
+      </p:pic>
+      <p:sp>
+        <p:nvSpPr>
+          <p:cNvPr id="12" name="Text 9"/>
+          <p:cNvSpPr txBox="1"/>
+          <p:nvPr/>
+        </p:nvSpPr>
+        <p:spPr>
+          <a:xfrm>
+            <a:off x="6309360" y="1600200"/>
+            <a:ext cx="5120640" cy="365760"/>
+          </a:xfrm>
+          <a:prstGeom prst="rect">
+            <a:avLst/>
+          </a:prstGeom>
+          <a:noFill/>
+          <a:ln/>
+        </p:spPr>
+        <p:txBody>
+          <a:bodyPr wrap="square" lIns="0" tIns="0" rIns="0" bIns="0" rtlCol="0" anchor="t"/>
+          <a:lstStyle/>
+          <a:p>
+            <a:pPr marL="0" indent="0">
+              <a:buNone/>
+            </a:pPr>
+            <a:r>
+              <a:rPr lang="en-US" sz="1800" b="1" dirty="0">
+                <a:solidFill>
+                  <a:schemeClr val="tx2"/>
+                </a:solidFill>
+              </a:rPr>
+              <a:t>Yes, they predict well</a:t>
+            </a:r>
+            <a:endParaRPr lang="en-US" sz="1800" dirty="0"/>
+          </a:p>
+        </p:txBody>
+      </p:sp>
+      <p:sp>
+        <p:nvSpPr>
+          <p:cNvPr id="13" name="Text 10"/>
+          <p:cNvSpPr txBox="1"/>
+          <p:nvPr/>
+        </p:nvSpPr>
+        <p:spPr>
+          <a:xfrm>
+            <a:off x="6309360" y="1984248"/>
+            <a:ext cx="5120640" cy="731520"/>
+          </a:xfrm>
+          <a:prstGeom prst="rect">
+            <a:avLst/>
+          </a:prstGeom>
+          <a:noFill/>
+          <a:ln/>
+        </p:spPr>
+        <p:txBody>
+          <a:bodyPr wrap="square" lIns="0" tIns="0" rIns="0" bIns="0" rtlCol="0" anchor="t"/>
+          <a:lstStyle/>
+          <a:p>
+            <a:pPr marL="0" indent="0">
+              <a:buNone/>
+            </a:pPr>
+            <a:r>
+              <a:rPr lang="en-US" sz="1400" dirty="0">
+                <a:solidFill>
+                  <a:schemeClr val="tx1"/>
+                </a:solidFill>
+              </a:rPr>
+              <a:t>ROC AUC 0.89–0.91 and accuracy 81.8%–84.9% on patients the models had not seen.</a:t>
+            </a:r>
+            <a:endParaRPr lang="en-US" sz="1400" dirty="0"/>
+          </a:p>
+        </p:txBody>
+      </p:sp>
+      <p:sp>
+        <p:nvSpPr>
+          <p:cNvPr id="14" name="answer card 2"/>
+          <p:cNvSpPr/>
+          <p:nvPr/>
+        </p:nvSpPr>
+        <p:spPr>
+          <a:xfrm>
+            <a:off x="5120640" y="3017520"/>
+            <a:ext cx="6492240" cy="1371600"/>
+          </a:xfrm>
+          <a:prstGeom prst="roundRect">
+            <a:avLst>
+              <a:gd name="adj" fmla="val 8000"/>
+            </a:avLst>
+          </a:prstGeom>
+          <a:solidFill>
+            <a:schemeClr val="bg2"/>
+          </a:solidFill>
+          <a:ln/>
+        </p:spPr>
+        <p:txBody>
+          <a:bodyPr/>
+          <a:lstStyle/>
+          <a:p>
+            <a:endParaRPr lang="en-US"/>
+          </a:p>
+        </p:txBody>
+      </p:sp>
+      <p:sp>
+        <p:nvSpPr>
+          <p:cNvPr id="15" name="answer 2 circle"/>
+          <p:cNvSpPr/>
+          <p:nvPr/>
+        </p:nvSpPr>
+        <p:spPr>
+          <a:xfrm>
+            <a:off x="5349240" y="3337560"/>
+            <a:ext cx="731520" cy="731520"/>
+          </a:xfrm>
+          <a:prstGeom prst="ellipse">
+            <a:avLst/>
+          </a:prstGeom>
+          <a:solidFill>
+            <a:schemeClr val="accent1"/>
+          </a:solidFill>
+          <a:ln/>
+        </p:spPr>
+        <p:txBody>
+          <a:bodyPr/>
+          <a:lstStyle/>
+          <a:p>
+            <a:endParaRPr lang="en-US"/>
+          </a:p>
+        </p:txBody>
+      </p:sp>
+      <p:pic>
+        <p:nvPicPr>
+          <p:cNvPr id="16" name="answer 2 icon" descr="preencoded.png"/>
+          <p:cNvPicPr>
+            <a:picLocks noChangeAspect="1"/>
+          </p:cNvPicPr>
+          <p:nvPr/>
+        </p:nvPicPr>
+        <p:blipFill>
+          <a:blip r:embed="rId4"/>
+          <a:stretch>
+            <a:fillRect/>
+          </a:stretch>
+        </p:blipFill>
+        <p:spPr>
+          <a:xfrm>
+            <a:off x="5532120" y="3520440"/>
+            <a:ext cx="365760" cy="365760"/>
+          </a:xfrm>
+          <a:prstGeom prst="rect">
+            <a:avLst/>
+          </a:prstGeom>
+        </p:spPr>
+      </p:pic>
+      <p:sp>
+        <p:nvSpPr>
+          <p:cNvPr id="17" name="Text 13"/>
+          <p:cNvSpPr txBox="1"/>
+          <p:nvPr/>
+        </p:nvSpPr>
+        <p:spPr>
+          <a:xfrm>
+            <a:off x="6309360" y="3200400"/>
+            <a:ext cx="5120640" cy="365760"/>
+          </a:xfrm>
+          <a:prstGeom prst="rect">
+            <a:avLst/>
+          </a:prstGeom>
+          <a:noFill/>
+          <a:ln/>
+        </p:spPr>
+        <p:txBody>
+          <a:bodyPr wrap="square" lIns="0" tIns="0" rIns="0" bIns="0" rtlCol="0" anchor="t"/>
+          <a:lstStyle/>
+          <a:p>
+            <a:pPr marL="0" indent="0">
+              <a:buNone/>
+            </a:pPr>
+            <a:r>
+              <a:rPr lang="en-US" sz="1800" b="1" dirty="0">
+                <a:solidFill>
+                  <a:schemeClr val="tx2"/>
+                </a:solidFill>
+              </a:rPr>
+              <a:t>The choice of model barely matters</a:t>
+            </a:r>
+            <a:endParaRPr lang="en-US" sz="1800" dirty="0"/>
+          </a:p>
+        </p:txBody>
+      </p:sp>
+      <p:sp>
+        <p:nvSpPr>
+          <p:cNvPr id="18" name="Text 14"/>
+          <p:cNvSpPr txBox="1"/>
+          <p:nvPr/>
+        </p:nvSpPr>
+        <p:spPr>
+          <a:xfrm>
+            <a:off x="6309360" y="3584448"/>
+            <a:ext cx="5120640" cy="731520"/>
+          </a:xfrm>
+          <a:prstGeom prst="rect">
+            <a:avLst/>
+          </a:prstGeom>
+          <a:noFill/>
+          <a:ln/>
+        </p:spPr>
+        <p:txBody>
+          <a:bodyPr wrap="square" lIns="0" tIns="0" rIns="0" bIns="0" rtlCol="0" anchor="t"/>
+          <a:lstStyle/>
+          <a:p>
+            <a:pPr marL="0" indent="0">
+              <a:buNone/>
+            </a:pPr>
+            <a:r>
+              <a:rPr lang="en-US" sz="1400" dirty="0">
+                <a:solidFill>
+                  <a:schemeClr val="tx1"/>
+                </a:solidFill>
+              </a:rPr>
+              <a:t>Five models cannot be told apart; Gradient Boosting is slightly behind. Every other paired difference includes zero.</a:t>
+            </a:r>
+            <a:endParaRPr lang="en-US" sz="1400" dirty="0"/>
+          </a:p>
+        </p:txBody>
+      </p:sp>
+      <p:sp>
+        <p:nvSpPr>
+          <p:cNvPr id="19" name="answer card 3"/>
+          <p:cNvSpPr/>
+          <p:nvPr/>
+        </p:nvSpPr>
+        <p:spPr>
+          <a:xfrm>
+            <a:off x="5120640" y="4617720"/>
+            <a:ext cx="6492240" cy="1371600"/>
+          </a:xfrm>
+          <a:prstGeom prst="roundRect">
+            <a:avLst>
+              <a:gd name="adj" fmla="val 8000"/>
+            </a:avLst>
+          </a:prstGeom>
+          <a:solidFill>
+            <a:schemeClr val="bg2"/>
+          </a:solidFill>
+          <a:ln/>
+        </p:spPr>
+        <p:txBody>
+          <a:bodyPr/>
+          <a:lstStyle/>
+          <a:p>
+            <a:endParaRPr lang="en-US"/>
+          </a:p>
+        </p:txBody>
+      </p:sp>
+      <p:sp>
+        <p:nvSpPr>
+          <p:cNvPr id="20" name="answer 3 circle"/>
+          <p:cNvSpPr/>
+          <p:nvPr/>
+        </p:nvSpPr>
+        <p:spPr>
+          <a:xfrm>
+            <a:off x="5349240" y="4937760"/>
+            <a:ext cx="731520" cy="731520"/>
+          </a:xfrm>
+          <a:prstGeom prst="ellipse">
+            <a:avLst/>
+          </a:prstGeom>
+          <a:solidFill>
+            <a:schemeClr val="accent4"/>
+          </a:solidFill>
+          <a:ln/>
+        </p:spPr>
+        <p:txBody>
+          <a:bodyPr/>
+          <a:lstStyle/>
+          <a:p>
+            <a:endParaRPr lang="en-US"/>
+          </a:p>
+        </p:txBody>
+      </p:sp>
+      <p:pic>
+        <p:nvPicPr>
+          <p:cNvPr id="21" name="answer 3 icon" descr="preencoded.png"/>
+          <p:cNvPicPr>
+            <a:picLocks noChangeAspect="1"/>
+          </p:cNvPicPr>
+          <p:nvPr/>
+        </p:nvPicPr>
+        <p:blipFill>
+          <a:blip r:embed="rId5"/>
+          <a:stretch>
+            <a:fillRect/>
+          </a:stretch>
+        </p:blipFill>
+        <p:spPr>
+          <a:xfrm>
             <a:off x="5532120" y="5120640"/>
             <a:ext cx="365760" cy="365760"/>
           </a:xfrm>
@@ -14822,7 +14325,7 @@
           <a:bodyPr wrap="square" lIns="0" tIns="0" rIns="0" bIns="0" rtlCol="0" anchor="t"/>
           <a:lstStyle/>
           <a:p>
-            <a:pPr indent="0" marL="0">
+            <a:pPr marL="0" indent="0">
               <a:buNone/>
             </a:pPr>
             <a:r>
@@ -14858,7 +14361,7 @@
           <a:bodyPr wrap="square" lIns="0" tIns="0" rIns="0" bIns="0" rtlCol="0" anchor="t"/>
           <a:lstStyle/>
           <a:p>
-            <a:pPr indent="0" marL="0">
+            <a:pPr marL="0" indent="0">
               <a:buNone/>
             </a:pPr>
             <a:r>
@@ -14893,7 +14396,7 @@
           </a:prstGeom>
           <a:extLst>
             <a:ext uri="{C572A759-6A51-4108-AA02-DFA0A04FC94B}">
-              <ma14:wrappingTextBoxFlag xmlns:ma14="http://schemas.microsoft.com/office/mac/drawingml/2011/main" val="0"/>
+              <ma14:wrappingTextBoxFlag xmlns:ma14="http://schemas.microsoft.com/office/mac/drawingml/2011/main" xmlns="" val="0"/>
             </a:ext>
           </a:extLst>
         </p:spPr>
@@ -14911,7 +14414,7 @@
           <a:p>
             <a:pPr algn="r"/>
             <a:fld id="{F7021451-1387-4CA6-816F-3879F97B5CBC}" type="slidenum">
-              <a:rPr b="0" lang="en-US"/>
+              <a:rPr lang="en-US" b="0"/>
               <a:t>3</a:t>
             </a:fld>
             <a:endParaRPr lang="en-US"/>
@@ -14945,79 +14448,12 @@
       </p:grpSpPr>
       <p:sp>
         <p:nvSpPr>
-          <p:cNvPr id="2" name="presenter chip"/>
-          <p:cNvSpPr/>
-          <p:nvPr/>
-        </p:nvSpPr>
-        <p:spPr>
-          <a:xfrm>
-            <a:off x="9921240" y="502920"/>
-            <a:ext cx="1691640" cy="457200"/>
-          </a:xfrm>
-          <a:prstGeom prst="roundRect">
-            <a:avLst>
-              <a:gd name="adj" fmla="val 50000"/>
-            </a:avLst>
-          </a:prstGeom>
-          <a:solidFill>
-            <a:schemeClr val="tx2"/>
-          </a:solidFill>
-          <a:ln/>
-        </p:spPr>
-      </p:sp>
-      <p:sp>
-        <p:nvSpPr>
-          <p:cNvPr id="3" name="Text 1"/>
-          <p:cNvSpPr txBox="1"/>
-          <p:nvPr/>
-        </p:nvSpPr>
-        <p:spPr>
-          <a:xfrm>
-            <a:off x="9921240" y="502920"/>
-            <a:ext cx="1691640" cy="457200"/>
-          </a:xfrm>
-          <a:prstGeom prst="rect">
-            <a:avLst/>
-          </a:prstGeom>
-          <a:noFill/>
-          <a:ln/>
-        </p:spPr>
-        <p:txBody>
-          <a:bodyPr wrap="square" lIns="0" tIns="0" rIns="0" bIns="0" rtlCol="0" anchor="ctr"/>
-          <a:lstStyle/>
-          <a:p>
-            <a:pPr algn="ctr" indent="0" marL="0">
-              <a:buNone/>
-            </a:pPr>
-            <a:r>
-              <a:rPr lang="en-US" sz="1100" dirty="0">
-                <a:solidFill>
-                  <a:schemeClr val="accent6"/>
-                </a:solidFill>
-              </a:rPr>
-              <a:t>Presenter  </a:t>
-            </a:r>
-            <a:pPr algn="ctr" indent="0" marL="0">
-              <a:buNone/>
-            </a:pPr>
-            <a:r>
-              <a:rPr lang="en-US" sz="1300" b="1" dirty="0">
-                <a:solidFill>
-                  <a:schemeClr val="bg1"/>
-                </a:solidFill>
-              </a:rPr>
-              <a:t>Hardik</a:t>
-            </a:r>
-            <a:endParaRPr lang="en-US" sz="1600" dirty="0"/>
-          </a:p>
-        </p:txBody>
-      </p:sp>
-      <p:sp>
-        <p:nvSpPr>
           <p:cNvPr id="4" name="Text 0"/>
-          <p:cNvSpPr/>
+          <p:cNvSpPr>
+            <a:spLocks noGrp="1"/>
+          </p:cNvSpPr>
           <p:nvPr>
-            <p:ph idx="100" type="title" hasCustomPrompt="1"/>
+            <p:ph type="title" idx="100" hasCustomPrompt="1"/>
           </p:nvPr>
         </p:nvSpPr>
         <p:spPr>
@@ -15035,7 +14471,7 @@
           <a:bodyPr wrap="square" lIns="0" tIns="0" rIns="0" bIns="0" rtlCol="0" anchor="ctr"/>
           <a:lstStyle/>
           <a:p>
-            <a:pPr algn="l" indent="0" marL="0">
+            <a:pPr marL="0" indent="0" algn="l">
               <a:buNone/>
             </a:pPr>
             <a:r>
@@ -15074,7 +14510,7 @@
           <a:bodyPr wrap="square" lIns="0" tIns="0" rIns="0" bIns="0" rtlCol="0" anchor="t"/>
           <a:lstStyle/>
           <a:p>
-            <a:pPr indent="0" marL="0">
+            <a:pPr marL="0" indent="0">
               <a:buNone/>
             </a:pPr>
             <a:r>
@@ -15113,7 +14549,7 @@
           <a:bodyPr wrap="square" lIns="0" tIns="0" rIns="0" bIns="0" rtlCol="0" anchor="t"/>
           <a:lstStyle/>
           <a:p>
-            <a:pPr indent="0" marL="0">
+            <a:pPr marL="0" indent="0">
               <a:buNone/>
             </a:pPr>
             <a:r>
@@ -15149,7 +14585,7 @@
           <a:bodyPr wrap="square" lIns="0" tIns="0" rIns="0" bIns="0" rtlCol="0" anchor="t"/>
           <a:lstStyle/>
           <a:p>
-            <a:pPr indent="0" marL="0">
+            <a:pPr marL="0" indent="0">
               <a:buNone/>
             </a:pPr>
             <a:r>
@@ -15188,7 +14624,7 @@
           <a:bodyPr wrap="square" lIns="0" tIns="0" rIns="0" bIns="0" rtlCol="0" anchor="t"/>
           <a:lstStyle/>
           <a:p>
-            <a:pPr indent="0" marL="0">
+            <a:pPr marL="0" indent="0">
               <a:buNone/>
             </a:pPr>
             <a:r>
@@ -15224,7 +14660,7 @@
           <a:bodyPr wrap="square" lIns="0" tIns="0" rIns="0" bIns="0" rtlCol="0" anchor="t"/>
           <a:lstStyle/>
           <a:p>
-            <a:pPr indent="0" marL="0">
+            <a:pPr marL="0" indent="0">
               <a:buNone/>
             </a:pPr>
             <a:r>
@@ -15263,7 +14699,7 @@
           <a:bodyPr wrap="square" lIns="0" tIns="0" rIns="0" bIns="0" rtlCol="0" anchor="t"/>
           <a:lstStyle/>
           <a:p>
-            <a:pPr indent="0" marL="0">
+            <a:pPr marL="0" indent="0">
               <a:buNone/>
             </a:pPr>
             <a:r>
@@ -15299,7 +14735,7 @@
           <a:bodyPr wrap="square" lIns="0" tIns="0" rIns="0" bIns="0" rtlCol="0" anchor="t"/>
           <a:lstStyle/>
           <a:p>
-            <a:pPr indent="0" marL="0">
+            <a:pPr marL="0" indent="0">
               <a:buNone/>
             </a:pPr>
             <a:r>
@@ -15338,7 +14774,7 @@
           <a:bodyPr wrap="square" lIns="0" tIns="0" rIns="0" bIns="0" rtlCol="0" anchor="t"/>
           <a:lstStyle/>
           <a:p>
-            <a:pPr indent="0" marL="0">
+            <a:pPr marL="0" indent="0">
               <a:buNone/>
             </a:pPr>
             <a:r>
@@ -15467,7 +14903,7 @@
       </p:sp>
       <p:graphicFrame>
         <p:nvGraphicFramePr>
-          <p:cNvPr id="14" name="Chart 0" descr=""/>
+          <p:cNvPr id="14" name="Chart 0"/>
           <p:cNvGraphicFramePr/>
           <p:nvPr/>
         </p:nvGraphicFramePr>
@@ -15475,9 +14911,9 @@
           <a:off x="6492240" y="1371600"/>
           <a:ext cx="5120640" cy="4754880"/>
         </p:xfrm>
-        <a:graphic xmlns:a="http://schemas.openxmlformats.org/drawingml/2006/main">
+        <a:graphic>
           <a:graphicData uri="http://schemas.openxmlformats.org/drawingml/2006/chart">
-            <c:chart xmlns:c="http://schemas.openxmlformats.org/drawingml/2006/chart" r:id="rId1"/>
+            <c:chart xmlns:c="http://schemas.openxmlformats.org/drawingml/2006/chart" xmlns:r="http://schemas.openxmlformats.org/officeDocument/2006/relationships" r:id="rId3"/>
           </a:graphicData>
         </a:graphic>
       </p:graphicFrame>
@@ -15501,7 +14937,7 @@
           </a:prstGeom>
           <a:extLst>
             <a:ext uri="{C572A759-6A51-4108-AA02-DFA0A04FC94B}">
-              <ma14:wrappingTextBoxFlag xmlns:ma14="http://schemas.microsoft.com/office/mac/drawingml/2011/main" val="0"/>
+              <ma14:wrappingTextBoxFlag xmlns:ma14="http://schemas.microsoft.com/office/mac/drawingml/2011/main" xmlns="" val="0"/>
             </a:ext>
           </a:extLst>
         </p:spPr>
@@ -15519,7 +14955,7 @@
           <a:p>
             <a:pPr algn="r"/>
             <a:fld id="{F7021451-1387-4CA6-816F-3879F97B5CBC}" type="slidenum">
-              <a:rPr b="0" lang="en-US"/>
+              <a:rPr lang="en-US" b="0"/>
               <a:t>4</a:t>
             </a:fld>
             <a:endParaRPr lang="en-US"/>
@@ -15553,79 +14989,12 @@
       </p:grpSpPr>
       <p:sp>
         <p:nvSpPr>
-          <p:cNvPr id="2" name="presenter chip"/>
-          <p:cNvSpPr/>
-          <p:nvPr/>
-        </p:nvSpPr>
-        <p:spPr>
-          <a:xfrm>
-            <a:off x="9921240" y="502920"/>
-            <a:ext cx="1691640" cy="457200"/>
-          </a:xfrm>
-          <a:prstGeom prst="roundRect">
-            <a:avLst>
-              <a:gd name="adj" fmla="val 50000"/>
-            </a:avLst>
-          </a:prstGeom>
-          <a:solidFill>
-            <a:schemeClr val="tx2"/>
-          </a:solidFill>
-          <a:ln/>
-        </p:spPr>
-      </p:sp>
-      <p:sp>
-        <p:nvSpPr>
-          <p:cNvPr id="3" name="Text 1"/>
-          <p:cNvSpPr txBox="1"/>
-          <p:nvPr/>
-        </p:nvSpPr>
-        <p:spPr>
-          <a:xfrm>
-            <a:off x="9921240" y="502920"/>
-            <a:ext cx="1691640" cy="457200"/>
-          </a:xfrm>
-          <a:prstGeom prst="rect">
-            <a:avLst/>
-          </a:prstGeom>
-          <a:noFill/>
-          <a:ln/>
-        </p:spPr>
-        <p:txBody>
-          <a:bodyPr wrap="square" lIns="0" tIns="0" rIns="0" bIns="0" rtlCol="0" anchor="ctr"/>
-          <a:lstStyle/>
-          <a:p>
-            <a:pPr algn="ctr" indent="0" marL="0">
-              <a:buNone/>
-            </a:pPr>
-            <a:r>
-              <a:rPr lang="en-US" sz="1100" dirty="0">
-                <a:solidFill>
-                  <a:schemeClr val="accent6"/>
-                </a:solidFill>
-              </a:rPr>
-              <a:t>Presenter  </a:t>
-            </a:r>
-            <a:pPr algn="ctr" indent="0" marL="0">
-              <a:buNone/>
-            </a:pPr>
-            <a:r>
-              <a:rPr lang="en-US" sz="1300" b="1" dirty="0">
-                <a:solidFill>
-                  <a:schemeClr val="bg1"/>
-                </a:solidFill>
-              </a:rPr>
-              <a:t>Hardik</a:t>
-            </a:r>
-            <a:endParaRPr lang="en-US" sz="1600" dirty="0"/>
-          </a:p>
-        </p:txBody>
-      </p:sp>
-      <p:sp>
-        <p:nvSpPr>
           <p:cNvPr id="4" name="Text 0"/>
-          <p:cNvSpPr/>
+          <p:cNvSpPr>
+            <a:spLocks noGrp="1"/>
+          </p:cNvSpPr>
           <p:nvPr>
-            <p:ph idx="100" type="title" hasCustomPrompt="1"/>
+            <p:ph type="title" idx="100" hasCustomPrompt="1"/>
           </p:nvPr>
         </p:nvSpPr>
         <p:spPr>
@@ -15643,7 +15012,7 @@
           <a:bodyPr wrap="square" lIns="0" tIns="0" rIns="0" bIns="0" rtlCol="0" anchor="ctr"/>
           <a:lstStyle/>
           <a:p>
-            <a:pPr algn="l" indent="0" marL="0">
+            <a:pPr marL="0" indent="0" algn="l">
               <a:buNone/>
             </a:pPr>
             <a:r>
@@ -15663,14 +15032,14 @@
       </p:sp>
       <p:pic>
         <p:nvPicPr>
-          <p:cNvPr id="5" name="correlation heatmap" descr="Spearman correlation heatmap of the 13 predictors and the target">    </p:cNvPr>
+          <p:cNvPr id="5" name="correlation heatmap" descr="Spearman correlation heatmap of the 13 predictors and the target"/>
           <p:cNvPicPr>
             <a:picLocks noChangeAspect="1"/>
           </p:cNvPicPr>
           <p:nvPr/>
         </p:nvPicPr>
         <p:blipFill>
-          <a:blip r:embed="rId1"/>
+          <a:blip r:embed="rId3"/>
           <a:stretch>
             <a:fillRect/>
           </a:stretch>
@@ -15706,6 +15075,13 @@
           </a:solidFill>
           <a:ln/>
         </p:spPr>
+        <p:txBody>
+          <a:bodyPr/>
+          <a:lstStyle/>
+          <a:p>
+            <a:endParaRPr lang="en-US"/>
+          </a:p>
+        </p:txBody>
       </p:sp>
       <p:sp>
         <p:nvSpPr>
@@ -15728,7 +15104,7 @@
           <a:bodyPr wrap="square" lIns="0" tIns="0" rIns="0" bIns="0" rtlCol="0" anchor="t"/>
           <a:lstStyle/>
           <a:p>
-            <a:pPr indent="0" marL="0">
+            <a:pPr marL="0" indent="0">
               <a:buNone/>
             </a:pPr>
             <a:r>
@@ -15764,7 +15140,7 @@
           <a:bodyPr wrap="square" lIns="0" tIns="0" rIns="0" bIns="0" rtlCol="0" anchor="t"/>
           <a:lstStyle/>
           <a:p>
-            <a:pPr indent="0" marL="0">
+            <a:pPr marL="0" indent="0">
               <a:buNone/>
             </a:pPr>
             <a:r>
@@ -15800,6 +15176,13 @@
           </a:solidFill>
           <a:ln/>
         </p:spPr>
+        <p:txBody>
+          <a:bodyPr/>
+          <a:lstStyle/>
+          <a:p>
+            <a:endParaRPr lang="en-US"/>
+          </a:p>
+        </p:txBody>
       </p:sp>
       <p:sp>
         <p:nvSpPr>
@@ -15822,7 +15205,7 @@
           <a:bodyPr wrap="square" lIns="0" tIns="0" rIns="0" bIns="0" rtlCol="0" anchor="t"/>
           <a:lstStyle/>
           <a:p>
-            <a:pPr indent="0" marL="0">
+            <a:pPr marL="0" indent="0">
               <a:buNone/>
             </a:pPr>
             <a:r>
@@ -15858,7 +15241,7 @@
           <a:bodyPr wrap="square" lIns="0" tIns="0" rIns="0" bIns="0" rtlCol="0" anchor="t"/>
           <a:lstStyle/>
           <a:p>
-            <a:pPr indent="0" marL="0">
+            <a:pPr marL="0" indent="0">
               <a:buNone/>
             </a:pPr>
             <a:r>
@@ -15894,6 +15277,13 @@
           </a:solidFill>
           <a:ln/>
         </p:spPr>
+        <p:txBody>
+          <a:bodyPr/>
+          <a:lstStyle/>
+          <a:p>
+            <a:endParaRPr lang="en-US"/>
+          </a:p>
+        </p:txBody>
       </p:sp>
       <p:sp>
         <p:nvSpPr>
@@ -15916,7 +15306,7 @@
           <a:bodyPr wrap="square" lIns="0" tIns="0" rIns="0" bIns="0" rtlCol="0" anchor="t"/>
           <a:lstStyle/>
           <a:p>
-            <a:pPr indent="0" marL="0">
+            <a:pPr marL="0" indent="0">
               <a:buNone/>
             </a:pPr>
             <a:r>
@@ -15952,7 +15342,7 @@
           <a:bodyPr wrap="square" lIns="0" tIns="0" rIns="0" bIns="0" rtlCol="0" anchor="t"/>
           <a:lstStyle/>
           <a:p>
-            <a:pPr indent="0" marL="0">
+            <a:pPr marL="0" indent="0">
               <a:buNone/>
             </a:pPr>
             <a:r>
@@ -15987,7 +15377,7 @@
           </a:prstGeom>
           <a:extLst>
             <a:ext uri="{C572A759-6A51-4108-AA02-DFA0A04FC94B}">
-              <ma14:wrappingTextBoxFlag xmlns:ma14="http://schemas.microsoft.com/office/mac/drawingml/2011/main" val="0"/>
+              <ma14:wrappingTextBoxFlag xmlns:ma14="http://schemas.microsoft.com/office/mac/drawingml/2011/main" xmlns="" val="0"/>
             </a:ext>
           </a:extLst>
         </p:spPr>
@@ -16005,7 +15395,7 @@
           <a:p>
             <a:pPr algn="r"/>
             <a:fld id="{F7021451-1387-4CA6-816F-3879F97B5CBC}" type="slidenum">
-              <a:rPr b="0" lang="en-US"/>
+              <a:rPr lang="en-US" b="0"/>
               <a:t>5</a:t>
             </a:fld>
             <a:endParaRPr lang="en-US"/>
@@ -16039,79 +15429,12 @@
       </p:grpSpPr>
       <p:sp>
         <p:nvSpPr>
-          <p:cNvPr id="2" name="presenter chip"/>
-          <p:cNvSpPr/>
-          <p:nvPr/>
-        </p:nvSpPr>
-        <p:spPr>
-          <a:xfrm>
-            <a:off x="9921240" y="502920"/>
-            <a:ext cx="1691640" cy="457200"/>
-          </a:xfrm>
-          <a:prstGeom prst="roundRect">
-            <a:avLst>
-              <a:gd name="adj" fmla="val 50000"/>
-            </a:avLst>
-          </a:prstGeom>
-          <a:solidFill>
-            <a:schemeClr val="tx2"/>
-          </a:solidFill>
-          <a:ln/>
-        </p:spPr>
-      </p:sp>
-      <p:sp>
-        <p:nvSpPr>
-          <p:cNvPr id="3" name="Text 1"/>
-          <p:cNvSpPr txBox="1"/>
-          <p:nvPr/>
-        </p:nvSpPr>
-        <p:spPr>
-          <a:xfrm>
-            <a:off x="9921240" y="502920"/>
-            <a:ext cx="1691640" cy="457200"/>
-          </a:xfrm>
-          <a:prstGeom prst="rect">
-            <a:avLst/>
-          </a:prstGeom>
-          <a:noFill/>
-          <a:ln/>
-        </p:spPr>
-        <p:txBody>
-          <a:bodyPr wrap="square" lIns="0" tIns="0" rIns="0" bIns="0" rtlCol="0" anchor="ctr"/>
-          <a:lstStyle/>
-          <a:p>
-            <a:pPr algn="ctr" indent="0" marL="0">
-              <a:buNone/>
-            </a:pPr>
-            <a:r>
-              <a:rPr lang="en-US" sz="1100" dirty="0">
-                <a:solidFill>
-                  <a:schemeClr val="accent6"/>
-                </a:solidFill>
-              </a:rPr>
-              <a:t>Presenter  </a:t>
-            </a:r>
-            <a:pPr algn="ctr" indent="0" marL="0">
-              <a:buNone/>
-            </a:pPr>
-            <a:r>
-              <a:rPr lang="en-US" sz="1300" b="1" dirty="0">
-                <a:solidFill>
-                  <a:schemeClr val="bg1"/>
-                </a:solidFill>
-              </a:rPr>
-              <a:t>Hardik</a:t>
-            </a:r>
-            <a:endParaRPr lang="en-US" sz="1600" dirty="0"/>
-          </a:p>
-        </p:txBody>
-      </p:sp>
-      <p:sp>
-        <p:nvSpPr>
           <p:cNvPr id="4" name="Text 0"/>
-          <p:cNvSpPr/>
+          <p:cNvSpPr>
+            <a:spLocks noGrp="1"/>
+          </p:cNvSpPr>
           <p:nvPr>
-            <p:ph idx="100" type="title" hasCustomPrompt="1"/>
+            <p:ph type="title" idx="100" hasCustomPrompt="1"/>
           </p:nvPr>
         </p:nvSpPr>
         <p:spPr>
@@ -16129,7 +15452,7 @@
           <a:bodyPr wrap="square" lIns="0" tIns="0" rIns="0" bIns="0" rtlCol="0" anchor="ctr"/>
           <a:lstStyle/>
           <a:p>
-            <a:pPr algn="l" indent="0" marL="0">
+            <a:pPr marL="0" indent="0" algn="l">
               <a:buNone/>
             </a:pPr>
             <a:r>
@@ -16168,6 +15491,13 @@
           </a:solidFill>
           <a:ln/>
         </p:spPr>
+        <p:txBody>
+          <a:bodyPr/>
+          <a:lstStyle/>
+          <a:p>
+            <a:endParaRPr lang="en-US"/>
+          </a:p>
+        </p:txBody>
       </p:sp>
       <p:sp>
         <p:nvSpPr>
@@ -16190,7 +15520,7 @@
           <a:bodyPr wrap="square" lIns="0" tIns="0" rIns="0" bIns="0" rtlCol="0" anchor="t"/>
           <a:lstStyle/>
           <a:p>
-            <a:pPr indent="0" marL="0">
+            <a:pPr marL="0" indent="0">
               <a:buNone/>
             </a:pPr>
             <a:r>
@@ -16226,7 +15556,7 @@
           <a:bodyPr wrap="square" lIns="0" tIns="0" rIns="0" bIns="0" rtlCol="0" anchor="t"/>
           <a:lstStyle/>
           <a:p>
-            <a:pPr indent="0" marL="0">
+            <a:pPr marL="0" indent="0">
               <a:buNone/>
             </a:pPr>
             <a:r>
@@ -16260,6 +15590,13 @@
           </a:solidFill>
           <a:ln/>
         </p:spPr>
+        <p:txBody>
+          <a:bodyPr/>
+          <a:lstStyle/>
+          <a:p>
+            <a:endParaRPr lang="en-US"/>
+          </a:p>
+        </p:txBody>
       </p:sp>
       <p:sp>
         <p:nvSpPr>
@@ -16282,6 +15619,13 @@
           </a:solidFill>
           <a:ln/>
         </p:spPr>
+        <p:txBody>
+          <a:bodyPr/>
+          <a:lstStyle/>
+          <a:p>
+            <a:endParaRPr lang="en-US"/>
+          </a:p>
+        </p:txBody>
       </p:sp>
       <p:sp>
         <p:nvSpPr>
@@ -16304,7 +15648,7 @@
           <a:bodyPr wrap="square" lIns="0" tIns="0" rIns="0" bIns="0" rtlCol="0" anchor="t"/>
           <a:lstStyle/>
           <a:p>
-            <a:pPr indent="0" marL="0">
+            <a:pPr marL="0" indent="0">
               <a:buNone/>
             </a:pPr>
             <a:r>
@@ -16340,7 +15684,7 @@
           <a:bodyPr wrap="square" lIns="0" tIns="0" rIns="0" bIns="0" rtlCol="0" anchor="t"/>
           <a:lstStyle/>
           <a:p>
-            <a:pPr indent="0" marL="0">
+            <a:pPr marL="0" indent="0">
               <a:buNone/>
             </a:pPr>
             <a:r>
@@ -16374,6 +15718,13 @@
           </a:solidFill>
           <a:ln/>
         </p:spPr>
+        <p:txBody>
+          <a:bodyPr/>
+          <a:lstStyle/>
+          <a:p>
+            <a:endParaRPr lang="en-US"/>
+          </a:p>
+        </p:txBody>
       </p:sp>
       <p:sp>
         <p:nvSpPr>
@@ -16396,6 +15747,13 @@
           </a:solidFill>
           <a:ln/>
         </p:spPr>
+        <p:txBody>
+          <a:bodyPr/>
+          <a:lstStyle/>
+          <a:p>
+            <a:endParaRPr lang="en-US"/>
+          </a:p>
+        </p:txBody>
       </p:sp>
       <p:sp>
         <p:nvSpPr>
@@ -16418,7 +15776,7 @@
           <a:bodyPr wrap="square" lIns="0" tIns="0" rIns="0" bIns="0" rtlCol="0" anchor="t"/>
           <a:lstStyle/>
           <a:p>
-            <a:pPr indent="0" marL="0">
+            <a:pPr marL="0" indent="0">
               <a:buNone/>
             </a:pPr>
             <a:r>
@@ -16454,7 +15812,7 @@
           <a:bodyPr wrap="square" lIns="0" tIns="0" rIns="0" bIns="0" rtlCol="0" anchor="t"/>
           <a:lstStyle/>
           <a:p>
-            <a:pPr indent="0" marL="0">
+            <a:pPr marL="0" indent="0">
               <a:buNone/>
             </a:pPr>
             <a:r>
@@ -16488,6 +15846,13 @@
           </a:solidFill>
           <a:ln/>
         </p:spPr>
+        <p:txBody>
+          <a:bodyPr/>
+          <a:lstStyle/>
+          <a:p>
+            <a:endParaRPr lang="en-US"/>
+          </a:p>
+        </p:txBody>
       </p:sp>
       <p:sp>
         <p:nvSpPr>
@@ -16510,6 +15875,13 @@
           </a:solidFill>
           <a:ln/>
         </p:spPr>
+        <p:txBody>
+          <a:bodyPr/>
+          <a:lstStyle/>
+          <a:p>
+            <a:endParaRPr lang="en-US"/>
+          </a:p>
+        </p:txBody>
       </p:sp>
       <p:sp>
         <p:nvSpPr>
@@ -16532,7 +15904,7 @@
           <a:bodyPr wrap="square" lIns="0" tIns="0" rIns="0" bIns="0" rtlCol="0" anchor="t"/>
           <a:lstStyle/>
           <a:p>
-            <a:pPr indent="0" marL="0">
+            <a:pPr marL="0" indent="0">
               <a:buNone/>
             </a:pPr>
             <a:r>
@@ -16568,7 +15940,7 @@
           <a:bodyPr wrap="square" lIns="0" tIns="0" rIns="0" bIns="0" rtlCol="0" anchor="t"/>
           <a:lstStyle/>
           <a:p>
-            <a:pPr indent="0" marL="0">
+            <a:pPr marL="0" indent="0">
               <a:buNone/>
             </a:pPr>
             <a:r>
@@ -16602,6 +15974,13 @@
           </a:solidFill>
           <a:ln/>
         </p:spPr>
+        <p:txBody>
+          <a:bodyPr/>
+          <a:lstStyle/>
+          <a:p>
+            <a:endParaRPr lang="en-US"/>
+          </a:p>
+        </p:txBody>
       </p:sp>
       <p:sp>
         <p:nvSpPr>
@@ -16624,6 +16003,13 @@
           </a:solidFill>
           <a:ln/>
         </p:spPr>
+        <p:txBody>
+          <a:bodyPr/>
+          <a:lstStyle/>
+          <a:p>
+            <a:endParaRPr lang="en-US"/>
+          </a:p>
+        </p:txBody>
       </p:sp>
       <p:sp>
         <p:nvSpPr>
@@ -16646,7 +16032,7 @@
           <a:bodyPr wrap="square" lIns="0" tIns="0" rIns="0" bIns="0" rtlCol="0" anchor="t"/>
           <a:lstStyle/>
           <a:p>
-            <a:pPr indent="0" marL="0">
+            <a:pPr marL="0" indent="0">
               <a:buNone/>
             </a:pPr>
             <a:r>
@@ -16682,7 +16068,7 @@
           <a:bodyPr wrap="square" lIns="0" tIns="0" rIns="0" bIns="0" rtlCol="0" anchor="t"/>
           <a:lstStyle/>
           <a:p>
-            <a:pPr indent="0" marL="0">
+            <a:pPr marL="0" indent="0">
               <a:buNone/>
             </a:pPr>
             <a:r>
@@ -16718,6 +16104,13 @@
           </a:solidFill>
           <a:ln/>
         </p:spPr>
+        <p:txBody>
+          <a:bodyPr/>
+          <a:lstStyle/>
+          <a:p>
+            <a:endParaRPr lang="en-US"/>
+          </a:p>
+        </p:txBody>
       </p:sp>
       <p:sp>
         <p:nvSpPr>
@@ -16740,7 +16133,7 @@
           <a:bodyPr wrap="square" lIns="0" tIns="0" rIns="0" bIns="0" rtlCol="0" anchor="t"/>
           <a:lstStyle/>
           <a:p>
-            <a:pPr indent="0" marL="0">
+            <a:pPr marL="0" indent="0">
               <a:buNone/>
             </a:pPr>
             <a:r>
@@ -16852,6 +16245,13 @@
           </a:solidFill>
           <a:ln/>
         </p:spPr>
+        <p:txBody>
+          <a:bodyPr/>
+          <a:lstStyle/>
+          <a:p>
+            <a:endParaRPr lang="en-US"/>
+          </a:p>
+        </p:txBody>
       </p:sp>
       <p:sp>
         <p:nvSpPr>
@@ -16874,7 +16274,7 @@
           <a:bodyPr wrap="square" lIns="0" tIns="0" rIns="0" bIns="0" rtlCol="0" anchor="t"/>
           <a:lstStyle/>
           <a:p>
-            <a:pPr indent="0" marL="0">
+            <a:pPr marL="0" indent="0">
               <a:buNone/>
             </a:pPr>
             <a:r>
@@ -16986,7 +16386,7 @@
           <a:bodyPr wrap="square" lIns="0" tIns="0" rIns="0" bIns="0" rtlCol="0" anchor="t"/>
           <a:lstStyle/>
           <a:p>
-            <a:pPr indent="0" marL="0">
+            <a:pPr marL="0" indent="0">
               <a:buNone/>
             </a:pPr>
             <a:r>
@@ -17003,7 +16403,7 @@
       </p:sp>
       <p:sp>
         <p:nvSpPr>
-          <p:cNvPr id="25" name="Slide Number Placeholder 0"/>
+          <p:cNvPr id="31" name="Slide Number Placeholder 0"/>
           <p:cNvSpPr>
             <a:spLocks noGrp="1"/>
           </p:cNvSpPr>
@@ -17021,7 +16421,7 @@
           </a:prstGeom>
           <a:extLst>
             <a:ext uri="{C572A759-6A51-4108-AA02-DFA0A04FC94B}">
-              <ma14:wrappingTextBoxFlag xmlns:ma14="http://schemas.microsoft.com/office/mac/drawingml/2011/main" val="0"/>
+              <ma14:wrappingTextBoxFlag xmlns:ma14="http://schemas.microsoft.com/office/mac/drawingml/2011/main" xmlns="" val="0"/>
             </a:ext>
           </a:extLst>
         </p:spPr>
@@ -17039,7 +16439,7 @@
           <a:p>
             <a:pPr algn="r"/>
             <a:fld id="{F7021451-1387-4CA6-816F-3879F97B5CBC}" type="slidenum">
-              <a:rPr b="0" lang="en-US"/>
+              <a:rPr lang="en-US" b="0"/>
               <a:t>6</a:t>
             </a:fld>
             <a:endParaRPr lang="en-US"/>
@@ -17073,79 +16473,12 @@
       </p:grpSpPr>
       <p:sp>
         <p:nvSpPr>
-          <p:cNvPr id="2" name="presenter chip"/>
-          <p:cNvSpPr/>
-          <p:nvPr/>
-        </p:nvSpPr>
-        <p:spPr>
-          <a:xfrm>
-            <a:off x="9921240" y="502920"/>
-            <a:ext cx="1691640" cy="457200"/>
-          </a:xfrm>
-          <a:prstGeom prst="roundRect">
-            <a:avLst>
-              <a:gd name="adj" fmla="val 50000"/>
-            </a:avLst>
-          </a:prstGeom>
-          <a:solidFill>
-            <a:schemeClr val="tx2"/>
-          </a:solidFill>
-          <a:ln/>
-        </p:spPr>
-      </p:sp>
-      <p:sp>
-        <p:nvSpPr>
-          <p:cNvPr id="3" name="Text 1"/>
-          <p:cNvSpPr txBox="1"/>
-          <p:nvPr/>
-        </p:nvSpPr>
-        <p:spPr>
-          <a:xfrm>
-            <a:off x="9921240" y="502920"/>
-            <a:ext cx="1691640" cy="457200"/>
-          </a:xfrm>
-          <a:prstGeom prst="rect">
-            <a:avLst/>
-          </a:prstGeom>
-          <a:noFill/>
-          <a:ln/>
-        </p:spPr>
-        <p:txBody>
-          <a:bodyPr wrap="square" lIns="0" tIns="0" rIns="0" bIns="0" rtlCol="0" anchor="ctr"/>
-          <a:lstStyle/>
-          <a:p>
-            <a:pPr algn="ctr" indent="0" marL="0">
-              <a:buNone/>
-            </a:pPr>
-            <a:r>
-              <a:rPr lang="en-US" sz="1100" dirty="0">
-                <a:solidFill>
-                  <a:schemeClr val="accent6"/>
-                </a:solidFill>
-              </a:rPr>
-              <a:t>Presenter  </a:t>
-            </a:r>
-            <a:pPr algn="ctr" indent="0" marL="0">
-              <a:buNone/>
-            </a:pPr>
-            <a:r>
-              <a:rPr lang="en-US" sz="1300" b="1" dirty="0">
-                <a:solidFill>
-                  <a:schemeClr val="bg1"/>
-                </a:solidFill>
-              </a:rPr>
-              <a:t>Ayush</a:t>
-            </a:r>
-            <a:endParaRPr lang="en-US" sz="1600" dirty="0"/>
-          </a:p>
-        </p:txBody>
-      </p:sp>
-      <p:sp>
-        <p:nvSpPr>
           <p:cNvPr id="4" name="Text 0"/>
-          <p:cNvSpPr/>
+          <p:cNvSpPr>
+            <a:spLocks noGrp="1"/>
+          </p:cNvSpPr>
           <p:nvPr>
-            <p:ph idx="100" type="title" hasCustomPrompt="1"/>
+            <p:ph type="title" idx="100" hasCustomPrompt="1"/>
           </p:nvPr>
         </p:nvSpPr>
         <p:spPr>
@@ -17163,7 +16496,7 @@
           <a:bodyPr wrap="square" lIns="0" tIns="0" rIns="0" bIns="0" rtlCol="0" anchor="ctr"/>
           <a:lstStyle/>
           <a:p>
-            <a:pPr algn="l" indent="0" marL="0">
+            <a:pPr marL="0" indent="0" algn="l">
               <a:buNone/>
             </a:pPr>
             <a:r>
@@ -17202,6 +16535,13 @@
           </a:solidFill>
           <a:ln/>
         </p:spPr>
+        <p:txBody>
+          <a:bodyPr/>
+          <a:lstStyle/>
+          <a:p>
+            <a:endParaRPr lang="en-US"/>
+          </a:p>
+        </p:txBody>
       </p:sp>
       <p:sp>
         <p:nvSpPr>
@@ -17224,7 +16564,7 @@
           <a:bodyPr wrap="square" lIns="0" tIns="0" rIns="0" bIns="0" rtlCol="0" anchor="t"/>
           <a:lstStyle/>
           <a:p>
-            <a:pPr indent="0" marL="0">
+            <a:pPr marL="0" indent="0">
               <a:buNone/>
             </a:pPr>
             <a:r>
@@ -17258,6 +16598,13 @@
           </a:solidFill>
           <a:ln/>
         </p:spPr>
+        <p:txBody>
+          <a:bodyPr/>
+          <a:lstStyle/>
+          <a:p>
+            <a:endParaRPr lang="en-US"/>
+          </a:p>
+        </p:txBody>
       </p:sp>
       <p:sp>
         <p:nvSpPr>
@@ -17278,6 +16625,13 @@
           </a:solidFill>
           <a:ln/>
         </p:spPr>
+        <p:txBody>
+          <a:bodyPr/>
+          <a:lstStyle/>
+          <a:p>
+            <a:endParaRPr lang="en-US"/>
+          </a:p>
+        </p:txBody>
       </p:sp>
       <p:sp>
         <p:nvSpPr>
@@ -17298,6 +16652,13 @@
           </a:solidFill>
           <a:ln/>
         </p:spPr>
+        <p:txBody>
+          <a:bodyPr/>
+          <a:lstStyle/>
+          <a:p>
+            <a:endParaRPr lang="en-US"/>
+          </a:p>
+        </p:txBody>
       </p:sp>
       <p:sp>
         <p:nvSpPr>
@@ -17318,6 +16679,13 @@
           </a:solidFill>
           <a:ln/>
         </p:spPr>
+        <p:txBody>
+          <a:bodyPr/>
+          <a:lstStyle/>
+          <a:p>
+            <a:endParaRPr lang="en-US"/>
+          </a:p>
+        </p:txBody>
       </p:sp>
       <p:sp>
         <p:nvSpPr>
@@ -17338,6 +16706,13 @@
           </a:solidFill>
           <a:ln/>
         </p:spPr>
+        <p:txBody>
+          <a:bodyPr/>
+          <a:lstStyle/>
+          <a:p>
+            <a:endParaRPr lang="en-US"/>
+          </a:p>
+        </p:txBody>
       </p:sp>
       <p:sp>
         <p:nvSpPr>
@@ -17358,6 +16733,13 @@
           </a:solidFill>
           <a:ln/>
         </p:spPr>
+        <p:txBody>
+          <a:bodyPr/>
+          <a:lstStyle/>
+          <a:p>
+            <a:endParaRPr lang="en-US"/>
+          </a:p>
+        </p:txBody>
       </p:sp>
       <p:sp>
         <p:nvSpPr>
@@ -17378,6 +16760,13 @@
           </a:solidFill>
           <a:ln/>
         </p:spPr>
+        <p:txBody>
+          <a:bodyPr/>
+          <a:lstStyle/>
+          <a:p>
+            <a:endParaRPr lang="en-US"/>
+          </a:p>
+        </p:txBody>
       </p:sp>
       <p:sp>
         <p:nvSpPr>
@@ -17398,6 +16787,13 @@
           </a:solidFill>
           <a:ln/>
         </p:spPr>
+        <p:txBody>
+          <a:bodyPr/>
+          <a:lstStyle/>
+          <a:p>
+            <a:endParaRPr lang="en-US"/>
+          </a:p>
+        </p:txBody>
       </p:sp>
       <p:sp>
         <p:nvSpPr>
@@ -17418,6 +16814,13 @@
           </a:solidFill>
           <a:ln/>
         </p:spPr>
+        <p:txBody>
+          <a:bodyPr/>
+          <a:lstStyle/>
+          <a:p>
+            <a:endParaRPr lang="en-US"/>
+          </a:p>
+        </p:txBody>
       </p:sp>
       <p:sp>
         <p:nvSpPr>
@@ -17438,6 +16841,13 @@
           </a:solidFill>
           <a:ln/>
         </p:spPr>
+        <p:txBody>
+          <a:bodyPr/>
+          <a:lstStyle/>
+          <a:p>
+            <a:endParaRPr lang="en-US"/>
+          </a:p>
+        </p:txBody>
       </p:sp>
       <p:sp>
         <p:nvSpPr>
@@ -17458,6 +16868,13 @@
           </a:solidFill>
           <a:ln/>
         </p:spPr>
+        <p:txBody>
+          <a:bodyPr/>
+          <a:lstStyle/>
+          <a:p>
+            <a:endParaRPr lang="en-US"/>
+          </a:p>
+        </p:txBody>
       </p:sp>
       <p:sp>
         <p:nvSpPr>
@@ -17478,6 +16895,13 @@
           </a:solidFill>
           <a:ln/>
         </p:spPr>
+        <p:txBody>
+          <a:bodyPr/>
+          <a:lstStyle/>
+          <a:p>
+            <a:endParaRPr lang="en-US"/>
+          </a:p>
+        </p:txBody>
       </p:sp>
       <p:sp>
         <p:nvSpPr>
@@ -17498,6 +16922,13 @@
           </a:solidFill>
           <a:ln/>
         </p:spPr>
+        <p:txBody>
+          <a:bodyPr/>
+          <a:lstStyle/>
+          <a:p>
+            <a:endParaRPr lang="en-US"/>
+          </a:p>
+        </p:txBody>
       </p:sp>
       <p:sp>
         <p:nvSpPr>
@@ -17518,6 +16949,13 @@
           </a:solidFill>
           <a:ln/>
         </p:spPr>
+        <p:txBody>
+          <a:bodyPr/>
+          <a:lstStyle/>
+          <a:p>
+            <a:endParaRPr lang="en-US"/>
+          </a:p>
+        </p:txBody>
       </p:sp>
       <p:sp>
         <p:nvSpPr>
@@ -17538,6 +16976,13 @@
           </a:solidFill>
           <a:ln/>
         </p:spPr>
+        <p:txBody>
+          <a:bodyPr/>
+          <a:lstStyle/>
+          <a:p>
+            <a:endParaRPr lang="en-US"/>
+          </a:p>
+        </p:txBody>
       </p:sp>
       <p:sp>
         <p:nvSpPr>
@@ -17558,6 +17003,13 @@
           </a:solidFill>
           <a:ln/>
         </p:spPr>
+        <p:txBody>
+          <a:bodyPr/>
+          <a:lstStyle/>
+          <a:p>
+            <a:endParaRPr lang="en-US"/>
+          </a:p>
+        </p:txBody>
       </p:sp>
       <p:sp>
         <p:nvSpPr>
@@ -17578,6 +17030,13 @@
           </a:solidFill>
           <a:ln/>
         </p:spPr>
+        <p:txBody>
+          <a:bodyPr/>
+          <a:lstStyle/>
+          <a:p>
+            <a:endParaRPr lang="en-US"/>
+          </a:p>
+        </p:txBody>
       </p:sp>
       <p:sp>
         <p:nvSpPr>
@@ -17598,6 +17057,13 @@
           </a:solidFill>
           <a:ln/>
         </p:spPr>
+        <p:txBody>
+          <a:bodyPr/>
+          <a:lstStyle/>
+          <a:p>
+            <a:endParaRPr lang="en-US"/>
+          </a:p>
+        </p:txBody>
       </p:sp>
       <p:sp>
         <p:nvSpPr>
@@ -17618,6 +17084,13 @@
           </a:solidFill>
           <a:ln/>
         </p:spPr>
+        <p:txBody>
+          <a:bodyPr/>
+          <a:lstStyle/>
+          <a:p>
+            <a:endParaRPr lang="en-US"/>
+          </a:p>
+        </p:txBody>
       </p:sp>
       <p:sp>
         <p:nvSpPr>
@@ -17638,6 +17111,13 @@
           </a:solidFill>
           <a:ln/>
         </p:spPr>
+        <p:txBody>
+          <a:bodyPr/>
+          <a:lstStyle/>
+          <a:p>
+            <a:endParaRPr lang="en-US"/>
+          </a:p>
+        </p:txBody>
       </p:sp>
       <p:sp>
         <p:nvSpPr>
@@ -17658,6 +17138,13 @@
           </a:solidFill>
           <a:ln/>
         </p:spPr>
+        <p:txBody>
+          <a:bodyPr/>
+          <a:lstStyle/>
+          <a:p>
+            <a:endParaRPr lang="en-US"/>
+          </a:p>
+        </p:txBody>
       </p:sp>
       <p:sp>
         <p:nvSpPr>
@@ -17678,6 +17165,13 @@
           </a:solidFill>
           <a:ln/>
         </p:spPr>
+        <p:txBody>
+          <a:bodyPr/>
+          <a:lstStyle/>
+          <a:p>
+            <a:endParaRPr lang="en-US"/>
+          </a:p>
+        </p:txBody>
       </p:sp>
       <p:sp>
         <p:nvSpPr>
@@ -17698,6 +17192,13 @@
           </a:solidFill>
           <a:ln/>
         </p:spPr>
+        <p:txBody>
+          <a:bodyPr/>
+          <a:lstStyle/>
+          <a:p>
+            <a:endParaRPr lang="en-US"/>
+          </a:p>
+        </p:txBody>
       </p:sp>
       <p:sp>
         <p:nvSpPr>
@@ -17718,6 +17219,13 @@
           </a:solidFill>
           <a:ln/>
         </p:spPr>
+        <p:txBody>
+          <a:bodyPr/>
+          <a:lstStyle/>
+          <a:p>
+            <a:endParaRPr lang="en-US"/>
+          </a:p>
+        </p:txBody>
       </p:sp>
       <p:sp>
         <p:nvSpPr>
@@ -17738,6 +17246,13 @@
           </a:solidFill>
           <a:ln/>
         </p:spPr>
+        <p:txBody>
+          <a:bodyPr/>
+          <a:lstStyle/>
+          <a:p>
+            <a:endParaRPr lang="en-US"/>
+          </a:p>
+        </p:txBody>
       </p:sp>
       <p:sp>
         <p:nvSpPr>
@@ -17760,7 +17275,7 @@
           <a:bodyPr wrap="square" lIns="0" tIns="0" rIns="0" bIns="0" rtlCol="0" anchor="t"/>
           <a:lstStyle/>
           <a:p>
-            <a:pPr indent="0" marL="0">
+            <a:pPr marL="0" indent="0">
               <a:buNone/>
             </a:pPr>
             <a:r>
@@ -17872,7 +17387,7 @@
           <a:bodyPr wrap="square" lIns="0" tIns="0" rIns="0" bIns="0" rtlCol="0" anchor="t"/>
           <a:lstStyle/>
           <a:p>
-            <a:pPr indent="0" marL="0">
+            <a:pPr marL="0" indent="0">
               <a:buNone/>
             </a:pPr>
             <a:r>
@@ -17908,7 +17423,7 @@
           <a:bodyPr wrap="square" lIns="0" tIns="0" rIns="0" bIns="0" rtlCol="0" anchor="t"/>
           <a:lstStyle/>
           <a:p>
-            <a:pPr indent="0" marL="0">
+            <a:pPr marL="0" indent="0">
               <a:buNone/>
             </a:pPr>
             <a:r>
@@ -17944,7 +17459,7 @@
           <a:bodyPr wrap="square" lIns="0" tIns="0" rIns="0" bIns="0" rtlCol="0" anchor="t"/>
           <a:lstStyle/>
           <a:p>
-            <a:pPr indent="0" marL="0">
+            <a:pPr marL="0" indent="0">
               <a:buNone/>
             </a:pPr>
             <a:r>
@@ -17980,7 +17495,7 @@
           <a:bodyPr wrap="square" lIns="0" tIns="0" rIns="0" bIns="0" rtlCol="0" anchor="t"/>
           <a:lstStyle/>
           <a:p>
-            <a:pPr indent="0" marL="0">
+            <a:pPr marL="0" indent="0">
               <a:buNone/>
             </a:pPr>
             <a:r>
@@ -18016,7 +17531,7 @@
           <a:bodyPr wrap="square" lIns="0" tIns="0" rIns="0" bIns="0" rtlCol="0" anchor="t"/>
           <a:lstStyle/>
           <a:p>
-            <a:pPr indent="0" marL="0">
+            <a:pPr marL="0" indent="0">
               <a:buNone/>
             </a:pPr>
             <a:r>
@@ -18052,7 +17567,7 @@
           <a:bodyPr wrap="square" lIns="0" tIns="0" rIns="0" bIns="0" rtlCol="0" anchor="t"/>
           <a:lstStyle/>
           <a:p>
-            <a:pPr indent="0" marL="0">
+            <a:pPr marL="0" indent="0">
               <a:buNone/>
             </a:pPr>
             <a:r>
@@ -18088,7 +17603,7 @@
           <a:bodyPr wrap="square" lIns="0" tIns="0" rIns="0" bIns="0" rtlCol="0" anchor="t"/>
           <a:lstStyle/>
           <a:p>
-            <a:pPr indent="0" marL="0">
+            <a:pPr marL="0" indent="0">
               <a:buNone/>
             </a:pPr>
             <a:r>
@@ -18124,7 +17639,7 @@
           <a:bodyPr wrap="square" lIns="0" tIns="0" rIns="0" bIns="0" rtlCol="0" anchor="t"/>
           <a:lstStyle/>
           <a:p>
-            <a:pPr indent="0" marL="0">
+            <a:pPr marL="0" indent="0">
               <a:buNone/>
             </a:pPr>
             <a:r>
@@ -18160,7 +17675,7 @@
           <a:bodyPr wrap="square" lIns="0" tIns="0" rIns="0" bIns="0" rtlCol="0" anchor="t"/>
           <a:lstStyle/>
           <a:p>
-            <a:pPr indent="0" marL="0">
+            <a:pPr marL="0" indent="0">
               <a:buNone/>
             </a:pPr>
             <a:r>
@@ -18196,7 +17711,7 @@
           <a:bodyPr wrap="square" lIns="0" tIns="0" rIns="0" bIns="0" rtlCol="0" anchor="t"/>
           <a:lstStyle/>
           <a:p>
-            <a:pPr indent="0" marL="0">
+            <a:pPr marL="0" indent="0">
               <a:buNone/>
             </a:pPr>
             <a:r>
@@ -18232,7 +17747,7 @@
           <a:bodyPr wrap="square" lIns="0" tIns="0" rIns="0" bIns="0" rtlCol="0" anchor="t"/>
           <a:lstStyle/>
           <a:p>
-            <a:pPr indent="0" marL="0">
+            <a:pPr marL="0" indent="0">
               <a:buNone/>
             </a:pPr>
             <a:r>
@@ -18268,7 +17783,7 @@
           <a:bodyPr wrap="square" lIns="0" tIns="0" rIns="0" bIns="0" rtlCol="0" anchor="t"/>
           <a:lstStyle/>
           <a:p>
-            <a:pPr indent="0" marL="0">
+            <a:pPr marL="0" indent="0">
               <a:buNone/>
             </a:pPr>
             <a:r>
@@ -18304,7 +17819,7 @@
           <a:bodyPr wrap="square" lIns="0" tIns="0" rIns="0" bIns="0" rtlCol="0" anchor="t"/>
           <a:lstStyle/>
           <a:p>
-            <a:pPr indent="0" marL="0">
+            <a:pPr marL="0" indent="0">
               <a:buNone/>
             </a:pPr>
             <a:r>
@@ -18340,7 +17855,7 @@
           <a:bodyPr wrap="square" lIns="0" tIns="0" rIns="0" bIns="0" rtlCol="0" anchor="t"/>
           <a:lstStyle/>
           <a:p>
-            <a:pPr indent="0" marL="0">
+            <a:pPr marL="0" indent="0">
               <a:buNone/>
             </a:pPr>
             <a:r>
@@ -18357,7 +17872,7 @@
       </p:sp>
       <p:sp>
         <p:nvSpPr>
-          <p:cNvPr id="25" name="Slide Number Placeholder 0"/>
+          <p:cNvPr id="48" name="Slide Number Placeholder 0"/>
           <p:cNvSpPr>
             <a:spLocks noGrp="1"/>
           </p:cNvSpPr>
@@ -18375,7 +17890,7 @@
           </a:prstGeom>
           <a:extLst>
             <a:ext uri="{C572A759-6A51-4108-AA02-DFA0A04FC94B}">
-              <ma14:wrappingTextBoxFlag xmlns:ma14="http://schemas.microsoft.com/office/mac/drawingml/2011/main" val="0"/>
+              <ma14:wrappingTextBoxFlag xmlns:ma14="http://schemas.microsoft.com/office/mac/drawingml/2011/main" xmlns="" val="0"/>
             </a:ext>
           </a:extLst>
         </p:spPr>
@@ -18393,7 +17908,7 @@
           <a:p>
             <a:pPr algn="r"/>
             <a:fld id="{F7021451-1387-4CA6-816F-3879F97B5CBC}" type="slidenum">
-              <a:rPr b="0" lang="en-US"/>
+              <a:rPr lang="en-US" b="0"/>
               <a:t>7</a:t>
             </a:fld>
             <a:endParaRPr lang="en-US"/>
@@ -18427,79 +17942,12 @@
       </p:grpSpPr>
       <p:sp>
         <p:nvSpPr>
-          <p:cNvPr id="2" name="presenter chip"/>
-          <p:cNvSpPr/>
-          <p:nvPr/>
-        </p:nvSpPr>
-        <p:spPr>
-          <a:xfrm>
-            <a:off x="9921240" y="502920"/>
-            <a:ext cx="1691640" cy="457200"/>
-          </a:xfrm>
-          <a:prstGeom prst="roundRect">
-            <a:avLst>
-              <a:gd name="adj" fmla="val 50000"/>
-            </a:avLst>
-          </a:prstGeom>
-          <a:solidFill>
-            <a:schemeClr val="tx2"/>
-          </a:solidFill>
-          <a:ln/>
-        </p:spPr>
-      </p:sp>
-      <p:sp>
-        <p:nvSpPr>
-          <p:cNvPr id="3" name="Text 1"/>
-          <p:cNvSpPr txBox="1"/>
-          <p:nvPr/>
-        </p:nvSpPr>
-        <p:spPr>
-          <a:xfrm>
-            <a:off x="9921240" y="502920"/>
-            <a:ext cx="1691640" cy="457200"/>
-          </a:xfrm>
-          <a:prstGeom prst="rect">
-            <a:avLst/>
-          </a:prstGeom>
-          <a:noFill/>
-          <a:ln/>
-        </p:spPr>
-        <p:txBody>
-          <a:bodyPr wrap="square" lIns="0" tIns="0" rIns="0" bIns="0" rtlCol="0" anchor="ctr"/>
-          <a:lstStyle/>
-          <a:p>
-            <a:pPr algn="ctr" indent="0" marL="0">
-              <a:buNone/>
-            </a:pPr>
-            <a:r>
-              <a:rPr lang="en-US" sz="1100" dirty="0">
-                <a:solidFill>
-                  <a:schemeClr val="accent6"/>
-                </a:solidFill>
-              </a:rPr>
-              <a:t>Presenter  </a:t>
-            </a:r>
-            <a:pPr algn="ctr" indent="0" marL="0">
-              <a:buNone/>
-            </a:pPr>
-            <a:r>
-              <a:rPr lang="en-US" sz="1300" b="1" dirty="0">
-                <a:solidFill>
-                  <a:schemeClr val="bg1"/>
-                </a:solidFill>
-              </a:rPr>
-              <a:t>Ayush</a:t>
-            </a:r>
-            <a:endParaRPr lang="en-US" sz="1600" dirty="0"/>
-          </a:p>
-        </p:txBody>
-      </p:sp>
-      <p:sp>
-        <p:nvSpPr>
           <p:cNvPr id="4" name="Text 0"/>
-          <p:cNvSpPr/>
+          <p:cNvSpPr>
+            <a:spLocks noGrp="1"/>
+          </p:cNvSpPr>
           <p:nvPr>
-            <p:ph idx="100" type="title" hasCustomPrompt="1"/>
+            <p:ph type="title" idx="100" hasCustomPrompt="1"/>
           </p:nvPr>
         </p:nvSpPr>
         <p:spPr>
@@ -18517,7 +17965,7 @@
           <a:bodyPr wrap="square" lIns="0" tIns="0" rIns="0" bIns="0" rtlCol="0" anchor="ctr"/>
           <a:lstStyle/>
           <a:p>
-            <a:pPr algn="l" indent="0" marL="0">
+            <a:pPr marL="0" indent="0" algn="l">
               <a:buNone/>
             </a:pPr>
             <a:r>
@@ -18537,14 +17985,14 @@
       </p:sp>
       <p:pic>
         <p:nvPicPr>
-          <p:cNvPr id="5" name="bn structure" descr="Directed graph: age, sex and chol point to target; target points to the test findings; extra edges cp to exang and oldpeak to slope">    </p:cNvPr>
+          <p:cNvPr id="5" name="bn structure" descr="Directed graph: age, sex and chol point to target; target points to the test findings; extra edges cp to exang and oldpeak to slope"/>
           <p:cNvPicPr>
             <a:picLocks noChangeAspect="1"/>
           </p:cNvPicPr>
           <p:nvPr/>
         </p:nvPicPr>
         <p:blipFill>
-          <a:blip r:embed="rId1"/>
+          <a:blip r:embed="rId3"/>
           <a:stretch>
             <a:fillRect/>
           </a:stretch>
@@ -18580,6 +18028,13 @@
           </a:solidFill>
           <a:ln/>
         </p:spPr>
+        <p:txBody>
+          <a:bodyPr/>
+          <a:lstStyle/>
+          <a:p>
+            <a:endParaRPr lang="en-US"/>
+          </a:p>
+        </p:txBody>
       </p:sp>
       <p:sp>
         <p:nvSpPr>
@@ -18713,7 +18168,7 @@
           </a:prstGeom>
           <a:extLst>
             <a:ext uri="{C572A759-6A51-4108-AA02-DFA0A04FC94B}">
-              <ma14:wrappingTextBoxFlag xmlns:ma14="http://schemas.microsoft.com/office/mac/drawingml/2011/main" val="0"/>
+              <ma14:wrappingTextBoxFlag xmlns:ma14="http://schemas.microsoft.com/office/mac/drawingml/2011/main" xmlns="" val="0"/>
             </a:ext>
           </a:extLst>
         </p:spPr>
@@ -18731,7 +18186,7 @@
           <a:p>
             <a:pPr algn="r"/>
             <a:fld id="{F7021451-1387-4CA6-816F-3879F97B5CBC}" type="slidenum">
-              <a:rPr b="0" lang="en-US"/>
+              <a:rPr lang="en-US" b="0"/>
               <a:t>8</a:t>
             </a:fld>
             <a:endParaRPr lang="en-US"/>
@@ -18765,79 +18220,12 @@
       </p:grpSpPr>
       <p:sp>
         <p:nvSpPr>
-          <p:cNvPr id="2" name="presenter chip"/>
-          <p:cNvSpPr/>
-          <p:nvPr/>
-        </p:nvSpPr>
-        <p:spPr>
-          <a:xfrm>
-            <a:off x="9921240" y="502920"/>
-            <a:ext cx="1691640" cy="457200"/>
-          </a:xfrm>
-          <a:prstGeom prst="roundRect">
-            <a:avLst>
-              <a:gd name="adj" fmla="val 50000"/>
-            </a:avLst>
-          </a:prstGeom>
-          <a:solidFill>
-            <a:schemeClr val="tx2"/>
-          </a:solidFill>
-          <a:ln/>
-        </p:spPr>
-      </p:sp>
-      <p:sp>
-        <p:nvSpPr>
-          <p:cNvPr id="3" name="Text 1"/>
-          <p:cNvSpPr txBox="1"/>
-          <p:nvPr/>
-        </p:nvSpPr>
-        <p:spPr>
-          <a:xfrm>
-            <a:off x="9921240" y="502920"/>
-            <a:ext cx="1691640" cy="457200"/>
-          </a:xfrm>
-          <a:prstGeom prst="rect">
-            <a:avLst/>
-          </a:prstGeom>
-          <a:noFill/>
-          <a:ln/>
-        </p:spPr>
-        <p:txBody>
-          <a:bodyPr wrap="square" lIns="0" tIns="0" rIns="0" bIns="0" rtlCol="0" anchor="ctr"/>
-          <a:lstStyle/>
-          <a:p>
-            <a:pPr algn="ctr" indent="0" marL="0">
-              <a:buNone/>
-            </a:pPr>
-            <a:r>
-              <a:rPr lang="en-US" sz="1100" dirty="0">
-                <a:solidFill>
-                  <a:schemeClr val="accent6"/>
-                </a:solidFill>
-              </a:rPr>
-              <a:t>Presenter  </a:t>
-            </a:r>
-            <a:pPr algn="ctr" indent="0" marL="0">
-              <a:buNone/>
-            </a:pPr>
-            <a:r>
-              <a:rPr lang="en-US" sz="1300" b="1" dirty="0">
-                <a:solidFill>
-                  <a:schemeClr val="bg1"/>
-                </a:solidFill>
-              </a:rPr>
-              <a:t>Kabir</a:t>
-            </a:r>
-            <a:endParaRPr lang="en-US" sz="1600" dirty="0"/>
-          </a:p>
-        </p:txBody>
-      </p:sp>
-      <p:sp>
-        <p:nvSpPr>
           <p:cNvPr id="4" name="Text 0"/>
-          <p:cNvSpPr/>
+          <p:cNvSpPr>
+            <a:spLocks noGrp="1"/>
+          </p:cNvSpPr>
           <p:nvPr>
-            <p:ph idx="100" type="title" hasCustomPrompt="1"/>
+            <p:ph type="title" idx="100" hasCustomPrompt="1"/>
           </p:nvPr>
         </p:nvSpPr>
         <p:spPr>
@@ -18855,7 +18243,7 @@
           <a:bodyPr wrap="square" lIns="0" tIns="0" rIns="0" bIns="0" rtlCol="0" anchor="ctr"/>
           <a:lstStyle/>
           <a:p>
-            <a:pPr algn="l" indent="0" marL="0">
+            <a:pPr marL="0" indent="0" algn="l">
               <a:buNone/>
             </a:pPr>
             <a:r>
@@ -18894,6 +18282,13 @@
           </a:solidFill>
           <a:ln/>
         </p:spPr>
+        <p:txBody>
+          <a:bodyPr/>
+          <a:lstStyle/>
+          <a:p>
+            <a:endParaRPr lang="en-US"/>
+          </a:p>
+        </p:txBody>
       </p:sp>
       <p:sp>
         <p:nvSpPr>
@@ -18916,7 +18311,7 @@
           <a:bodyPr wrap="square" lIns="0" tIns="0" rIns="0" bIns="0" rtlCol="0" anchor="t"/>
           <a:lstStyle/>
           <a:p>
-            <a:pPr indent="0" marL="0">
+            <a:pPr marL="0" indent="0">
               <a:buNone/>
             </a:pPr>
             <a:r>
@@ -19049,6 +18444,13 @@
           </a:solidFill>
           <a:ln/>
         </p:spPr>
+        <p:txBody>
+          <a:bodyPr/>
+          <a:lstStyle/>
+          <a:p>
+            <a:endParaRPr lang="en-US"/>
+          </a:p>
+        </p:txBody>
       </p:sp>
       <p:sp>
         <p:nvSpPr>
@@ -19071,7 +18473,7 @@
           <a:bodyPr wrap="square" lIns="0" tIns="0" rIns="0" bIns="0" rtlCol="0" anchor="t"/>
           <a:lstStyle/>
           <a:p>
-            <a:pPr indent="0" marL="0">
+            <a:pPr marL="0" indent="0">
               <a:buNone/>
             </a:pPr>
             <a:r>
@@ -19110,7 +18512,7 @@
           <a:bodyPr wrap="square" lIns="0" tIns="0" rIns="0" bIns="0" rtlCol="0" anchor="t"/>
           <a:lstStyle/>
           <a:p>
-            <a:pPr indent="0" marL="0">
+            <a:pPr marL="0" indent="0">
               <a:buNone/>
             </a:pPr>
             <a:r>
@@ -19146,6 +18548,13 @@
           </a:solidFill>
           <a:ln/>
         </p:spPr>
+        <p:txBody>
+          <a:bodyPr/>
+          <a:lstStyle/>
+          <a:p>
+            <a:endParaRPr lang="en-US"/>
+          </a:p>
+        </p:txBody>
       </p:sp>
       <p:sp>
         <p:nvSpPr>
@@ -19168,7 +18577,7 @@
           <a:bodyPr wrap="square" lIns="0" tIns="0" rIns="0" bIns="0" rtlCol="0" anchor="t"/>
           <a:lstStyle/>
           <a:p>
-            <a:pPr indent="0" marL="0">
+            <a:pPr marL="0" indent="0">
               <a:buNone/>
             </a:pPr>
             <a:r>
@@ -19207,7 +18616,7 @@
           <a:bodyPr wrap="square" lIns="0" tIns="0" rIns="0" bIns="0" rtlCol="0" anchor="t"/>
           <a:lstStyle/>
           <a:p>
-            <a:pPr indent="0" marL="0">
+            <a:pPr marL="0" indent="0">
               <a:buNone/>
             </a:pPr>
             <a:r>
@@ -19242,7 +18651,7 @@
           </a:prstGeom>
           <a:extLst>
             <a:ext uri="{C572A759-6A51-4108-AA02-DFA0A04FC94B}">
-              <ma14:wrappingTextBoxFlag xmlns:ma14="http://schemas.microsoft.com/office/mac/drawingml/2011/main" val="0"/>
+              <ma14:wrappingTextBoxFlag xmlns:ma14="http://schemas.microsoft.com/office/mac/drawingml/2011/main" xmlns="" val="0"/>
             </a:ext>
           </a:extLst>
         </p:spPr>
@@ -19260,7 +18669,7 @@
           <a:p>
             <a:pPr algn="r"/>
             <a:fld id="{F7021451-1387-4CA6-816F-3879F97B5CBC}" type="slidenum">
-              <a:rPr b="0" lang="en-US"/>
+              <a:rPr lang="en-US" b="0"/>
               <a:t>9</a:t>
             </a:fld>
             <a:endParaRPr lang="en-US"/>
@@ -19568,4 +18977,319 @@
     </a:ext>
   </a:extLst>
 </a:theme>
+</file>
+
+<file path=ppt/theme/theme2.xml><?xml version="1.0" encoding="utf-8"?>
+<a:theme xmlns:a="http://schemas.openxmlformats.org/drawingml/2006/main" name="Office Theme">
+  <a:themeElements>
+    <a:clrScheme name="Office">
+      <a:dk1>
+        <a:sysClr val="windowText" lastClr="000000"/>
+      </a:dk1>
+      <a:lt1>
+        <a:sysClr val="window" lastClr="FFFFFF"/>
+      </a:lt1>
+      <a:dk2>
+        <a:srgbClr val="0E2841"/>
+      </a:dk2>
+      <a:lt2>
+        <a:srgbClr val="E8E8E8"/>
+      </a:lt2>
+      <a:accent1>
+        <a:srgbClr val="156082"/>
+      </a:accent1>
+      <a:accent2>
+        <a:srgbClr val="E97132"/>
+      </a:accent2>
+      <a:accent3>
+        <a:srgbClr val="196B24"/>
+      </a:accent3>
+      <a:accent4>
+        <a:srgbClr val="0F9ED5"/>
+      </a:accent4>
+      <a:accent5>
+        <a:srgbClr val="A02B93"/>
+      </a:accent5>
+      <a:accent6>
+        <a:srgbClr val="4EA72E"/>
+      </a:accent6>
+      <a:hlink>
+        <a:srgbClr val="467886"/>
+      </a:hlink>
+      <a:folHlink>
+        <a:srgbClr val="96607D"/>
+      </a:folHlink>
+    </a:clrScheme>
+    <a:fontScheme name="Office">
+      <a:majorFont>
+        <a:latin typeface="Aptos Display" panose="02110004020202020204"/>
+        <a:ea typeface=""/>
+        <a:cs typeface=""/>
+        <a:font script="Jpan" typeface="游ゴシック Light"/>
+        <a:font script="Hang" typeface="맑은 고딕"/>
+        <a:font script="Hans" typeface="等线 Light"/>
+        <a:font script="Hant" typeface="新細明體"/>
+        <a:font script="Arab" typeface="Times New Roman"/>
+        <a:font script="Hebr" typeface="Times New Roman"/>
+        <a:font script="Thai" typeface="Angsana New"/>
+        <a:font script="Ethi" typeface="Nyala"/>
+        <a:font script="Beng" typeface="Vrinda"/>
+        <a:font script="Gujr" typeface="Shruti"/>
+        <a:font script="Khmr" typeface="MoolBoran"/>
+        <a:font script="Knda" typeface="Tunga"/>
+        <a:font script="Guru" typeface="Raavi"/>
+        <a:font script="Cans" typeface="Euphemia"/>
+        <a:font script="Cher" typeface="Plantagenet Cherokee"/>
+        <a:font script="Yiii" typeface="Microsoft Yi Baiti"/>
+        <a:font script="Tibt" typeface="Microsoft Himalaya"/>
+        <a:font script="Thaa" typeface="MV Boli"/>
+        <a:font script="Deva" typeface="Mangal"/>
+        <a:font script="Telu" typeface="Gautami"/>
+        <a:font script="Taml" typeface="Latha"/>
+        <a:font script="Syrc" typeface="Estrangelo Edessa"/>
+        <a:font script="Orya" typeface="Kalinga"/>
+        <a:font script="Mlym" typeface="Kartika"/>
+        <a:font script="Laoo" typeface="DokChampa"/>
+        <a:font script="Sinh" typeface="Iskoola Pota"/>
+        <a:font script="Mong" typeface="Mongolian Baiti"/>
+        <a:font script="Viet" typeface="Times New Roman"/>
+        <a:font script="Uigh" typeface="Microsoft Uighur"/>
+        <a:font script="Geor" typeface="Sylfaen"/>
+        <a:font script="Armn" typeface="Arial"/>
+        <a:font script="Bugi" typeface="Leelawadee UI"/>
+        <a:font script="Bopo" typeface="Microsoft JhengHei"/>
+        <a:font script="Java" typeface="Javanese Text"/>
+        <a:font script="Lisu" typeface="Segoe UI"/>
+        <a:font script="Mymr" typeface="Myanmar Text"/>
+        <a:font script="Nkoo" typeface="Ebrima"/>
+        <a:font script="Olck" typeface="Nirmala UI"/>
+        <a:font script="Osma" typeface="Ebrima"/>
+        <a:font script="Phag" typeface="Phagspa"/>
+        <a:font script="Syrn" typeface="Estrangelo Edessa"/>
+        <a:font script="Syrj" typeface="Estrangelo Edessa"/>
+        <a:font script="Syre" typeface="Estrangelo Edessa"/>
+        <a:font script="Sora" typeface="Nirmala UI"/>
+        <a:font script="Tale" typeface="Microsoft Tai Le"/>
+        <a:font script="Talu" typeface="Microsoft New Tai Lue"/>
+        <a:font script="Tfng" typeface="Ebrima"/>
+      </a:majorFont>
+      <a:minorFont>
+        <a:latin typeface="Aptos" panose="02110004020202020204"/>
+        <a:ea typeface=""/>
+        <a:cs typeface=""/>
+        <a:font script="Jpan" typeface="游ゴシック"/>
+        <a:font script="Hang" typeface="맑은 고딕"/>
+        <a:font script="Hans" typeface="等线"/>
+        <a:font script="Hant" typeface="新細明體"/>
+        <a:font script="Arab" typeface="Arial"/>
+        <a:font script="Hebr" typeface="Arial"/>
+        <a:font script="Thai" typeface="Cordia New"/>
+        <a:font script="Ethi" typeface="Nyala"/>
+        <a:font script="Beng" typeface="Vrinda"/>
+        <a:font script="Gujr" typeface="Shruti"/>
+        <a:font script="Khmr" typeface="DaunPenh"/>
+        <a:font script="Knda" typeface="Tunga"/>
+        <a:font script="Guru" typeface="Raavi"/>
+        <a:font script="Cans" typeface="Euphemia"/>
+        <a:font script="Cher" typeface="Plantagenet Cherokee"/>
+        <a:font script="Yiii" typeface="Microsoft Yi Baiti"/>
+        <a:font script="Tibt" typeface="Microsoft Himalaya"/>
+        <a:font script="Thaa" typeface="MV Boli"/>
+        <a:font script="Deva" typeface="Mangal"/>
+        <a:font script="Telu" typeface="Gautami"/>
+        <a:font script="Taml" typeface="Latha"/>
+        <a:font script="Syrc" typeface="Estrangelo Edessa"/>
+        <a:font script="Orya" typeface="Kalinga"/>
+        <a:font script="Mlym" typeface="Kartika"/>
+        <a:font script="Laoo" typeface="DokChampa"/>
+        <a:font script="Sinh" typeface="Iskoola Pota"/>
+        <a:font script="Mong" typeface="Mongolian Baiti"/>
+        <a:font script="Viet" typeface="Arial"/>
+        <a:font script="Uigh" typeface="Microsoft Uighur"/>
+        <a:font script="Geor" typeface="Sylfaen"/>
+        <a:font script="Armn" typeface="Arial"/>
+        <a:font script="Bugi" typeface="Leelawadee UI"/>
+        <a:font script="Bopo" typeface="Microsoft JhengHei"/>
+        <a:font script="Java" typeface="Javanese Text"/>
+        <a:font script="Lisu" typeface="Segoe UI"/>
+        <a:font script="Mymr" typeface="Myanmar Text"/>
+        <a:font script="Nkoo" typeface="Ebrima"/>
+        <a:font script="Olck" typeface="Nirmala UI"/>
+        <a:font script="Osma" typeface="Ebrima"/>
+        <a:font script="Phag" typeface="Phagspa"/>
+        <a:font script="Syrn" typeface="Estrangelo Edessa"/>
+        <a:font script="Syrj" typeface="Estrangelo Edessa"/>
+        <a:font script="Syre" typeface="Estrangelo Edessa"/>
+        <a:font script="Sora" typeface="Nirmala UI"/>
+        <a:font script="Tale" typeface="Microsoft Tai Le"/>
+        <a:font script="Talu" typeface="Microsoft New Tai Lue"/>
+        <a:font script="Tfng" typeface="Ebrima"/>
+      </a:minorFont>
+    </a:fontScheme>
+    <a:fmtScheme name="Office">
+      <a:fillStyleLst>
+        <a:solidFill>
+          <a:schemeClr val="phClr"/>
+        </a:solidFill>
+        <a:gradFill rotWithShape="1">
+          <a:gsLst>
+            <a:gs pos="0">
+              <a:schemeClr val="phClr">
+                <a:lumMod val="110000"/>
+                <a:satMod val="105000"/>
+                <a:tint val="67000"/>
+              </a:schemeClr>
+            </a:gs>
+            <a:gs pos="50000">
+              <a:schemeClr val="phClr">
+                <a:lumMod val="105000"/>
+                <a:satMod val="103000"/>
+                <a:tint val="73000"/>
+              </a:schemeClr>
+            </a:gs>
+            <a:gs pos="100000">
+              <a:schemeClr val="phClr">
+                <a:lumMod val="105000"/>
+                <a:satMod val="109000"/>
+                <a:tint val="81000"/>
+              </a:schemeClr>
+            </a:gs>
+          </a:gsLst>
+          <a:lin ang="5400000" scaled="0"/>
+        </a:gradFill>
+        <a:gradFill rotWithShape="1">
+          <a:gsLst>
+            <a:gs pos="0">
+              <a:schemeClr val="phClr">
+                <a:satMod val="103000"/>
+                <a:lumMod val="102000"/>
+                <a:tint val="94000"/>
+              </a:schemeClr>
+            </a:gs>
+            <a:gs pos="50000">
+              <a:schemeClr val="phClr">
+                <a:satMod val="110000"/>
+                <a:lumMod val="100000"/>
+                <a:shade val="100000"/>
+              </a:schemeClr>
+            </a:gs>
+            <a:gs pos="100000">
+              <a:schemeClr val="phClr">
+                <a:lumMod val="99000"/>
+                <a:satMod val="120000"/>
+                <a:shade val="78000"/>
+              </a:schemeClr>
+            </a:gs>
+          </a:gsLst>
+          <a:lin ang="5400000" scaled="0"/>
+        </a:gradFill>
+      </a:fillStyleLst>
+      <a:lnStyleLst>
+        <a:ln w="12700" cap="flat" cmpd="sng" algn="ctr">
+          <a:solidFill>
+            <a:schemeClr val="phClr"/>
+          </a:solidFill>
+          <a:prstDash val="solid"/>
+          <a:miter lim="800000"/>
+        </a:ln>
+        <a:ln w="19050" cap="flat" cmpd="sng" algn="ctr">
+          <a:solidFill>
+            <a:schemeClr val="phClr"/>
+          </a:solidFill>
+          <a:prstDash val="solid"/>
+          <a:miter lim="800000"/>
+        </a:ln>
+        <a:ln w="25400" cap="flat" cmpd="sng" algn="ctr">
+          <a:solidFill>
+            <a:schemeClr val="phClr"/>
+          </a:solidFill>
+          <a:prstDash val="solid"/>
+          <a:miter lim="800000"/>
+        </a:ln>
+      </a:lnStyleLst>
+      <a:effectStyleLst>
+        <a:effectStyle>
+          <a:effectLst/>
+        </a:effectStyle>
+        <a:effectStyle>
+          <a:effectLst/>
+        </a:effectStyle>
+        <a:effectStyle>
+          <a:effectLst>
+            <a:outerShdw blurRad="57150" dist="19050" dir="5400000" algn="ctr" rotWithShape="0">
+              <a:srgbClr val="000000">
+                <a:alpha val="63000"/>
+              </a:srgbClr>
+            </a:outerShdw>
+          </a:effectLst>
+        </a:effectStyle>
+      </a:effectStyleLst>
+      <a:bgFillStyleLst>
+        <a:solidFill>
+          <a:schemeClr val="phClr"/>
+        </a:solidFill>
+        <a:solidFill>
+          <a:schemeClr val="phClr">
+            <a:tint val="95000"/>
+            <a:satMod val="170000"/>
+          </a:schemeClr>
+        </a:solidFill>
+        <a:gradFill rotWithShape="1">
+          <a:gsLst>
+            <a:gs pos="0">
+              <a:schemeClr val="phClr">
+                <a:tint val="93000"/>
+                <a:satMod val="150000"/>
+                <a:shade val="98000"/>
+                <a:lumMod val="102000"/>
+              </a:schemeClr>
+            </a:gs>
+            <a:gs pos="50000">
+              <a:schemeClr val="phClr">
+                <a:tint val="98000"/>
+                <a:satMod val="130000"/>
+                <a:shade val="90000"/>
+                <a:lumMod val="103000"/>
+              </a:schemeClr>
+            </a:gs>
+            <a:gs pos="100000">
+              <a:schemeClr val="phClr">
+                <a:shade val="63000"/>
+                <a:satMod val="120000"/>
+              </a:schemeClr>
+            </a:gs>
+          </a:gsLst>
+          <a:lin ang="5400000" scaled="0"/>
+        </a:gradFill>
+      </a:bgFillStyleLst>
+    </a:fmtScheme>
+  </a:themeElements>
+  <a:objectDefaults>
+    <a:lnDef>
+      <a:spPr/>
+      <a:bodyPr/>
+      <a:lstStyle/>
+      <a:style>
+        <a:lnRef idx="2">
+          <a:schemeClr val="accent1"/>
+        </a:lnRef>
+        <a:fillRef idx="0">
+          <a:schemeClr val="accent1"/>
+        </a:fillRef>
+        <a:effectRef idx="1">
+          <a:schemeClr val="accent1"/>
+        </a:effectRef>
+        <a:fontRef idx="minor">
+          <a:schemeClr val="tx1"/>
+        </a:fontRef>
+      </a:style>
+    </a:lnDef>
+  </a:objectDefaults>
+  <a:extraClrSchemeLst/>
+  <a:extLst>
+    <a:ext uri="{05A4C25C-085E-4340-85A3-A5531E510DB2}">
+      <thm15:themeFamily xmlns:thm15="http://schemas.microsoft.com/office/thememl/2012/main" name="Office Theme" id="{2E142A2C-CD16-42D6-873A-C26D2A0506FA}" vid="{1BDDFF52-6CD6-40A5-AB3C-68EB2F1E4D0A}"/>
+    </a:ext>
+  </a:extLst>
+</a:theme>
 </file>
--- a/reports/presentation/Heart_Disease_Risk_Modelling.pptx
+++ b/reports/presentation/Heart_Disease_Risk_Modelling.pptx
@@ -3498,28 +3498,46 @@
               <a:buNone/>
             </a:pPr>
             <a:r>
-              <a:rPr lang="en-US" sz="1600" b="1" dirty="0">
+              <a:rPr lang="en-US" sz="2200" b="1" dirty="0">
                 <a:solidFill>
                   <a:schemeClr val="bg1"/>
                 </a:solidFill>
               </a:rPr>
-              <a:t>Hardik  ·  Ayush  ·  Akshith  ·  Vansh  ·  Kabir</a:t>
+              <a:t>Ayush  ·  Vansh  ·  Hardik  ·  Akshith  ·  Kabir</a:t>
             </a:r>
             <a:endParaRPr lang="en-US" sz="1600" dirty="0"/>
           </a:p>
           <a:p>
             <a:pPr marL="0" indent="0">
+              <a:spcBef>
+                <a:spcPts val="1000"/>
+              </a:spcBef>
               <a:buNone/>
             </a:pPr>
             <a:r>
+              <a:rPr lang="en-US" sz="2000" b="1" dirty="0">
+                <a:solidFill>
+                  <a:schemeClr val="accent6"/>
+                </a:solidFill>
+              </a:rPr>
+              <a:t>Advanced Machine Learning  ·  Rishihood University</a:t>
+            </a:r>
+          </a:p>
+          <a:p>
+            <a:pPr marL="0" indent="0">
+              <a:spcBef>
+                <a:spcPts val="600"/>
+              </a:spcBef>
+              <a:buNone/>
+            </a:pPr>
+            <a:r>
               <a:rPr lang="en-US" sz="1400" dirty="0">
                 <a:solidFill>
                   <a:schemeClr val="accent6"/>
                 </a:solidFill>
               </a:rPr>
-              <a:t>[Course / institution]   ·   October 2026</a:t>
-            </a:r>
-            <a:endParaRPr lang="en-US" sz="1600" dirty="0"/>
+              <a:t>October 2026</a:t>
+            </a:r>
           </a:p>
         </p:txBody>
       </p:sp>
@@ -12618,9 +12636,9 @@
                         <a:buNone/>
                       </a:pPr>
                       <a:r>
-                        <a:rPr lang="en-US" sz="1500" b="1" dirty="0">
+                        <a:rPr lang="en-US" sz="2000" cap="all" b="1" dirty="0">
                           <a:solidFill>
-                            <a:schemeClr val="tx2"/>
+                            <a:schemeClr val="bg1"/>
                           </a:solidFill>
                           <a:latin typeface="Calibri" pitchFamily="34" charset="0"/>
                           <a:ea typeface="Calibri" pitchFamily="34" charset="-122"/>
@@ -12628,7 +12646,7 @@
                         </a:rPr>
                         <a:t>Ayush</a:t>
                       </a:r>
-                      <a:endParaRPr lang="en-US" sz="1500" dirty="0">
+                      <a:endParaRPr lang="en-US" sz="2000" dirty="0">
                         <a:latin typeface="Calibri" charset="0"/>
                         <a:ea typeface="Calibri" charset="0"/>
                         <a:cs typeface="Calibri" charset="0"/>
@@ -12673,7 +12691,7 @@
                       <a:tailEnd type="none" w="med" len="med"/>
                     </a:lnB>
                     <a:solidFill>
-                      <a:schemeClr val="bg2"/>
+                      <a:schemeClr val="accent1"/>
                     </a:solidFill>
                   </a:tcPr>
                 </a:tc>
@@ -12829,9 +12847,9 @@
                         <a:buNone/>
                       </a:pPr>
                       <a:r>
-                        <a:rPr lang="en-US" sz="1500" b="1" dirty="0">
+                        <a:rPr lang="en-US" sz="2000" cap="all" b="1" dirty="0">
                           <a:solidFill>
-                            <a:schemeClr val="tx2"/>
+                            <a:schemeClr val="bg1"/>
                           </a:solidFill>
                           <a:latin typeface="Calibri" pitchFamily="34" charset="0"/>
                           <a:ea typeface="Calibri" charset="0"/>
@@ -12839,7 +12857,7 @@
                         </a:rPr>
                         <a:t>Vansh</a:t>
                       </a:r>
-                      <a:endParaRPr lang="en-US" sz="1500" dirty="0">
+                      <a:endParaRPr lang="en-US" sz="2000" dirty="0">
                         <a:latin typeface="Calibri" charset="0"/>
                         <a:ea typeface="Calibri" charset="0"/>
                         <a:cs typeface="Calibri" charset="0"/>
@@ -12884,7 +12902,7 @@
                       <a:tailEnd type="none" w="med" len="med"/>
                     </a:lnB>
                     <a:solidFill>
-                      <a:schemeClr val="bg1"/>
+                      <a:schemeClr val="accent1"/>
                     </a:solidFill>
                   </a:tcPr>
                 </a:tc>
@@ -13040,9 +13058,9 @@
                         <a:buNone/>
                       </a:pPr>
                       <a:r>
-                        <a:rPr lang="en-US" sz="1500" b="1" dirty="0">
+                        <a:rPr lang="en-US" sz="2000" cap="all" b="1" dirty="0">
                           <a:solidFill>
-                            <a:schemeClr val="tx2"/>
+                            <a:schemeClr val="bg1"/>
                           </a:solidFill>
                           <a:latin typeface="Calibri" pitchFamily="34" charset="0"/>
                           <a:ea typeface="Calibri" pitchFamily="34" charset="-122"/>
@@ -13050,7 +13068,7 @@
                         </a:rPr>
                         <a:t>Hardik</a:t>
                       </a:r>
-                      <a:endParaRPr lang="en-US" sz="1500" dirty="0">
+                      <a:endParaRPr lang="en-US" sz="2000" dirty="0">
                         <a:latin typeface="Calibri" charset="0"/>
                         <a:ea typeface="Calibri" charset="0"/>
                         <a:cs typeface="Calibri" charset="0"/>
@@ -13095,7 +13113,7 @@
                       <a:tailEnd type="none" w="med" len="med"/>
                     </a:lnB>
                     <a:solidFill>
-                      <a:schemeClr val="bg2"/>
+                      <a:schemeClr val="accent1"/>
                     </a:solidFill>
                   </a:tcPr>
                 </a:tc>
@@ -13251,9 +13269,9 @@
                         <a:buNone/>
                       </a:pPr>
                       <a:r>
-                        <a:rPr lang="en-US" sz="1500" b="1" dirty="0">
+                        <a:rPr lang="en-US" sz="2000" cap="all" b="1" dirty="0">
                           <a:solidFill>
-                            <a:schemeClr val="tx2"/>
+                            <a:schemeClr val="bg1"/>
                           </a:solidFill>
                           <a:latin typeface="Calibri" pitchFamily="34" charset="0"/>
                           <a:ea typeface="Calibri" pitchFamily="34" charset="-122"/>
@@ -13261,7 +13279,7 @@
                         </a:rPr>
                         <a:t>Akshith</a:t>
                       </a:r>
-                      <a:endParaRPr lang="en-US" sz="1500" dirty="0">
+                      <a:endParaRPr lang="en-US" sz="2000" dirty="0">
                         <a:latin typeface="Calibri" charset="0"/>
                         <a:ea typeface="Calibri" charset="0"/>
                         <a:cs typeface="Calibri" charset="0"/>
@@ -13306,7 +13324,7 @@
                       <a:tailEnd type="none" w="med" len="med"/>
                     </a:lnB>
                     <a:solidFill>
-                      <a:schemeClr val="bg1"/>
+                      <a:schemeClr val="accent1"/>
                     </a:solidFill>
                   </a:tcPr>
                 </a:tc>
@@ -13462,9 +13480,9 @@
                         <a:buNone/>
                       </a:pPr>
                       <a:r>
-                        <a:rPr lang="en-US" sz="1500" b="1" dirty="0">
+                        <a:rPr lang="en-US" sz="2000" cap="all" b="1" dirty="0">
                           <a:solidFill>
-                            <a:schemeClr val="tx2"/>
+                            <a:schemeClr val="bg1"/>
                           </a:solidFill>
                           <a:latin typeface="Calibri" pitchFamily="34" charset="0"/>
                           <a:ea typeface="Calibri" pitchFamily="34" charset="-122"/>
@@ -13472,7 +13490,7 @@
                         </a:rPr>
                         <a:t>Kabir</a:t>
                       </a:r>
-                      <a:endParaRPr lang="en-US" sz="1500" dirty="0">
+                      <a:endParaRPr lang="en-US" sz="2000" dirty="0">
                         <a:latin typeface="Calibri" charset="0"/>
                         <a:ea typeface="Calibri" charset="0"/>
                         <a:cs typeface="Calibri" charset="0"/>
@@ -13517,7 +13535,7 @@
                       <a:tailEnd type="none" w="med" len="med"/>
                     </a:lnB>
                     <a:solidFill>
-                      <a:schemeClr val="bg2"/>
+                      <a:schemeClr val="accent1"/>
                     </a:solidFill>
                   </a:tcPr>
                 </a:tc>
